--- a/JiraGitLabSync_POC.pptx
+++ b/JiraGitLabSync_POC.pptx
@@ -10,9 +10,10 @@
     <p:sldId id="258" r:id="rId4"/>
     <p:sldId id="259" r:id="rId5"/>
     <p:sldId id="260" r:id="rId6"/>
+    <p:sldId id="261" r:id="rId7"/>
   </p:sldIdLst>
   <p:notesMasterIdLst>
-    <p:notesMasterId r:id="rId7"/>
+    <p:notesMasterId r:id="rId8"/>
   </p:notesMasterIdLst>
   <p:sldSz cx="9144000" cy="5143500"/>
   <p:notesSz cx="5143500" cy="9144000"/>
@@ -900,6 +901,94 @@
 </p:notes>
 </file>
 
+<file path=ppt/notesSlides/notesSlide6.xml><?xml version="1.0" encoding="utf-8"?>
+<p:notes xmlns:a="http://schemas.openxmlformats.org/drawingml/2006/main" xmlns:r="http://schemas.openxmlformats.org/officeDocument/2006/relationships" xmlns:p="http://schemas.openxmlformats.org/presentationml/2006/main">
+  <p:cSld>
+    <p:spTree>
+      <p:nvGrpSpPr>
+        <p:cNvPr id="1" name=""/>
+        <p:cNvGrpSpPr/>
+        <p:nvPr/>
+      </p:nvGrpSpPr>
+      <p:grpSpPr>
+        <a:xfrm>
+          <a:off x="0" y="0"/>
+          <a:ext cx="0" cy="0"/>
+          <a:chOff x="0" y="0"/>
+          <a:chExt cx="0" cy="0"/>
+        </a:xfrm>
+      </p:grpSpPr>
+      <p:sp>
+        <p:nvSpPr>
+          <p:cNvPr id="2" name="Slide Image Placeholder 1"/>
+          <p:cNvSpPr>
+            <a:spLocks noGrp="1" noRot="1" noChangeAspect="1"/>
+          </p:cNvSpPr>
+          <p:nvPr>
+            <p:ph type="sldImg"/>
+          </p:nvPr>
+        </p:nvSpPr>
+        <p:spPr/>
+      </p:sp>
+      <p:sp>
+        <p:nvSpPr>
+          <p:cNvPr id="3" name="Notes Placeholder 2"/>
+          <p:cNvSpPr>
+            <a:spLocks noGrp="1"/>
+          </p:cNvSpPr>
+          <p:nvPr>
+            <p:ph type="body" idx="1"/>
+          </p:nvPr>
+        </p:nvSpPr>
+        <p:spPr/>
+        <p:txBody>
+          <a:bodyPr/>
+          <a:lstStyle/>
+          <a:p>
+            <a:r>
+              <a:rPr lang="en-US" dirty="0"/>
+              <a:t/>
+            </a:r>
+            <a:endParaRPr lang="en-US" dirty="0"/>
+          </a:p>
+        </p:txBody>
+      </p:sp>
+      <p:sp>
+        <p:nvSpPr>
+          <p:cNvPr id="4" name="Slide Number Placeholder 3"/>
+          <p:cNvSpPr>
+            <a:spLocks noGrp="1"/>
+          </p:cNvSpPr>
+          <p:nvPr>
+            <p:ph type="sldNum" sz="quarter" idx="10"/>
+          </p:nvPr>
+        </p:nvSpPr>
+        <p:spPr/>
+        <p:txBody>
+          <a:bodyPr/>
+          <a:lstStyle/>
+          <a:p>
+            <a:fld id="{F7021451-1387-4CA6-816F-3879F97B5CBC}" type="slidenum">
+              <a:rPr lang="en-US"/>
+              <a:t>6</a:t>
+            </a:fld>
+            <a:endParaRPr lang="en-US"/>
+          </a:p>
+        </p:txBody>
+      </p:sp>
+    </p:spTree>
+    <p:extLst>
+      <p:ext uri="{BB962C8B-B14F-4D97-AF65-F5344CB8AC3E}">
+        <p14:creationId xmlns:p14="http://schemas.microsoft.com/office/powerpoint/2010/main" val="1024086991"/>
+      </p:ext>
+    </p:extLst>
+  </p:cSld>
+  <p:clrMapOvr>
+    <a:masterClrMapping/>
+  </p:clrMapOvr>
+</p:notes>
+</file>
+
 <file path=ppt/slideLayouts/slideLayout1.xml><?xml version="1.0" encoding="utf-8"?>
 <p:sldLayout xmlns:a="http://schemas.openxmlformats.org/drawingml/2006/main" xmlns:r="http://schemas.openxmlformats.org/officeDocument/2006/relationships" xmlns:p="http://schemas.openxmlformats.org/presentationml/2006/main" preserve="1">
   <p:cSld name="DEFAULT">
@@ -2373,8 +2462,8 @@
         </p:nvSpPr>
         <p:spPr>
           <a:xfrm>
-            <a:off x="457200" y="274320"/>
-            <a:ext cx="8229600" cy="548640"/>
+            <a:off x="457200" y="256032"/>
+            <a:ext cx="8229600" cy="530352"/>
           </a:xfrm>
           <a:prstGeom prst="rect">
             <a:avLst/>
@@ -2398,7 +2487,7 @@
                 <a:ea typeface="Calibri" pitchFamily="34" charset="-122"/>
                 <a:cs typeface="Calibri" pitchFamily="34" charset="-120"/>
               </a:rPr>
-              <a:t>Solution Overview</a:t>
+              <a:t>Solution Benefits</a:t>
             </a:r>
             <a:endParaRPr lang="en-US" sz="2800" dirty="0"/>
           </a:p>
@@ -2412,8 +2501,8 @@
         </p:nvSpPr>
         <p:spPr>
           <a:xfrm>
-            <a:off x="457200" y="777240"/>
-            <a:ext cx="8229600" cy="320040"/>
+            <a:off x="457200" y="758952"/>
+            <a:ext cx="8229600" cy="292608"/>
           </a:xfrm>
           <a:prstGeom prst="rect">
             <a:avLst/>
@@ -2434,7 +2523,7 @@
                   <a:srgbClr val="64748B"/>
                 </a:solidFill>
               </a:rPr>
-              <a:t>A .NET 8 Windows Service that automatically replicates Jira tickets to GitLab on a configurable schedule</a:t>
+              <a:t>What the team gains by syncing Jira to GitLab</a:t>
             </a:r>
             <a:endParaRPr lang="en-US" sz="1300" dirty="0"/>
           </a:p>
@@ -2448,7 +2537,7 @@
         </p:nvSpPr>
         <p:spPr>
           <a:xfrm>
-            <a:off x="457200" y="1115568"/>
+            <a:off x="457200" y="1078992"/>
             <a:ext cx="8229600" cy="27432"/>
           </a:xfrm>
           <a:prstGeom prst="rect">
@@ -2473,392 +2562,8 @@
         </p:nvSpPr>
         <p:spPr>
           <a:xfrm>
-            <a:off x="365760" y="1371600"/>
-            <a:ext cx="2560320" cy="1005840"/>
-          </a:xfrm>
-          <a:prstGeom prst="rect">
-            <a:avLst/>
-          </a:prstGeom>
-          <a:solidFill>
-            <a:srgbClr val="2563EB"/>
-          </a:solidFill>
-          <a:ln w="12700">
-            <a:solidFill>
-              <a:srgbClr val="2563EB"/>
-            </a:solidFill>
-            <a:prstDash val="solid"/>
-          </a:ln>
-          <a:effectLst>
-            <a:outerShdw sx="100000" sy="100000" kx="0" ky="0" algn="bl" rotWithShape="0" blurRad="101600" dist="38100" dir="8100000">
-              <a:srgbClr val="000000">
-                <a:alpha val="10000"/>
-              </a:srgbClr>
-            </a:outerShdw>
-          </a:effectLst>
-        </p:spPr>
-      </p:sp>
-      <p:sp>
-        <p:nvSpPr>
-          <p:cNvPr id="6" name="Text 4"/>
-          <p:cNvSpPr/>
-          <p:nvPr/>
-        </p:nvSpPr>
-        <p:spPr>
-          <a:xfrm>
-            <a:off x="365760" y="1444752"/>
-            <a:ext cx="2560320" cy="384048"/>
-          </a:xfrm>
-          <a:prstGeom prst="rect">
-            <a:avLst/>
-          </a:prstGeom>
-          <a:noFill/>
-          <a:ln/>
-        </p:spPr>
-        <p:txBody>
-          <a:bodyPr wrap="square" lIns="0" tIns="0" rIns="0" bIns="0" rtlCol="0" anchor="ctr"/>
-          <a:lstStyle/>
-          <a:p>
-            <a:pPr algn="ctr" indent="0" marL="0">
-              <a:buNone/>
-            </a:pPr>
-            <a:r>
-              <a:rPr lang="en-US" sz="1500" b="1" dirty="0">
-                <a:solidFill>
-                  <a:srgbClr val="FFFFFF"/>
-                </a:solidFill>
-              </a:rPr>
-              <a:t>Jira Cloud</a:t>
-            </a:r>
-            <a:endParaRPr lang="en-US" sz="1500" dirty="0"/>
-          </a:p>
-        </p:txBody>
-      </p:sp>
-      <p:sp>
-        <p:nvSpPr>
-          <p:cNvPr id="7" name="Text 5"/>
-          <p:cNvSpPr/>
-          <p:nvPr/>
-        </p:nvSpPr>
-        <p:spPr>
-          <a:xfrm>
-            <a:off x="365760" y="1828800"/>
-            <a:ext cx="2560320" cy="292608"/>
-          </a:xfrm>
-          <a:prstGeom prst="rect">
-            <a:avLst/>
-          </a:prstGeom>
-          <a:noFill/>
-          <a:ln/>
-        </p:spPr>
-        <p:txBody>
-          <a:bodyPr wrap="square" lIns="0" tIns="0" rIns="0" bIns="0" rtlCol="0" anchor="ctr"/>
-          <a:lstStyle/>
-          <a:p>
-            <a:pPr algn="ctr" indent="0" marL="0">
-              <a:buNone/>
-            </a:pPr>
-            <a:r>
-              <a:rPr lang="en-US" sz="1000" dirty="0">
-                <a:solidFill>
-                  <a:srgbClr val="CADCFC"/>
-                </a:solidFill>
-              </a:rPr>
-              <a:t>Stories · Bugs · Tasks</a:t>
-            </a:r>
-            <a:endParaRPr lang="en-US" sz="1000" dirty="0"/>
-          </a:p>
-        </p:txBody>
-      </p:sp>
-      <p:sp>
-        <p:nvSpPr>
-          <p:cNvPr id="8" name="Shape 6"/>
-          <p:cNvSpPr/>
-          <p:nvPr/>
-        </p:nvSpPr>
-        <p:spPr>
-          <a:xfrm>
-            <a:off x="3108960" y="1371600"/>
-            <a:ext cx="2560320" cy="1005840"/>
-          </a:xfrm>
-          <a:prstGeom prst="rect">
-            <a:avLst/>
-          </a:prstGeom>
-          <a:solidFill>
-            <a:srgbClr val="1E2761"/>
-          </a:solidFill>
-          <a:ln w="12700">
-            <a:solidFill>
-              <a:srgbClr val="1E2761"/>
-            </a:solidFill>
-            <a:prstDash val="solid"/>
-          </a:ln>
-          <a:effectLst>
-            <a:outerShdw sx="100000" sy="100000" kx="0" ky="0" algn="bl" rotWithShape="0" blurRad="101600" dist="38100" dir="8100000">
-              <a:srgbClr val="000000">
-                <a:alpha val="10000"/>
-              </a:srgbClr>
-            </a:outerShdw>
-          </a:effectLst>
-        </p:spPr>
-      </p:sp>
-      <p:sp>
-        <p:nvSpPr>
-          <p:cNvPr id="9" name="Text 7"/>
-          <p:cNvSpPr/>
-          <p:nvPr/>
-        </p:nvSpPr>
-        <p:spPr>
-          <a:xfrm>
-            <a:off x="3108960" y="1444752"/>
-            <a:ext cx="2560320" cy="384048"/>
-          </a:xfrm>
-          <a:prstGeom prst="rect">
-            <a:avLst/>
-          </a:prstGeom>
-          <a:noFill/>
-          <a:ln/>
-        </p:spPr>
-        <p:txBody>
-          <a:bodyPr wrap="square" lIns="0" tIns="0" rIns="0" bIns="0" rtlCol="0" anchor="ctr"/>
-          <a:lstStyle/>
-          <a:p>
-            <a:pPr algn="ctr" indent="0" marL="0">
-              <a:buNone/>
-            </a:pPr>
-            <a:r>
-              <a:rPr lang="en-US" sz="1500" b="1" dirty="0">
-                <a:solidFill>
-                  <a:srgbClr val="FFFFFF"/>
-                </a:solidFill>
-              </a:rPr>
-              <a:t>Sync Service</a:t>
-            </a:r>
-            <a:endParaRPr lang="en-US" sz="1500" dirty="0"/>
-          </a:p>
-        </p:txBody>
-      </p:sp>
-      <p:sp>
-        <p:nvSpPr>
-          <p:cNvPr id="10" name="Text 8"/>
-          <p:cNvSpPr/>
-          <p:nvPr/>
-        </p:nvSpPr>
-        <p:spPr>
-          <a:xfrm>
-            <a:off x="3108960" y="1828800"/>
-            <a:ext cx="2560320" cy="292608"/>
-          </a:xfrm>
-          <a:prstGeom prst="rect">
-            <a:avLst/>
-          </a:prstGeom>
-          <a:noFill/>
-          <a:ln/>
-        </p:spPr>
-        <p:txBody>
-          <a:bodyPr wrap="square" lIns="0" tIns="0" rIns="0" bIns="0" rtlCol="0" anchor="ctr"/>
-          <a:lstStyle/>
-          <a:p>
-            <a:pPr algn="ctr" indent="0" marL="0">
-              <a:buNone/>
-            </a:pPr>
-            <a:r>
-              <a:rPr lang="en-US" sz="1000" dirty="0">
-                <a:solidFill>
-                  <a:srgbClr val="CADCFC"/>
-                </a:solidFill>
-              </a:rPr>
-              <a:t>.NET 8 Windows Service</a:t>
-            </a:r>
-            <a:endParaRPr lang="en-US" sz="1000" dirty="0"/>
-          </a:p>
-        </p:txBody>
-      </p:sp>
-      <p:sp>
-        <p:nvSpPr>
-          <p:cNvPr id="11" name="Shape 9"/>
-          <p:cNvSpPr/>
-          <p:nvPr/>
-        </p:nvSpPr>
-        <p:spPr>
-          <a:xfrm>
-            <a:off x="5852160" y="1371600"/>
-            <a:ext cx="2560320" cy="1005840"/>
-          </a:xfrm>
-          <a:prstGeom prst="rect">
-            <a:avLst/>
-          </a:prstGeom>
-          <a:solidFill>
-            <a:srgbClr val="0D9488"/>
-          </a:solidFill>
-          <a:ln w="12700">
-            <a:solidFill>
-              <a:srgbClr val="0D9488"/>
-            </a:solidFill>
-            <a:prstDash val="solid"/>
-          </a:ln>
-          <a:effectLst>
-            <a:outerShdw sx="100000" sy="100000" kx="0" ky="0" algn="bl" rotWithShape="0" blurRad="101600" dist="38100" dir="8100000">
-              <a:srgbClr val="000000">
-                <a:alpha val="10000"/>
-              </a:srgbClr>
-            </a:outerShdw>
-          </a:effectLst>
-        </p:spPr>
-      </p:sp>
-      <p:sp>
-        <p:nvSpPr>
-          <p:cNvPr id="12" name="Text 10"/>
-          <p:cNvSpPr/>
-          <p:nvPr/>
-        </p:nvSpPr>
-        <p:spPr>
-          <a:xfrm>
-            <a:off x="5852160" y="1444752"/>
-            <a:ext cx="2560320" cy="384048"/>
-          </a:xfrm>
-          <a:prstGeom prst="rect">
-            <a:avLst/>
-          </a:prstGeom>
-          <a:noFill/>
-          <a:ln/>
-        </p:spPr>
-        <p:txBody>
-          <a:bodyPr wrap="square" lIns="0" tIns="0" rIns="0" bIns="0" rtlCol="0" anchor="ctr"/>
-          <a:lstStyle/>
-          <a:p>
-            <a:pPr algn="ctr" indent="0" marL="0">
-              <a:buNone/>
-            </a:pPr>
-            <a:r>
-              <a:rPr lang="en-US" sz="1500" b="1" dirty="0">
-                <a:solidFill>
-                  <a:srgbClr val="FFFFFF"/>
-                </a:solidFill>
-              </a:rPr>
-              <a:t>GitLab</a:t>
-            </a:r>
-            <a:endParaRPr lang="en-US" sz="1500" dirty="0"/>
-          </a:p>
-        </p:txBody>
-      </p:sp>
-      <p:sp>
-        <p:nvSpPr>
-          <p:cNvPr id="13" name="Text 11"/>
-          <p:cNvSpPr/>
-          <p:nvPr/>
-        </p:nvSpPr>
-        <p:spPr>
-          <a:xfrm>
-            <a:off x="5852160" y="1828800"/>
-            <a:ext cx="2560320" cy="292608"/>
-          </a:xfrm>
-          <a:prstGeom prst="rect">
-            <a:avLst/>
-          </a:prstGeom>
-          <a:noFill/>
-          <a:ln/>
-        </p:spPr>
-        <p:txBody>
-          <a:bodyPr wrap="square" lIns="0" tIns="0" rIns="0" bIns="0" rtlCol="0" anchor="ctr"/>
-          <a:lstStyle/>
-          <a:p>
-            <a:pPr algn="ctr" indent="0" marL="0">
-              <a:buNone/>
-            </a:pPr>
-            <a:r>
-              <a:rPr lang="en-US" sz="1000" dirty="0">
-                <a:solidFill>
-                  <a:srgbClr val="CADCFC"/>
-                </a:solidFill>
-              </a:rPr>
-              <a:t>Issues · Milestones</a:t>
-            </a:r>
-            <a:endParaRPr lang="en-US" sz="1000" dirty="0"/>
-          </a:p>
-        </p:txBody>
-      </p:sp>
-      <p:sp>
-        <p:nvSpPr>
-          <p:cNvPr id="14" name="Text 12"/>
-          <p:cNvSpPr/>
-          <p:nvPr/>
-        </p:nvSpPr>
-        <p:spPr>
-          <a:xfrm>
-            <a:off x="2898648" y="1737360"/>
-            <a:ext cx="256032" cy="274320"/>
-          </a:xfrm>
-          <a:prstGeom prst="rect">
-            <a:avLst/>
-          </a:prstGeom>
-          <a:noFill/>
-          <a:ln/>
-        </p:spPr>
-        <p:txBody>
-          <a:bodyPr wrap="square" lIns="0" tIns="0" rIns="0" bIns="0" rtlCol="0" anchor="ctr"/>
-          <a:lstStyle/>
-          <a:p>
-            <a:pPr algn="ctr" indent="0" marL="0">
-              <a:buNone/>
-            </a:pPr>
-            <a:r>
-              <a:rPr lang="en-US" sz="1800" b="1" dirty="0">
-                <a:solidFill>
-                  <a:srgbClr val="EA580C"/>
-                </a:solidFill>
-              </a:rPr>
-              <a:t>→</a:t>
-            </a:r>
-            <a:endParaRPr lang="en-US" sz="1800" dirty="0"/>
-          </a:p>
-        </p:txBody>
-      </p:sp>
-      <p:sp>
-        <p:nvSpPr>
-          <p:cNvPr id="15" name="Text 13"/>
-          <p:cNvSpPr/>
-          <p:nvPr/>
-        </p:nvSpPr>
-        <p:spPr>
-          <a:xfrm>
-            <a:off x="5641848" y="1737360"/>
-            <a:ext cx="256032" cy="274320"/>
-          </a:xfrm>
-          <a:prstGeom prst="rect">
-            <a:avLst/>
-          </a:prstGeom>
-          <a:noFill/>
-          <a:ln/>
-        </p:spPr>
-        <p:txBody>
-          <a:bodyPr wrap="square" lIns="0" tIns="0" rIns="0" bIns="0" rtlCol="0" anchor="ctr"/>
-          <a:lstStyle/>
-          <a:p>
-            <a:pPr algn="ctr" indent="0" marL="0">
-              <a:buNone/>
-            </a:pPr>
-            <a:r>
-              <a:rPr lang="en-US" sz="1800" b="1" dirty="0">
-                <a:solidFill>
-                  <a:srgbClr val="EA580C"/>
-                </a:solidFill>
-              </a:rPr>
-              <a:t>→</a:t>
-            </a:r>
-            <a:endParaRPr lang="en-US" sz="1800" dirty="0"/>
-          </a:p>
-        </p:txBody>
-      </p:sp>
-      <p:sp>
-        <p:nvSpPr>
-          <p:cNvPr id="16" name="Shape 14"/>
-          <p:cNvSpPr/>
-          <p:nvPr/>
-        </p:nvSpPr>
-        <p:spPr>
-          <a:xfrm>
-            <a:off x="365760" y="2606040"/>
-            <a:ext cx="2697480" cy="914400"/>
+            <a:off x="457200" y="1234440"/>
+            <a:ext cx="2633472" cy="1417320"/>
           </a:xfrm>
           <a:prstGeom prst="rect">
             <a:avLst/>
@@ -2883,86 +2588,197 @@
       </p:sp>
       <p:sp>
         <p:nvSpPr>
-          <p:cNvPr id="17" name="Text 15"/>
-          <p:cNvSpPr/>
-          <p:nvPr/>
-        </p:nvSpPr>
-        <p:spPr>
-          <a:xfrm>
-            <a:off x="475488" y="2697480"/>
-            <a:ext cx="2468880" cy="274320"/>
-          </a:xfrm>
-          <a:prstGeom prst="rect">
-            <a:avLst/>
-          </a:prstGeom>
-          <a:noFill/>
-          <a:ln/>
-        </p:spPr>
-        <p:txBody>
-          <a:bodyPr wrap="square" lIns="0" tIns="0" rIns="0" bIns="0" rtlCol="0" anchor="ctr"/>
-          <a:lstStyle/>
-          <a:p>
-            <a:pPr indent="0" marL="0">
-              <a:buNone/>
-            </a:pPr>
-            <a:r>
-              <a:rPr lang="en-US" sz="1200" b="1" dirty="0">
-                <a:solidFill>
-                  <a:srgbClr val="1E2761"/>
-                </a:solidFill>
-              </a:rPr>
-              <a:t>⏱ Scheduled Sync</a:t>
-            </a:r>
-            <a:endParaRPr lang="en-US" sz="1200" dirty="0"/>
-          </a:p>
-        </p:txBody>
-      </p:sp>
-      <p:sp>
-        <p:nvSpPr>
-          <p:cNvPr id="18" name="Text 16"/>
-          <p:cNvSpPr/>
-          <p:nvPr/>
-        </p:nvSpPr>
-        <p:spPr>
-          <a:xfrm>
-            <a:off x="475488" y="2990088"/>
-            <a:ext cx="2468880" cy="457200"/>
-          </a:xfrm>
-          <a:prstGeom prst="rect">
-            <a:avLst/>
-          </a:prstGeom>
-          <a:noFill/>
-          <a:ln/>
-        </p:spPr>
-        <p:txBody>
-          <a:bodyPr wrap="square" lIns="0" tIns="0" rIns="0" bIns="0" rtlCol="0" anchor="ctr"/>
-          <a:lstStyle/>
-          <a:p>
-            <a:pPr indent="0" marL="0">
-              <a:buNone/>
-            </a:pPr>
-            <a:r>
-              <a:rPr lang="en-US" sz="1000" dirty="0">
+          <p:cNvPr id="6" name="Shape 4"/>
+          <p:cNvSpPr/>
+          <p:nvPr/>
+        </p:nvSpPr>
+        <p:spPr>
+          <a:xfrm>
+            <a:off x="457200" y="1234440"/>
+            <a:ext cx="2633472" cy="420624"/>
+          </a:xfrm>
+          <a:prstGeom prst="rect">
+            <a:avLst/>
+          </a:prstGeom>
+          <a:solidFill>
+            <a:srgbClr val="DBEAFE"/>
+          </a:solidFill>
+          <a:ln w="12700">
+            <a:solidFill>
+              <a:srgbClr val="DBEAFE"/>
+            </a:solidFill>
+            <a:prstDash val="solid"/>
+          </a:ln>
+        </p:spPr>
+      </p:sp>
+      <p:sp>
+        <p:nvSpPr>
+          <p:cNvPr id="7" name="Shape 5"/>
+          <p:cNvSpPr/>
+          <p:nvPr/>
+        </p:nvSpPr>
+        <p:spPr>
+          <a:xfrm>
+            <a:off x="457200" y="1234440"/>
+            <a:ext cx="54864" cy="1417320"/>
+          </a:xfrm>
+          <a:prstGeom prst="rect">
+            <a:avLst/>
+          </a:prstGeom>
+          <a:solidFill>
+            <a:srgbClr val="2563EB"/>
+          </a:solidFill>
+          <a:ln w="12700">
+            <a:solidFill>
+              <a:srgbClr val="2563EB"/>
+            </a:solidFill>
+            <a:prstDash val="solid"/>
+          </a:ln>
+        </p:spPr>
+      </p:sp>
+      <p:sp>
+        <p:nvSpPr>
+          <p:cNvPr id="8" name="Shape 6"/>
+          <p:cNvSpPr/>
+          <p:nvPr/>
+        </p:nvSpPr>
+        <p:spPr>
+          <a:xfrm>
+            <a:off x="585216" y="1307592"/>
+            <a:ext cx="292608" cy="292608"/>
+          </a:xfrm>
+          <a:prstGeom prst="ellipse">
+            <a:avLst/>
+          </a:prstGeom>
+          <a:solidFill>
+            <a:srgbClr val="2563EB"/>
+          </a:solidFill>
+          <a:ln w="12700">
+            <a:solidFill>
+              <a:srgbClr val="2563EB"/>
+            </a:solidFill>
+            <a:prstDash val="solid"/>
+          </a:ln>
+        </p:spPr>
+      </p:sp>
+      <p:sp>
+        <p:nvSpPr>
+          <p:cNvPr id="9" name="Text 7"/>
+          <p:cNvSpPr/>
+          <p:nvPr/>
+        </p:nvSpPr>
+        <p:spPr>
+          <a:xfrm>
+            <a:off x="585216" y="1307592"/>
+            <a:ext cx="292608" cy="292608"/>
+          </a:xfrm>
+          <a:prstGeom prst="rect">
+            <a:avLst/>
+          </a:prstGeom>
+          <a:noFill/>
+          <a:ln/>
+        </p:spPr>
+        <p:txBody>
+          <a:bodyPr wrap="square" lIns="0" tIns="0" rIns="0" bIns="0" rtlCol="0" anchor="ctr"/>
+          <a:lstStyle/>
+          <a:p>
+            <a:pPr algn="ctr" indent="0" marL="0">
+              <a:buNone/>
+            </a:pPr>
+            <a:r>
+              <a:rPr lang="en-US" sz="900" dirty="0">
+                <a:solidFill>
+                  <a:srgbClr val="000000"/>
+                </a:solidFill>
+              </a:rPr>
+              <a:t>👥</a:t>
+            </a:r>
+            <a:endParaRPr lang="en-US" sz="900" dirty="0"/>
+          </a:p>
+        </p:txBody>
+      </p:sp>
+      <p:sp>
+        <p:nvSpPr>
+          <p:cNvPr id="10" name="Text 8"/>
+          <p:cNvSpPr/>
+          <p:nvPr/>
+        </p:nvSpPr>
+        <p:spPr>
+          <a:xfrm>
+            <a:off x="960120" y="1316736"/>
+            <a:ext cx="2057400" cy="274320"/>
+          </a:xfrm>
+          <a:prstGeom prst="rect">
+            <a:avLst/>
+          </a:prstGeom>
+          <a:noFill/>
+          <a:ln/>
+        </p:spPr>
+        <p:txBody>
+          <a:bodyPr wrap="square" lIns="0" tIns="0" rIns="0" bIns="0" rtlCol="0" anchor="ctr"/>
+          <a:lstStyle/>
+          <a:p>
+            <a:pPr indent="0" marL="0">
+              <a:buNone/>
+            </a:pPr>
+            <a:r>
+              <a:rPr lang="en-US" sz="1100" b="1" dirty="0">
+                <a:solidFill>
+                  <a:srgbClr val="2563EB"/>
+                </a:solidFill>
+              </a:rPr>
+              <a:t>Whole Team Visibility</a:t>
+            </a:r>
+            <a:endParaRPr lang="en-US" sz="1100" dirty="0"/>
+          </a:p>
+        </p:txBody>
+      </p:sp>
+      <p:sp>
+        <p:nvSpPr>
+          <p:cNvPr id="11" name="Text 9"/>
+          <p:cNvSpPr/>
+          <p:nvPr/>
+        </p:nvSpPr>
+        <p:spPr>
+          <a:xfrm>
+            <a:off x="585216" y="1709928"/>
+            <a:ext cx="2423160" cy="868680"/>
+          </a:xfrm>
+          <a:prstGeom prst="rect">
+            <a:avLst/>
+          </a:prstGeom>
+          <a:noFill/>
+          <a:ln/>
+        </p:spPr>
+        <p:txBody>
+          <a:bodyPr wrap="square" lIns="0" tIns="0" rIns="0" bIns="0" rtlCol="0" anchor="ctr"/>
+          <a:lstStyle/>
+          <a:p>
+            <a:pPr indent="0" marL="0">
+              <a:buNone/>
+            </a:pPr>
+            <a:r>
+              <a:rPr lang="en-US" sz="950" dirty="0">
                 <a:solidFill>
                   <a:srgbClr val="64748B"/>
                 </a:solidFill>
               </a:rPr>
-              <a:t>Runs every 15 min (configurable). Auto-retry on failure.</a:t>
-            </a:r>
-            <a:endParaRPr lang="en-US" sz="1000" dirty="0"/>
-          </a:p>
-        </p:txBody>
-      </p:sp>
-      <p:sp>
-        <p:nvSpPr>
-          <p:cNvPr id="19" name="Shape 17"/>
-          <p:cNvSpPr/>
-          <p:nvPr/>
-        </p:nvSpPr>
-        <p:spPr>
-          <a:xfrm>
-            <a:off x="3246120" y="2606040"/>
-            <a:ext cx="2697480" cy="914400"/>
+              <a:t>Every team member — developer, QA, designer — can view sprint stories, bugs and tasks directly in GitLab without needing a Jira licence.</a:t>
+            </a:r>
+            <a:endParaRPr lang="en-US" sz="950" dirty="0"/>
+          </a:p>
+        </p:txBody>
+      </p:sp>
+      <p:sp>
+        <p:nvSpPr>
+          <p:cNvPr id="12" name="Shape 10"/>
+          <p:cNvSpPr/>
+          <p:nvPr/>
+        </p:nvSpPr>
+        <p:spPr>
+          <a:xfrm>
+            <a:off x="3246120" y="1234440"/>
+            <a:ext cx="2633472" cy="1417320"/>
           </a:xfrm>
           <a:prstGeom prst="rect">
             <a:avLst/>
@@ -2987,86 +2803,197 @@
       </p:sp>
       <p:sp>
         <p:nvSpPr>
-          <p:cNvPr id="20" name="Text 18"/>
-          <p:cNvSpPr/>
-          <p:nvPr/>
-        </p:nvSpPr>
-        <p:spPr>
-          <a:xfrm>
-            <a:off x="3355848" y="2697480"/>
-            <a:ext cx="2468880" cy="274320"/>
-          </a:xfrm>
-          <a:prstGeom prst="rect">
-            <a:avLst/>
-          </a:prstGeom>
-          <a:noFill/>
-          <a:ln/>
-        </p:spPr>
-        <p:txBody>
-          <a:bodyPr wrap="square" lIns="0" tIns="0" rIns="0" bIns="0" rtlCol="0" anchor="ctr"/>
-          <a:lstStyle/>
-          <a:p>
-            <a:pPr indent="0" marL="0">
-              <a:buNone/>
-            </a:pPr>
-            <a:r>
-              <a:rPr lang="en-US" sz="1200" b="1" dirty="0">
-                <a:solidFill>
-                  <a:srgbClr val="1E2761"/>
-                </a:solidFill>
-              </a:rPr>
-              <a:t>🎯 Smart Routing</a:t>
-            </a:r>
-            <a:endParaRPr lang="en-US" sz="1200" dirty="0"/>
-          </a:p>
-        </p:txBody>
-      </p:sp>
-      <p:sp>
-        <p:nvSpPr>
-          <p:cNvPr id="21" name="Text 19"/>
-          <p:cNvSpPr/>
-          <p:nvPr/>
-        </p:nvSpPr>
-        <p:spPr>
-          <a:xfrm>
-            <a:off x="3355848" y="2990088"/>
-            <a:ext cx="2468880" cy="457200"/>
-          </a:xfrm>
-          <a:prstGeom prst="rect">
-            <a:avLst/>
-          </a:prstGeom>
-          <a:noFill/>
-          <a:ln/>
-        </p:spPr>
-        <p:txBody>
-          <a:bodyPr wrap="square" lIns="0" tIns="0" rIns="0" bIns="0" rtlCol="0" anchor="ctr"/>
-          <a:lstStyle/>
-          <a:p>
-            <a:pPr indent="0" marL="0">
-              <a:buNone/>
-            </a:pPr>
-            <a:r>
-              <a:rPr lang="en-US" sz="1000" dirty="0">
+          <p:cNvPr id="13" name="Shape 11"/>
+          <p:cNvSpPr/>
+          <p:nvPr/>
+        </p:nvSpPr>
+        <p:spPr>
+          <a:xfrm>
+            <a:off x="3246120" y="1234440"/>
+            <a:ext cx="2633472" cy="420624"/>
+          </a:xfrm>
+          <a:prstGeom prst="rect">
+            <a:avLst/>
+          </a:prstGeom>
+          <a:solidFill>
+            <a:srgbClr val="CCFBF1"/>
+          </a:solidFill>
+          <a:ln w="12700">
+            <a:solidFill>
+              <a:srgbClr val="CCFBF1"/>
+            </a:solidFill>
+            <a:prstDash val="solid"/>
+          </a:ln>
+        </p:spPr>
+      </p:sp>
+      <p:sp>
+        <p:nvSpPr>
+          <p:cNvPr id="14" name="Shape 12"/>
+          <p:cNvSpPr/>
+          <p:nvPr/>
+        </p:nvSpPr>
+        <p:spPr>
+          <a:xfrm>
+            <a:off x="3246120" y="1234440"/>
+            <a:ext cx="54864" cy="1417320"/>
+          </a:xfrm>
+          <a:prstGeom prst="rect">
+            <a:avLst/>
+          </a:prstGeom>
+          <a:solidFill>
+            <a:srgbClr val="0D9488"/>
+          </a:solidFill>
+          <a:ln w="12700">
+            <a:solidFill>
+              <a:srgbClr val="0D9488"/>
+            </a:solidFill>
+            <a:prstDash val="solid"/>
+          </a:ln>
+        </p:spPr>
+      </p:sp>
+      <p:sp>
+        <p:nvSpPr>
+          <p:cNvPr id="15" name="Shape 13"/>
+          <p:cNvSpPr/>
+          <p:nvPr/>
+        </p:nvSpPr>
+        <p:spPr>
+          <a:xfrm>
+            <a:off x="3374136" y="1307592"/>
+            <a:ext cx="292608" cy="292608"/>
+          </a:xfrm>
+          <a:prstGeom prst="ellipse">
+            <a:avLst/>
+          </a:prstGeom>
+          <a:solidFill>
+            <a:srgbClr val="0D9488"/>
+          </a:solidFill>
+          <a:ln w="12700">
+            <a:solidFill>
+              <a:srgbClr val="0D9488"/>
+            </a:solidFill>
+            <a:prstDash val="solid"/>
+          </a:ln>
+        </p:spPr>
+      </p:sp>
+      <p:sp>
+        <p:nvSpPr>
+          <p:cNvPr id="16" name="Text 14"/>
+          <p:cNvSpPr/>
+          <p:nvPr/>
+        </p:nvSpPr>
+        <p:spPr>
+          <a:xfrm>
+            <a:off x="3374136" y="1307592"/>
+            <a:ext cx="292608" cy="292608"/>
+          </a:xfrm>
+          <a:prstGeom prst="rect">
+            <a:avLst/>
+          </a:prstGeom>
+          <a:noFill/>
+          <a:ln/>
+        </p:spPr>
+        <p:txBody>
+          <a:bodyPr wrap="square" lIns="0" tIns="0" rIns="0" bIns="0" rtlCol="0" anchor="ctr"/>
+          <a:lstStyle/>
+          <a:p>
+            <a:pPr algn="ctr" indent="0" marL="0">
+              <a:buNone/>
+            </a:pPr>
+            <a:r>
+              <a:rPr lang="en-US" sz="900" dirty="0">
+                <a:solidFill>
+                  <a:srgbClr val="000000"/>
+                </a:solidFill>
+              </a:rPr>
+              <a:t>🗂️</a:t>
+            </a:r>
+            <a:endParaRPr lang="en-US" sz="900" dirty="0"/>
+          </a:p>
+        </p:txBody>
+      </p:sp>
+      <p:sp>
+        <p:nvSpPr>
+          <p:cNvPr id="17" name="Text 15"/>
+          <p:cNvSpPr/>
+          <p:nvPr/>
+        </p:nvSpPr>
+        <p:spPr>
+          <a:xfrm>
+            <a:off x="3749040" y="1316736"/>
+            <a:ext cx="2057400" cy="274320"/>
+          </a:xfrm>
+          <a:prstGeom prst="rect">
+            <a:avLst/>
+          </a:prstGeom>
+          <a:noFill/>
+          <a:ln/>
+        </p:spPr>
+        <p:txBody>
+          <a:bodyPr wrap="square" lIns="0" tIns="0" rIns="0" bIns="0" rtlCol="0" anchor="ctr"/>
+          <a:lstStyle/>
+          <a:p>
+            <a:pPr indent="0" marL="0">
+              <a:buNone/>
+            </a:pPr>
+            <a:r>
+              <a:rPr lang="en-US" sz="1100" b="1" dirty="0">
+                <a:solidFill>
+                  <a:srgbClr val="0D9488"/>
+                </a:solidFill>
+              </a:rPr>
+              <a:t>Single Source of Truth</a:t>
+            </a:r>
+            <a:endParaRPr lang="en-US" sz="1100" dirty="0"/>
+          </a:p>
+        </p:txBody>
+      </p:sp>
+      <p:sp>
+        <p:nvSpPr>
+          <p:cNvPr id="18" name="Text 16"/>
+          <p:cNvSpPr/>
+          <p:nvPr/>
+        </p:nvSpPr>
+        <p:spPr>
+          <a:xfrm>
+            <a:off x="3374136" y="1709928"/>
+            <a:ext cx="2423160" cy="868680"/>
+          </a:xfrm>
+          <a:prstGeom prst="rect">
+            <a:avLst/>
+          </a:prstGeom>
+          <a:noFill/>
+          <a:ln/>
+        </p:spPr>
+        <p:txBody>
+          <a:bodyPr wrap="square" lIns="0" tIns="0" rIns="0" bIns="0" rtlCol="0" anchor="ctr"/>
+          <a:lstStyle/>
+          <a:p>
+            <a:pPr indent="0" marL="0">
+              <a:buNone/>
+            </a:pPr>
+            <a:r>
+              <a:rPr lang="en-US" sz="950" dirty="0">
                 <a:solidFill>
                   <a:srgbClr val="64748B"/>
                 </a:solidFill>
               </a:rPr>
-              <a:t>Active milestone today → sprint. No milestone → Backlog.</a:t>
-            </a:r>
-            <a:endParaRPr lang="en-US" sz="1000" dirty="0"/>
-          </a:p>
-        </p:txBody>
-      </p:sp>
-      <p:sp>
-        <p:nvSpPr>
-          <p:cNvPr id="22" name="Shape 20"/>
-          <p:cNvSpPr/>
-          <p:nvPr/>
-        </p:nvSpPr>
-        <p:spPr>
-          <a:xfrm>
-            <a:off x="6126480" y="2606040"/>
-            <a:ext cx="2697480" cy="914400"/>
+              <a:t>Replaces fragmented Excel sheets with structured GitLab issues. Work status, assignees and story points are always up to date and version-controlled.</a:t>
+            </a:r>
+            <a:endParaRPr lang="en-US" sz="950" dirty="0"/>
+          </a:p>
+        </p:txBody>
+      </p:sp>
+      <p:sp>
+        <p:nvSpPr>
+          <p:cNvPr id="19" name="Shape 17"/>
+          <p:cNvSpPr/>
+          <p:nvPr/>
+        </p:nvSpPr>
+        <p:spPr>
+          <a:xfrm>
+            <a:off x="6035040" y="1234440"/>
+            <a:ext cx="2633472" cy="1417320"/>
           </a:xfrm>
           <a:prstGeom prst="rect">
             <a:avLst/>
@@ -3091,37 +3018,112 @@
       </p:sp>
       <p:sp>
         <p:nvSpPr>
+          <p:cNvPr id="20" name="Shape 18"/>
+          <p:cNvSpPr/>
+          <p:nvPr/>
+        </p:nvSpPr>
+        <p:spPr>
+          <a:xfrm>
+            <a:off x="6035040" y="1234440"/>
+            <a:ext cx="2633472" cy="420624"/>
+          </a:xfrm>
+          <a:prstGeom prst="rect">
+            <a:avLst/>
+          </a:prstGeom>
+          <a:solidFill>
+            <a:srgbClr val="EDE9FE"/>
+          </a:solidFill>
+          <a:ln w="12700">
+            <a:solidFill>
+              <a:srgbClr val="EDE9FE"/>
+            </a:solidFill>
+            <a:prstDash val="solid"/>
+          </a:ln>
+        </p:spPr>
+      </p:sp>
+      <p:sp>
+        <p:nvSpPr>
+          <p:cNvPr id="21" name="Shape 19"/>
+          <p:cNvSpPr/>
+          <p:nvPr/>
+        </p:nvSpPr>
+        <p:spPr>
+          <a:xfrm>
+            <a:off x="6035040" y="1234440"/>
+            <a:ext cx="54864" cy="1417320"/>
+          </a:xfrm>
+          <a:prstGeom prst="rect">
+            <a:avLst/>
+          </a:prstGeom>
+          <a:solidFill>
+            <a:srgbClr val="7C3AED"/>
+          </a:solidFill>
+          <a:ln w="12700">
+            <a:solidFill>
+              <a:srgbClr val="7C3AED"/>
+            </a:solidFill>
+            <a:prstDash val="solid"/>
+          </a:ln>
+        </p:spPr>
+      </p:sp>
+      <p:sp>
+        <p:nvSpPr>
+          <p:cNvPr id="22" name="Shape 20"/>
+          <p:cNvSpPr/>
+          <p:nvPr/>
+        </p:nvSpPr>
+        <p:spPr>
+          <a:xfrm>
+            <a:off x="6163056" y="1307592"/>
+            <a:ext cx="292608" cy="292608"/>
+          </a:xfrm>
+          <a:prstGeom prst="ellipse">
+            <a:avLst/>
+          </a:prstGeom>
+          <a:solidFill>
+            <a:srgbClr val="7C3AED"/>
+          </a:solidFill>
+          <a:ln w="12700">
+            <a:solidFill>
+              <a:srgbClr val="7C3AED"/>
+            </a:solidFill>
+            <a:prstDash val="solid"/>
+          </a:ln>
+        </p:spPr>
+      </p:sp>
+      <p:sp>
+        <p:nvSpPr>
           <p:cNvPr id="23" name="Text 21"/>
           <p:cNvSpPr/>
           <p:nvPr/>
         </p:nvSpPr>
         <p:spPr>
           <a:xfrm>
-            <a:off x="6236208" y="2697480"/>
-            <a:ext cx="2468880" cy="274320"/>
-          </a:xfrm>
-          <a:prstGeom prst="rect">
-            <a:avLst/>
-          </a:prstGeom>
-          <a:noFill/>
-          <a:ln/>
-        </p:spPr>
-        <p:txBody>
-          <a:bodyPr wrap="square" lIns="0" tIns="0" rIns="0" bIns="0" rtlCol="0" anchor="ctr"/>
-          <a:lstStyle/>
-          <a:p>
-            <a:pPr indent="0" marL="0">
-              <a:buNone/>
-            </a:pPr>
-            <a:r>
-              <a:rPr lang="en-US" sz="1200" b="1" dirty="0">
-                <a:solidFill>
-                  <a:srgbClr val="1E2761"/>
-                </a:solidFill>
-              </a:rPr>
-              <a:t>🔁 Create &amp; Update</a:t>
-            </a:r>
-            <a:endParaRPr lang="en-US" sz="1200" dirty="0"/>
+            <a:off x="6163056" y="1307592"/>
+            <a:ext cx="292608" cy="292608"/>
+          </a:xfrm>
+          <a:prstGeom prst="rect">
+            <a:avLst/>
+          </a:prstGeom>
+          <a:noFill/>
+          <a:ln/>
+        </p:spPr>
+        <p:txBody>
+          <a:bodyPr wrap="square" lIns="0" tIns="0" rIns="0" bIns="0" rtlCol="0" anchor="ctr"/>
+          <a:lstStyle/>
+          <a:p>
+            <a:pPr algn="ctr" indent="0" marL="0">
+              <a:buNone/>
+            </a:pPr>
+            <a:r>
+              <a:rPr lang="en-US" sz="900" dirty="0">
+                <a:solidFill>
+                  <a:srgbClr val="000000"/>
+                </a:solidFill>
+              </a:rPr>
+              <a:t>📅</a:t>
+            </a:r>
+            <a:endParaRPr lang="en-US" sz="900" dirty="0"/>
           </a:p>
         </p:txBody>
       </p:sp>
@@ -3133,44 +3135,80 @@
         </p:nvSpPr>
         <p:spPr>
           <a:xfrm>
-            <a:off x="6236208" y="2990088"/>
-            <a:ext cx="2468880" cy="457200"/>
-          </a:xfrm>
-          <a:prstGeom prst="rect">
-            <a:avLst/>
-          </a:prstGeom>
-          <a:noFill/>
-          <a:ln/>
-        </p:spPr>
-        <p:txBody>
-          <a:bodyPr wrap="square" lIns="0" tIns="0" rIns="0" bIns="0" rtlCol="0" anchor="ctr"/>
-          <a:lstStyle/>
-          <a:p>
-            <a:pPr indent="0" marL="0">
-              <a:buNone/>
-            </a:pPr>
-            <a:r>
-              <a:rPr lang="en-US" sz="1000" dirty="0">
+            <a:off x="6537960" y="1316736"/>
+            <a:ext cx="2057400" cy="274320"/>
+          </a:xfrm>
+          <a:prstGeom prst="rect">
+            <a:avLst/>
+          </a:prstGeom>
+          <a:noFill/>
+          <a:ln/>
+        </p:spPr>
+        <p:txBody>
+          <a:bodyPr wrap="square" lIns="0" tIns="0" rIns="0" bIns="0" rtlCol="0" anchor="ctr"/>
+          <a:lstStyle/>
+          <a:p>
+            <a:pPr indent="0" marL="0">
+              <a:buNone/>
+            </a:pPr>
+            <a:r>
+              <a:rPr lang="en-US" sz="1100" b="1" dirty="0">
+                <a:solidFill>
+                  <a:srgbClr val="7C3AED"/>
+                </a:solidFill>
+              </a:rPr>
+              <a:t>Sprint-wise Progress Tracking</a:t>
+            </a:r>
+            <a:endParaRPr lang="en-US" sz="1100" dirty="0"/>
+          </a:p>
+        </p:txBody>
+      </p:sp>
+      <p:sp>
+        <p:nvSpPr>
+          <p:cNvPr id="25" name="Text 23"/>
+          <p:cNvSpPr/>
+          <p:nvPr/>
+        </p:nvSpPr>
+        <p:spPr>
+          <a:xfrm>
+            <a:off x="6163056" y="1709928"/>
+            <a:ext cx="2423160" cy="868680"/>
+          </a:xfrm>
+          <a:prstGeom prst="rect">
+            <a:avLst/>
+          </a:prstGeom>
+          <a:noFill/>
+          <a:ln/>
+        </p:spPr>
+        <p:txBody>
+          <a:bodyPr wrap="square" lIns="0" tIns="0" rIns="0" bIns="0" rtlCol="0" anchor="ctr"/>
+          <a:lstStyle/>
+          <a:p>
+            <a:pPr indent="0" marL="0">
+              <a:buNone/>
+            </a:pPr>
+            <a:r>
+              <a:rPr lang="en-US" sz="950" dirty="0">
                 <a:solidFill>
                   <a:srgbClr val="64748B"/>
                 </a:solidFill>
               </a:rPr>
-              <a:t>New tickets are created; existing ones are updated in place.</a:t>
-            </a:r>
-            <a:endParaRPr lang="en-US" sz="1000" dirty="0"/>
-          </a:p>
-        </p:txBody>
-      </p:sp>
-      <p:sp>
-        <p:nvSpPr>
-          <p:cNvPr id="25" name="Shape 23"/>
-          <p:cNvSpPr/>
-          <p:nvPr/>
-        </p:nvSpPr>
-        <p:spPr>
-          <a:xfrm>
-            <a:off x="365760" y="3703320"/>
-            <a:ext cx="2697480" cy="914400"/>
+              <a:t>Tickets are mapped to GitLab milestones matching the current sprint. Teams can track velocity, completion rate and sprint health directly in GitLab.</a:t>
+            </a:r>
+            <a:endParaRPr lang="en-US" sz="950" dirty="0"/>
+          </a:p>
+        </p:txBody>
+      </p:sp>
+      <p:sp>
+        <p:nvSpPr>
+          <p:cNvPr id="26" name="Shape 24"/>
+          <p:cNvSpPr/>
+          <p:nvPr/>
+        </p:nvSpPr>
+        <p:spPr>
+          <a:xfrm>
+            <a:off x="457200" y="2816352"/>
+            <a:ext cx="2633472" cy="1417320"/>
           </a:xfrm>
           <a:prstGeom prst="rect">
             <a:avLst/>
@@ -3195,86 +3233,197 @@
       </p:sp>
       <p:sp>
         <p:nvSpPr>
-          <p:cNvPr id="26" name="Text 24"/>
-          <p:cNvSpPr/>
-          <p:nvPr/>
-        </p:nvSpPr>
-        <p:spPr>
-          <a:xfrm>
-            <a:off x="475488" y="3794760"/>
-            <a:ext cx="2468880" cy="274320"/>
-          </a:xfrm>
-          <a:prstGeom prst="rect">
-            <a:avLst/>
-          </a:prstGeom>
-          <a:noFill/>
-          <a:ln/>
-        </p:spPr>
-        <p:txBody>
-          <a:bodyPr wrap="square" lIns="0" tIns="0" rIns="0" bIns="0" rtlCol="0" anchor="ctr"/>
-          <a:lstStyle/>
-          <a:p>
-            <a:pPr indent="0" marL="0">
-              <a:buNone/>
-            </a:pPr>
-            <a:r>
-              <a:rPr lang="en-US" sz="1200" b="1" dirty="0">
-                <a:solidFill>
-                  <a:srgbClr val="1E2761"/>
-                </a:solidFill>
-              </a:rPr>
-              <a:t>🏷 Field Mapping</a:t>
-            </a:r>
-            <a:endParaRPr lang="en-US" sz="1200" dirty="0"/>
-          </a:p>
-        </p:txBody>
-      </p:sp>
-      <p:sp>
-        <p:nvSpPr>
-          <p:cNvPr id="27" name="Text 25"/>
-          <p:cNvSpPr/>
-          <p:nvPr/>
-        </p:nvSpPr>
-        <p:spPr>
-          <a:xfrm>
-            <a:off x="475488" y="4087368"/>
-            <a:ext cx="2468880" cy="457200"/>
-          </a:xfrm>
-          <a:prstGeom prst="rect">
-            <a:avLst/>
-          </a:prstGeom>
-          <a:noFill/>
-          <a:ln/>
-        </p:spPr>
-        <p:txBody>
-          <a:bodyPr wrap="square" lIns="0" tIns="0" rIns="0" bIns="0" rtlCol="0" anchor="ctr"/>
-          <a:lstStyle/>
-          <a:p>
-            <a:pPr indent="0" marL="0">
-              <a:buNone/>
-            </a:pPr>
-            <a:r>
-              <a:rPr lang="en-US" sz="1000" dirty="0">
+          <p:cNvPr id="27" name="Shape 25"/>
+          <p:cNvSpPr/>
+          <p:nvPr/>
+        </p:nvSpPr>
+        <p:spPr>
+          <a:xfrm>
+            <a:off x="457200" y="2816352"/>
+            <a:ext cx="2633472" cy="420624"/>
+          </a:xfrm>
+          <a:prstGeom prst="rect">
+            <a:avLst/>
+          </a:prstGeom>
+          <a:solidFill>
+            <a:srgbClr val="DCFCE7"/>
+          </a:solidFill>
+          <a:ln w="12700">
+            <a:solidFill>
+              <a:srgbClr val="DCFCE7"/>
+            </a:solidFill>
+            <a:prstDash val="solid"/>
+          </a:ln>
+        </p:spPr>
+      </p:sp>
+      <p:sp>
+        <p:nvSpPr>
+          <p:cNvPr id="28" name="Shape 26"/>
+          <p:cNvSpPr/>
+          <p:nvPr/>
+        </p:nvSpPr>
+        <p:spPr>
+          <a:xfrm>
+            <a:off x="457200" y="2816352"/>
+            <a:ext cx="54864" cy="1417320"/>
+          </a:xfrm>
+          <a:prstGeom prst="rect">
+            <a:avLst/>
+          </a:prstGeom>
+          <a:solidFill>
+            <a:srgbClr val="16A34A"/>
+          </a:solidFill>
+          <a:ln w="12700">
+            <a:solidFill>
+              <a:srgbClr val="16A34A"/>
+            </a:solidFill>
+            <a:prstDash val="solid"/>
+          </a:ln>
+        </p:spPr>
+      </p:sp>
+      <p:sp>
+        <p:nvSpPr>
+          <p:cNvPr id="29" name="Shape 27"/>
+          <p:cNvSpPr/>
+          <p:nvPr/>
+        </p:nvSpPr>
+        <p:spPr>
+          <a:xfrm>
+            <a:off x="585216" y="2889504"/>
+            <a:ext cx="292608" cy="292608"/>
+          </a:xfrm>
+          <a:prstGeom prst="ellipse">
+            <a:avLst/>
+          </a:prstGeom>
+          <a:solidFill>
+            <a:srgbClr val="16A34A"/>
+          </a:solidFill>
+          <a:ln w="12700">
+            <a:solidFill>
+              <a:srgbClr val="16A34A"/>
+            </a:solidFill>
+            <a:prstDash val="solid"/>
+          </a:ln>
+        </p:spPr>
+      </p:sp>
+      <p:sp>
+        <p:nvSpPr>
+          <p:cNvPr id="30" name="Text 28"/>
+          <p:cNvSpPr/>
+          <p:nvPr/>
+        </p:nvSpPr>
+        <p:spPr>
+          <a:xfrm>
+            <a:off x="585216" y="2889504"/>
+            <a:ext cx="292608" cy="292608"/>
+          </a:xfrm>
+          <a:prstGeom prst="rect">
+            <a:avLst/>
+          </a:prstGeom>
+          <a:noFill/>
+          <a:ln/>
+        </p:spPr>
+        <p:txBody>
+          <a:bodyPr wrap="square" lIns="0" tIns="0" rIns="0" bIns="0" rtlCol="0" anchor="ctr"/>
+          <a:lstStyle/>
+          <a:p>
+            <a:pPr algn="ctr" indent="0" marL="0">
+              <a:buNone/>
+            </a:pPr>
+            <a:r>
+              <a:rPr lang="en-US" sz="900" dirty="0">
+                <a:solidFill>
+                  <a:srgbClr val="000000"/>
+                </a:solidFill>
+              </a:rPr>
+              <a:t>🔗</a:t>
+            </a:r>
+            <a:endParaRPr lang="en-US" sz="900" dirty="0"/>
+          </a:p>
+        </p:txBody>
+      </p:sp>
+      <p:sp>
+        <p:nvSpPr>
+          <p:cNvPr id="31" name="Text 29"/>
+          <p:cNvSpPr/>
+          <p:nvPr/>
+        </p:nvSpPr>
+        <p:spPr>
+          <a:xfrm>
+            <a:off x="960120" y="2898648"/>
+            <a:ext cx="2057400" cy="274320"/>
+          </a:xfrm>
+          <a:prstGeom prst="rect">
+            <a:avLst/>
+          </a:prstGeom>
+          <a:noFill/>
+          <a:ln/>
+        </p:spPr>
+        <p:txBody>
+          <a:bodyPr wrap="square" lIns="0" tIns="0" rIns="0" bIns="0" rtlCol="0" anchor="ctr"/>
+          <a:lstStyle/>
+          <a:p>
+            <a:pPr indent="0" marL="0">
+              <a:buNone/>
+            </a:pPr>
+            <a:r>
+              <a:rPr lang="en-US" sz="1100" b="1" dirty="0">
+                <a:solidFill>
+                  <a:srgbClr val="16A34A"/>
+                </a:solidFill>
+              </a:rPr>
+              <a:t>Code ↔ Work Item Traceability</a:t>
+            </a:r>
+            <a:endParaRPr lang="en-US" sz="1100" dirty="0"/>
+          </a:p>
+        </p:txBody>
+      </p:sp>
+      <p:sp>
+        <p:nvSpPr>
+          <p:cNvPr id="32" name="Text 30"/>
+          <p:cNvSpPr/>
+          <p:nvPr/>
+        </p:nvSpPr>
+        <p:spPr>
+          <a:xfrm>
+            <a:off x="585216" y="3291840"/>
+            <a:ext cx="2423160" cy="868680"/>
+          </a:xfrm>
+          <a:prstGeom prst="rect">
+            <a:avLst/>
+          </a:prstGeom>
+          <a:noFill/>
+          <a:ln/>
+        </p:spPr>
+        <p:txBody>
+          <a:bodyPr wrap="square" lIns="0" tIns="0" rIns="0" bIns="0" rtlCol="0" anchor="ctr"/>
+          <a:lstStyle/>
+          <a:p>
+            <a:pPr indent="0" marL="0">
+              <a:buNone/>
+            </a:pPr>
+            <a:r>
+              <a:rPr lang="en-US" sz="950" dirty="0">
                 <a:solidFill>
                   <a:srgbClr val="64748B"/>
                 </a:solidFill>
               </a:rPr>
-              <a:t>ID, Description, Assignee, Dates, Story Points all synced.</a:t>
-            </a:r>
-            <a:endParaRPr lang="en-US" sz="1000" dirty="0"/>
-          </a:p>
-        </p:txBody>
-      </p:sp>
-      <p:sp>
-        <p:nvSpPr>
-          <p:cNvPr id="28" name="Shape 26"/>
-          <p:cNvSpPr/>
-          <p:nvPr/>
-        </p:nvSpPr>
-        <p:spPr>
-          <a:xfrm>
-            <a:off x="3246120" y="3703320"/>
-            <a:ext cx="2697480" cy="914400"/>
+              <a:t>With issues in GitLab, developers can reference ticket IDs in commits and merge requests — linking code changes directly to the business requirement.</a:t>
+            </a:r>
+            <a:endParaRPr lang="en-US" sz="950" dirty="0"/>
+          </a:p>
+        </p:txBody>
+      </p:sp>
+      <p:sp>
+        <p:nvSpPr>
+          <p:cNvPr id="33" name="Shape 31"/>
+          <p:cNvSpPr/>
+          <p:nvPr/>
+        </p:nvSpPr>
+        <p:spPr>
+          <a:xfrm>
+            <a:off x="3246120" y="2816352"/>
+            <a:ext cx="2633472" cy="1417320"/>
           </a:xfrm>
           <a:prstGeom prst="rect">
             <a:avLst/>
@@ -3299,86 +3448,197 @@
       </p:sp>
       <p:sp>
         <p:nvSpPr>
-          <p:cNvPr id="29" name="Text 27"/>
-          <p:cNvSpPr/>
-          <p:nvPr/>
-        </p:nvSpPr>
-        <p:spPr>
-          <a:xfrm>
-            <a:off x="3355848" y="3794760"/>
-            <a:ext cx="2468880" cy="274320"/>
-          </a:xfrm>
-          <a:prstGeom prst="rect">
-            <a:avLst/>
-          </a:prstGeom>
-          <a:noFill/>
-          <a:ln/>
-        </p:spPr>
-        <p:txBody>
-          <a:bodyPr wrap="square" lIns="0" tIns="0" rIns="0" bIns="0" rtlCol="0" anchor="ctr"/>
-          <a:lstStyle/>
-          <a:p>
-            <a:pPr indent="0" marL="0">
-              <a:buNone/>
-            </a:pPr>
-            <a:r>
-              <a:rPr lang="en-US" sz="1200" b="1" dirty="0">
-                <a:solidFill>
-                  <a:srgbClr val="1E2761"/>
-                </a:solidFill>
-              </a:rPr>
-              <a:t>📝 Full Logging</a:t>
-            </a:r>
-            <a:endParaRPr lang="en-US" sz="1200" dirty="0"/>
-          </a:p>
-        </p:txBody>
-      </p:sp>
-      <p:sp>
-        <p:nvSpPr>
-          <p:cNvPr id="30" name="Text 28"/>
-          <p:cNvSpPr/>
-          <p:nvPr/>
-        </p:nvSpPr>
-        <p:spPr>
-          <a:xfrm>
-            <a:off x="3355848" y="4087368"/>
-            <a:ext cx="2468880" cy="457200"/>
-          </a:xfrm>
-          <a:prstGeom prst="rect">
-            <a:avLst/>
-          </a:prstGeom>
-          <a:noFill/>
-          <a:ln/>
-        </p:spPr>
-        <p:txBody>
-          <a:bodyPr wrap="square" lIns="0" tIns="0" rIns="0" bIns="0" rtlCol="0" anchor="ctr"/>
-          <a:lstStyle/>
-          <a:p>
-            <a:pPr indent="0" marL="0">
-              <a:buNone/>
-            </a:pPr>
-            <a:r>
-              <a:rPr lang="en-US" sz="1000" dirty="0">
+          <p:cNvPr id="34" name="Shape 32"/>
+          <p:cNvSpPr/>
+          <p:nvPr/>
+        </p:nvSpPr>
+        <p:spPr>
+          <a:xfrm>
+            <a:off x="3246120" y="2816352"/>
+            <a:ext cx="2633472" cy="420624"/>
+          </a:xfrm>
+          <a:prstGeom prst="rect">
+            <a:avLst/>
+          </a:prstGeom>
+          <a:solidFill>
+            <a:srgbClr val="FFF7ED"/>
+          </a:solidFill>
+          <a:ln w="12700">
+            <a:solidFill>
+              <a:srgbClr val="FFF7ED"/>
+            </a:solidFill>
+            <a:prstDash val="solid"/>
+          </a:ln>
+        </p:spPr>
+      </p:sp>
+      <p:sp>
+        <p:nvSpPr>
+          <p:cNvPr id="35" name="Shape 33"/>
+          <p:cNvSpPr/>
+          <p:nvPr/>
+        </p:nvSpPr>
+        <p:spPr>
+          <a:xfrm>
+            <a:off x="3246120" y="2816352"/>
+            <a:ext cx="54864" cy="1417320"/>
+          </a:xfrm>
+          <a:prstGeom prst="rect">
+            <a:avLst/>
+          </a:prstGeom>
+          <a:solidFill>
+            <a:srgbClr val="EA580C"/>
+          </a:solidFill>
+          <a:ln w="12700">
+            <a:solidFill>
+              <a:srgbClr val="EA580C"/>
+            </a:solidFill>
+            <a:prstDash val="solid"/>
+          </a:ln>
+        </p:spPr>
+      </p:sp>
+      <p:sp>
+        <p:nvSpPr>
+          <p:cNvPr id="36" name="Shape 34"/>
+          <p:cNvSpPr/>
+          <p:nvPr/>
+        </p:nvSpPr>
+        <p:spPr>
+          <a:xfrm>
+            <a:off x="3374136" y="2889504"/>
+            <a:ext cx="292608" cy="292608"/>
+          </a:xfrm>
+          <a:prstGeom prst="ellipse">
+            <a:avLst/>
+          </a:prstGeom>
+          <a:solidFill>
+            <a:srgbClr val="EA580C"/>
+          </a:solidFill>
+          <a:ln w="12700">
+            <a:solidFill>
+              <a:srgbClr val="EA580C"/>
+            </a:solidFill>
+            <a:prstDash val="solid"/>
+          </a:ln>
+        </p:spPr>
+      </p:sp>
+      <p:sp>
+        <p:nvSpPr>
+          <p:cNvPr id="37" name="Text 35"/>
+          <p:cNvSpPr/>
+          <p:nvPr/>
+        </p:nvSpPr>
+        <p:spPr>
+          <a:xfrm>
+            <a:off x="3374136" y="2889504"/>
+            <a:ext cx="292608" cy="292608"/>
+          </a:xfrm>
+          <a:prstGeom prst="rect">
+            <a:avLst/>
+          </a:prstGeom>
+          <a:noFill/>
+          <a:ln/>
+        </p:spPr>
+        <p:txBody>
+          <a:bodyPr wrap="square" lIns="0" tIns="0" rIns="0" bIns="0" rtlCol="0" anchor="ctr"/>
+          <a:lstStyle/>
+          <a:p>
+            <a:pPr algn="ctr" indent="0" marL="0">
+              <a:buNone/>
+            </a:pPr>
+            <a:r>
+              <a:rPr lang="en-US" sz="900" dirty="0">
+                <a:solidFill>
+                  <a:srgbClr val="000000"/>
+                </a:solidFill>
+              </a:rPr>
+              <a:t>⚡</a:t>
+            </a:r>
+            <a:endParaRPr lang="en-US" sz="900" dirty="0"/>
+          </a:p>
+        </p:txBody>
+      </p:sp>
+      <p:sp>
+        <p:nvSpPr>
+          <p:cNvPr id="38" name="Text 36"/>
+          <p:cNvSpPr/>
+          <p:nvPr/>
+        </p:nvSpPr>
+        <p:spPr>
+          <a:xfrm>
+            <a:off x="3749040" y="2898648"/>
+            <a:ext cx="2057400" cy="274320"/>
+          </a:xfrm>
+          <a:prstGeom prst="rect">
+            <a:avLst/>
+          </a:prstGeom>
+          <a:noFill/>
+          <a:ln/>
+        </p:spPr>
+        <p:txBody>
+          <a:bodyPr wrap="square" lIns="0" tIns="0" rIns="0" bIns="0" rtlCol="0" anchor="ctr"/>
+          <a:lstStyle/>
+          <a:p>
+            <a:pPr indent="0" marL="0">
+              <a:buNone/>
+            </a:pPr>
+            <a:r>
+              <a:rPr lang="en-US" sz="1100" b="1" dirty="0">
+                <a:solidFill>
+                  <a:srgbClr val="EA580C"/>
+                </a:solidFill>
+              </a:rPr>
+              <a:t>Zero Manual Effort</a:t>
+            </a:r>
+            <a:endParaRPr lang="en-US" sz="1100" dirty="0"/>
+          </a:p>
+        </p:txBody>
+      </p:sp>
+      <p:sp>
+        <p:nvSpPr>
+          <p:cNvPr id="39" name="Text 37"/>
+          <p:cNvSpPr/>
+          <p:nvPr/>
+        </p:nvSpPr>
+        <p:spPr>
+          <a:xfrm>
+            <a:off x="3374136" y="3291840"/>
+            <a:ext cx="2423160" cy="868680"/>
+          </a:xfrm>
+          <a:prstGeom prst="rect">
+            <a:avLst/>
+          </a:prstGeom>
+          <a:noFill/>
+          <a:ln/>
+        </p:spPr>
+        <p:txBody>
+          <a:bodyPr wrap="square" lIns="0" tIns="0" rIns="0" bIns="0" rtlCol="0" anchor="ctr"/>
+          <a:lstStyle/>
+          <a:p>
+            <a:pPr indent="0" marL="0">
+              <a:buNone/>
+            </a:pPr>
+            <a:r>
+              <a:rPr lang="en-US" sz="950" dirty="0">
                 <a:solidFill>
                   <a:srgbClr val="64748B"/>
                 </a:solidFill>
               </a:rPr>
-              <a:t>Microsoft ILogger with Debug/Info/Warn/Error levels.</a:t>
-            </a:r>
-            <a:endParaRPr lang="en-US" sz="1000" dirty="0"/>
-          </a:p>
-        </p:txBody>
-      </p:sp>
-      <p:sp>
-        <p:nvSpPr>
-          <p:cNvPr id="31" name="Shape 29"/>
-          <p:cNvSpPr/>
-          <p:nvPr/>
-        </p:nvSpPr>
-        <p:spPr>
-          <a:xfrm>
-            <a:off x="6126480" y="3703320"/>
-            <a:ext cx="2697480" cy="914400"/>
+              <a:t>The service runs automatically every 15 minutes. No copy-pasting, no spreadsheet updates — the sync is fully hands-free once deployed.</a:t>
+            </a:r>
+            <a:endParaRPr lang="en-US" sz="950" dirty="0"/>
+          </a:p>
+        </p:txBody>
+      </p:sp>
+      <p:sp>
+        <p:nvSpPr>
+          <p:cNvPr id="40" name="Shape 38"/>
+          <p:cNvSpPr/>
+          <p:nvPr/>
+        </p:nvSpPr>
+        <p:spPr>
+          <a:xfrm>
+            <a:off x="6035040" y="2816352"/>
+            <a:ext cx="2633472" cy="1417320"/>
           </a:xfrm>
           <a:prstGeom prst="rect">
             <a:avLst/>
@@ -3403,86 +3663,39 @@
       </p:sp>
       <p:sp>
         <p:nvSpPr>
-          <p:cNvPr id="32" name="Text 30"/>
-          <p:cNvSpPr/>
-          <p:nvPr/>
-        </p:nvSpPr>
-        <p:spPr>
-          <a:xfrm>
-            <a:off x="6236208" y="3794760"/>
-            <a:ext cx="2468880" cy="274320"/>
-          </a:xfrm>
-          <a:prstGeom prst="rect">
-            <a:avLst/>
-          </a:prstGeom>
-          <a:noFill/>
-          <a:ln/>
-        </p:spPr>
-        <p:txBody>
-          <a:bodyPr wrap="square" lIns="0" tIns="0" rIns="0" bIns="0" rtlCol="0" anchor="ctr"/>
-          <a:lstStyle/>
-          <a:p>
-            <a:pPr indent="0" marL="0">
-              <a:buNone/>
-            </a:pPr>
-            <a:r>
-              <a:rPr lang="en-US" sz="1200" b="1" dirty="0">
-                <a:solidFill>
-                  <a:srgbClr val="1E2761"/>
-                </a:solidFill>
-              </a:rPr>
-              <a:t>⚙️ Config-Driven</a:t>
-            </a:r>
-            <a:endParaRPr lang="en-US" sz="1200" dirty="0"/>
-          </a:p>
-        </p:txBody>
-      </p:sp>
-      <p:sp>
-        <p:nvSpPr>
-          <p:cNvPr id="33" name="Text 31"/>
-          <p:cNvSpPr/>
-          <p:nvPr/>
-        </p:nvSpPr>
-        <p:spPr>
-          <a:xfrm>
-            <a:off x="6236208" y="4087368"/>
-            <a:ext cx="2468880" cy="457200"/>
-          </a:xfrm>
-          <a:prstGeom prst="rect">
-            <a:avLst/>
-          </a:prstGeom>
-          <a:noFill/>
-          <a:ln/>
-        </p:spPr>
-        <p:txBody>
-          <a:bodyPr wrap="square" lIns="0" tIns="0" rIns="0" bIns="0" rtlCol="0" anchor="ctr"/>
-          <a:lstStyle/>
-          <a:p>
-            <a:pPr indent="0" marL="0">
-              <a:buNone/>
-            </a:pPr>
-            <a:r>
-              <a:rPr lang="en-US" sz="1000" dirty="0">
-                <a:solidFill>
-                  <a:srgbClr val="64748B"/>
-                </a:solidFill>
-              </a:rPr>
-              <a:t>All settings in appsettings.json — no recompile needed.</a:t>
-            </a:r>
-            <a:endParaRPr lang="en-US" sz="1000" dirty="0"/>
-          </a:p>
-        </p:txBody>
-      </p:sp>
-      <p:sp>
-        <p:nvSpPr>
-          <p:cNvPr id="34" name="Shape 32"/>
-          <p:cNvSpPr/>
-          <p:nvPr/>
-        </p:nvSpPr>
-        <p:spPr>
-          <a:xfrm>
-            <a:off x="0" y="4892040"/>
-            <a:ext cx="9144000" cy="251460"/>
+          <p:cNvPr id="41" name="Shape 39"/>
+          <p:cNvSpPr/>
+          <p:nvPr/>
+        </p:nvSpPr>
+        <p:spPr>
+          <a:xfrm>
+            <a:off x="6035040" y="2816352"/>
+            <a:ext cx="2633472" cy="420624"/>
+          </a:xfrm>
+          <a:prstGeom prst="rect">
+            <a:avLst/>
+          </a:prstGeom>
+          <a:solidFill>
+            <a:srgbClr val="E8EAF6"/>
+          </a:solidFill>
+          <a:ln w="12700">
+            <a:solidFill>
+              <a:srgbClr val="E8EAF6"/>
+            </a:solidFill>
+            <a:prstDash val="solid"/>
+          </a:ln>
+        </p:spPr>
+      </p:sp>
+      <p:sp>
+        <p:nvSpPr>
+          <p:cNvPr id="42" name="Shape 40"/>
+          <p:cNvSpPr/>
+          <p:nvPr/>
+        </p:nvSpPr>
+        <p:spPr>
+          <a:xfrm>
+            <a:off x="6035040" y="2816352"/>
+            <a:ext cx="54864" cy="1417320"/>
           </a:xfrm>
           <a:prstGeom prst="rect">
             <a:avLst/>
@@ -3500,7 +3713,226 @@
       </p:sp>
       <p:sp>
         <p:nvSpPr>
-          <p:cNvPr id="35" name="Text 33"/>
+          <p:cNvPr id="43" name="Shape 41"/>
+          <p:cNvSpPr/>
+          <p:nvPr/>
+        </p:nvSpPr>
+        <p:spPr>
+          <a:xfrm>
+            <a:off x="6163056" y="2889504"/>
+            <a:ext cx="292608" cy="292608"/>
+          </a:xfrm>
+          <a:prstGeom prst="ellipse">
+            <a:avLst/>
+          </a:prstGeom>
+          <a:solidFill>
+            <a:srgbClr val="1E2761"/>
+          </a:solidFill>
+          <a:ln w="12700">
+            <a:solidFill>
+              <a:srgbClr val="1E2761"/>
+            </a:solidFill>
+            <a:prstDash val="solid"/>
+          </a:ln>
+        </p:spPr>
+      </p:sp>
+      <p:sp>
+        <p:nvSpPr>
+          <p:cNvPr id="44" name="Text 42"/>
+          <p:cNvSpPr/>
+          <p:nvPr/>
+        </p:nvSpPr>
+        <p:spPr>
+          <a:xfrm>
+            <a:off x="6163056" y="2889504"/>
+            <a:ext cx="292608" cy="292608"/>
+          </a:xfrm>
+          <a:prstGeom prst="rect">
+            <a:avLst/>
+          </a:prstGeom>
+          <a:noFill/>
+          <a:ln/>
+        </p:spPr>
+        <p:txBody>
+          <a:bodyPr wrap="square" lIns="0" tIns="0" rIns="0" bIns="0" rtlCol="0" anchor="ctr"/>
+          <a:lstStyle/>
+          <a:p>
+            <a:pPr algn="ctr" indent="0" marL="0">
+              <a:buNone/>
+            </a:pPr>
+            <a:r>
+              <a:rPr lang="en-US" sz="900" dirty="0">
+                <a:solidFill>
+                  <a:srgbClr val="000000"/>
+                </a:solidFill>
+              </a:rPr>
+              <a:t>📊</a:t>
+            </a:r>
+            <a:endParaRPr lang="en-US" sz="900" dirty="0"/>
+          </a:p>
+        </p:txBody>
+      </p:sp>
+      <p:sp>
+        <p:nvSpPr>
+          <p:cNvPr id="45" name="Text 43"/>
+          <p:cNvSpPr/>
+          <p:nvPr/>
+        </p:nvSpPr>
+        <p:spPr>
+          <a:xfrm>
+            <a:off x="6537960" y="2898648"/>
+            <a:ext cx="2057400" cy="274320"/>
+          </a:xfrm>
+          <a:prstGeom prst="rect">
+            <a:avLst/>
+          </a:prstGeom>
+          <a:noFill/>
+          <a:ln/>
+        </p:spPr>
+        <p:txBody>
+          <a:bodyPr wrap="square" lIns="0" tIns="0" rIns="0" bIns="0" rtlCol="0" anchor="ctr"/>
+          <a:lstStyle/>
+          <a:p>
+            <a:pPr indent="0" marL="0">
+              <a:buNone/>
+            </a:pPr>
+            <a:r>
+              <a:rPr lang="en-US" sz="1100" b="1" dirty="0">
+                <a:solidFill>
+                  <a:srgbClr val="1E2761"/>
+                </a:solidFill>
+              </a:rPr>
+              <a:t>Better Reporting &amp; Retrospectives</a:t>
+            </a:r>
+            <a:endParaRPr lang="en-US" sz="1100" dirty="0"/>
+          </a:p>
+        </p:txBody>
+      </p:sp>
+      <p:sp>
+        <p:nvSpPr>
+          <p:cNvPr id="46" name="Text 44"/>
+          <p:cNvSpPr/>
+          <p:nvPr/>
+        </p:nvSpPr>
+        <p:spPr>
+          <a:xfrm>
+            <a:off x="6163056" y="3291840"/>
+            <a:ext cx="2423160" cy="868680"/>
+          </a:xfrm>
+          <a:prstGeom prst="rect">
+            <a:avLst/>
+          </a:prstGeom>
+          <a:noFill/>
+          <a:ln/>
+        </p:spPr>
+        <p:txBody>
+          <a:bodyPr wrap="square" lIns="0" tIns="0" rIns="0" bIns="0" rtlCol="0" anchor="ctr"/>
+          <a:lstStyle/>
+          <a:p>
+            <a:pPr indent="0" marL="0">
+              <a:buNone/>
+            </a:pPr>
+            <a:r>
+              <a:rPr lang="en-US" sz="950" dirty="0">
+                <a:solidFill>
+                  <a:srgbClr val="64748B"/>
+                </a:solidFill>
+              </a:rPr>
+              <a:t>GitLab burndown charts, issue boards and milestone reports give the team accurate sprint data for retrospectives and stakeholder updates.</a:t>
+            </a:r>
+            <a:endParaRPr lang="en-US" sz="950" dirty="0"/>
+          </a:p>
+        </p:txBody>
+      </p:sp>
+      <p:sp>
+        <p:nvSpPr>
+          <p:cNvPr id="47" name="Shape 45"/>
+          <p:cNvSpPr/>
+          <p:nvPr/>
+        </p:nvSpPr>
+        <p:spPr>
+          <a:xfrm>
+            <a:off x="457200" y="4370832"/>
+            <a:ext cx="8229600" cy="384048"/>
+          </a:xfrm>
+          <a:prstGeom prst="rect">
+            <a:avLst/>
+          </a:prstGeom>
+          <a:solidFill>
+            <a:srgbClr val="1E2761"/>
+          </a:solidFill>
+          <a:ln w="12700">
+            <a:solidFill>
+              <a:srgbClr val="1E2761"/>
+            </a:solidFill>
+            <a:prstDash val="solid"/>
+          </a:ln>
+        </p:spPr>
+      </p:sp>
+      <p:sp>
+        <p:nvSpPr>
+          <p:cNvPr id="48" name="Text 46"/>
+          <p:cNvSpPr/>
+          <p:nvPr/>
+        </p:nvSpPr>
+        <p:spPr>
+          <a:xfrm>
+            <a:off x="548640" y="4370832"/>
+            <a:ext cx="8046720" cy="384048"/>
+          </a:xfrm>
+          <a:prstGeom prst="rect">
+            <a:avLst/>
+          </a:prstGeom>
+          <a:noFill/>
+          <a:ln/>
+        </p:spPr>
+        <p:txBody>
+          <a:bodyPr wrap="square" lIns="0" tIns="0" rIns="0" bIns="0" rtlCol="0" anchor="ctr"/>
+          <a:lstStyle/>
+          <a:p>
+            <a:pPr algn="ctr" indent="0" marL="0">
+              <a:buNone/>
+            </a:pPr>
+            <a:r>
+              <a:rPr lang="en-US" sz="1100" b="1" dirty="0">
+                <a:solidFill>
+                  <a:srgbClr val="FFFFFF"/>
+                </a:solidFill>
+              </a:rPr>
+              <a:t>✓ No Jira licence needed for developers     ✓ Replaces Excel tracking     ✓ Sprint progress in GitLab     ✓ Fully automated</a:t>
+            </a:r>
+            <a:endParaRPr lang="en-US" sz="1100" dirty="0"/>
+          </a:p>
+        </p:txBody>
+      </p:sp>
+      <p:sp>
+        <p:nvSpPr>
+          <p:cNvPr id="49" name="Shape 47"/>
+          <p:cNvSpPr/>
+          <p:nvPr/>
+        </p:nvSpPr>
+        <p:spPr>
+          <a:xfrm>
+            <a:off x="0" y="4892040"/>
+            <a:ext cx="9144000" cy="251460"/>
+          </a:xfrm>
+          <a:prstGeom prst="rect">
+            <a:avLst/>
+          </a:prstGeom>
+          <a:solidFill>
+            <a:srgbClr val="1E2761"/>
+          </a:solidFill>
+          <a:ln w="12700">
+            <a:solidFill>
+              <a:srgbClr val="1E2761"/>
+            </a:solidFill>
+            <a:prstDash val="solid"/>
+          </a:ln>
+        </p:spPr>
+      </p:sp>
+      <p:sp>
+        <p:nvSpPr>
+          <p:cNvPr id="50" name="Text 48"/>
           <p:cNvSpPr/>
           <p:nvPr/>
         </p:nvSpPr>
@@ -3599,7 +4031,7 @@
                 <a:ea typeface="Calibri" pitchFamily="34" charset="-122"/>
                 <a:cs typeface="Calibri" pitchFamily="34" charset="-120"/>
               </a:rPr>
-              <a:t>Architecture</a:t>
+              <a:t>Solution Overview</a:t>
             </a:r>
             <a:endParaRPr lang="en-US" sz="2800" dirty="0"/>
           </a:p>
@@ -3635,7 +4067,7 @@
                   <a:srgbClr val="64748B"/>
                 </a:solidFill>
               </a:rPr>
-              <a:t>Layered .NET 8 service with clean separation of concerns</a:t>
+              <a:t>A .NET 8 Windows Service that automatically replicates Jira tickets to GitLab on a configurable schedule</a:t>
             </a:r>
             <a:endParaRPr lang="en-US" sz="1300" dirty="0"/>
           </a:p>
@@ -3674,8 +4106,112 @@
         </p:nvSpPr>
         <p:spPr>
           <a:xfrm>
-            <a:off x="457200" y="1298448"/>
-            <a:ext cx="8229600" cy="658368"/>
+            <a:off x="365760" y="1371600"/>
+            <a:ext cx="2560320" cy="1005840"/>
+          </a:xfrm>
+          <a:prstGeom prst="rect">
+            <a:avLst/>
+          </a:prstGeom>
+          <a:solidFill>
+            <a:srgbClr val="2563EB"/>
+          </a:solidFill>
+          <a:ln w="12700">
+            <a:solidFill>
+              <a:srgbClr val="2563EB"/>
+            </a:solidFill>
+            <a:prstDash val="solid"/>
+          </a:ln>
+          <a:effectLst>
+            <a:outerShdw sx="100000" sy="100000" kx="0" ky="0" algn="bl" rotWithShape="0" blurRad="101600" dist="38100" dir="8100000">
+              <a:srgbClr val="000000">
+                <a:alpha val="10000"/>
+              </a:srgbClr>
+            </a:outerShdw>
+          </a:effectLst>
+        </p:spPr>
+      </p:sp>
+      <p:sp>
+        <p:nvSpPr>
+          <p:cNvPr id="6" name="Text 4"/>
+          <p:cNvSpPr/>
+          <p:nvPr/>
+        </p:nvSpPr>
+        <p:spPr>
+          <a:xfrm>
+            <a:off x="365760" y="1444752"/>
+            <a:ext cx="2560320" cy="384048"/>
+          </a:xfrm>
+          <a:prstGeom prst="rect">
+            <a:avLst/>
+          </a:prstGeom>
+          <a:noFill/>
+          <a:ln/>
+        </p:spPr>
+        <p:txBody>
+          <a:bodyPr wrap="square" lIns="0" tIns="0" rIns="0" bIns="0" rtlCol="0" anchor="ctr"/>
+          <a:lstStyle/>
+          <a:p>
+            <a:pPr algn="ctr" indent="0" marL="0">
+              <a:buNone/>
+            </a:pPr>
+            <a:r>
+              <a:rPr lang="en-US" sz="1500" b="1" dirty="0">
+                <a:solidFill>
+                  <a:srgbClr val="FFFFFF"/>
+                </a:solidFill>
+              </a:rPr>
+              <a:t>Jira Cloud</a:t>
+            </a:r>
+            <a:endParaRPr lang="en-US" sz="1500" dirty="0"/>
+          </a:p>
+        </p:txBody>
+      </p:sp>
+      <p:sp>
+        <p:nvSpPr>
+          <p:cNvPr id="7" name="Text 5"/>
+          <p:cNvSpPr/>
+          <p:nvPr/>
+        </p:nvSpPr>
+        <p:spPr>
+          <a:xfrm>
+            <a:off x="365760" y="1828800"/>
+            <a:ext cx="2560320" cy="292608"/>
+          </a:xfrm>
+          <a:prstGeom prst="rect">
+            <a:avLst/>
+          </a:prstGeom>
+          <a:noFill/>
+          <a:ln/>
+        </p:spPr>
+        <p:txBody>
+          <a:bodyPr wrap="square" lIns="0" tIns="0" rIns="0" bIns="0" rtlCol="0" anchor="ctr"/>
+          <a:lstStyle/>
+          <a:p>
+            <a:pPr algn="ctr" indent="0" marL="0">
+              <a:buNone/>
+            </a:pPr>
+            <a:r>
+              <a:rPr lang="en-US" sz="1000" dirty="0">
+                <a:solidFill>
+                  <a:srgbClr val="CADCFC"/>
+                </a:solidFill>
+              </a:rPr>
+              <a:t>Stories · Bugs · Tasks</a:t>
+            </a:r>
+            <a:endParaRPr lang="en-US" sz="1000" dirty="0"/>
+          </a:p>
+        </p:txBody>
+      </p:sp>
+      <p:sp>
+        <p:nvSpPr>
+          <p:cNvPr id="8" name="Shape 6"/>
+          <p:cNvSpPr/>
+          <p:nvPr/>
+        </p:nvSpPr>
+        <p:spPr>
+          <a:xfrm>
+            <a:off x="3108960" y="1371600"/>
+            <a:ext cx="2560320" cy="1005840"/>
           </a:xfrm>
           <a:prstGeom prst="rect">
             <a:avLst/>
@@ -3700,6 +4236,1103 @@
       </p:sp>
       <p:sp>
         <p:nvSpPr>
+          <p:cNvPr id="9" name="Text 7"/>
+          <p:cNvSpPr/>
+          <p:nvPr/>
+        </p:nvSpPr>
+        <p:spPr>
+          <a:xfrm>
+            <a:off x="3108960" y="1444752"/>
+            <a:ext cx="2560320" cy="384048"/>
+          </a:xfrm>
+          <a:prstGeom prst="rect">
+            <a:avLst/>
+          </a:prstGeom>
+          <a:noFill/>
+          <a:ln/>
+        </p:spPr>
+        <p:txBody>
+          <a:bodyPr wrap="square" lIns="0" tIns="0" rIns="0" bIns="0" rtlCol="0" anchor="ctr"/>
+          <a:lstStyle/>
+          <a:p>
+            <a:pPr algn="ctr" indent="0" marL="0">
+              <a:buNone/>
+            </a:pPr>
+            <a:r>
+              <a:rPr lang="en-US" sz="1500" b="1" dirty="0">
+                <a:solidFill>
+                  <a:srgbClr val="FFFFFF"/>
+                </a:solidFill>
+              </a:rPr>
+              <a:t>Sync Service</a:t>
+            </a:r>
+            <a:endParaRPr lang="en-US" sz="1500" dirty="0"/>
+          </a:p>
+        </p:txBody>
+      </p:sp>
+      <p:sp>
+        <p:nvSpPr>
+          <p:cNvPr id="10" name="Text 8"/>
+          <p:cNvSpPr/>
+          <p:nvPr/>
+        </p:nvSpPr>
+        <p:spPr>
+          <a:xfrm>
+            <a:off x="3108960" y="1828800"/>
+            <a:ext cx="2560320" cy="292608"/>
+          </a:xfrm>
+          <a:prstGeom prst="rect">
+            <a:avLst/>
+          </a:prstGeom>
+          <a:noFill/>
+          <a:ln/>
+        </p:spPr>
+        <p:txBody>
+          <a:bodyPr wrap="square" lIns="0" tIns="0" rIns="0" bIns="0" rtlCol="0" anchor="ctr"/>
+          <a:lstStyle/>
+          <a:p>
+            <a:pPr algn="ctr" indent="0" marL="0">
+              <a:buNone/>
+            </a:pPr>
+            <a:r>
+              <a:rPr lang="en-US" sz="1000" dirty="0">
+                <a:solidFill>
+                  <a:srgbClr val="CADCFC"/>
+                </a:solidFill>
+              </a:rPr>
+              <a:t>.NET 8 Windows Service</a:t>
+            </a:r>
+            <a:endParaRPr lang="en-US" sz="1000" dirty="0"/>
+          </a:p>
+        </p:txBody>
+      </p:sp>
+      <p:sp>
+        <p:nvSpPr>
+          <p:cNvPr id="11" name="Shape 9"/>
+          <p:cNvSpPr/>
+          <p:nvPr/>
+        </p:nvSpPr>
+        <p:spPr>
+          <a:xfrm>
+            <a:off x="5852160" y="1371600"/>
+            <a:ext cx="2560320" cy="1005840"/>
+          </a:xfrm>
+          <a:prstGeom prst="rect">
+            <a:avLst/>
+          </a:prstGeom>
+          <a:solidFill>
+            <a:srgbClr val="0D9488"/>
+          </a:solidFill>
+          <a:ln w="12700">
+            <a:solidFill>
+              <a:srgbClr val="0D9488"/>
+            </a:solidFill>
+            <a:prstDash val="solid"/>
+          </a:ln>
+          <a:effectLst>
+            <a:outerShdw sx="100000" sy="100000" kx="0" ky="0" algn="bl" rotWithShape="0" blurRad="101600" dist="38100" dir="8100000">
+              <a:srgbClr val="000000">
+                <a:alpha val="10000"/>
+              </a:srgbClr>
+            </a:outerShdw>
+          </a:effectLst>
+        </p:spPr>
+      </p:sp>
+      <p:sp>
+        <p:nvSpPr>
+          <p:cNvPr id="12" name="Text 10"/>
+          <p:cNvSpPr/>
+          <p:nvPr/>
+        </p:nvSpPr>
+        <p:spPr>
+          <a:xfrm>
+            <a:off x="5852160" y="1444752"/>
+            <a:ext cx="2560320" cy="384048"/>
+          </a:xfrm>
+          <a:prstGeom prst="rect">
+            <a:avLst/>
+          </a:prstGeom>
+          <a:noFill/>
+          <a:ln/>
+        </p:spPr>
+        <p:txBody>
+          <a:bodyPr wrap="square" lIns="0" tIns="0" rIns="0" bIns="0" rtlCol="0" anchor="ctr"/>
+          <a:lstStyle/>
+          <a:p>
+            <a:pPr algn="ctr" indent="0" marL="0">
+              <a:buNone/>
+            </a:pPr>
+            <a:r>
+              <a:rPr lang="en-US" sz="1500" b="1" dirty="0">
+                <a:solidFill>
+                  <a:srgbClr val="FFFFFF"/>
+                </a:solidFill>
+              </a:rPr>
+              <a:t>GitLab</a:t>
+            </a:r>
+            <a:endParaRPr lang="en-US" sz="1500" dirty="0"/>
+          </a:p>
+        </p:txBody>
+      </p:sp>
+      <p:sp>
+        <p:nvSpPr>
+          <p:cNvPr id="13" name="Text 11"/>
+          <p:cNvSpPr/>
+          <p:nvPr/>
+        </p:nvSpPr>
+        <p:spPr>
+          <a:xfrm>
+            <a:off x="5852160" y="1828800"/>
+            <a:ext cx="2560320" cy="292608"/>
+          </a:xfrm>
+          <a:prstGeom prst="rect">
+            <a:avLst/>
+          </a:prstGeom>
+          <a:noFill/>
+          <a:ln/>
+        </p:spPr>
+        <p:txBody>
+          <a:bodyPr wrap="square" lIns="0" tIns="0" rIns="0" bIns="0" rtlCol="0" anchor="ctr"/>
+          <a:lstStyle/>
+          <a:p>
+            <a:pPr algn="ctr" indent="0" marL="0">
+              <a:buNone/>
+            </a:pPr>
+            <a:r>
+              <a:rPr lang="en-US" sz="1000" dirty="0">
+                <a:solidFill>
+                  <a:srgbClr val="CADCFC"/>
+                </a:solidFill>
+              </a:rPr>
+              <a:t>Issues · Milestones</a:t>
+            </a:r>
+            <a:endParaRPr lang="en-US" sz="1000" dirty="0"/>
+          </a:p>
+        </p:txBody>
+      </p:sp>
+      <p:sp>
+        <p:nvSpPr>
+          <p:cNvPr id="14" name="Text 12"/>
+          <p:cNvSpPr/>
+          <p:nvPr/>
+        </p:nvSpPr>
+        <p:spPr>
+          <a:xfrm>
+            <a:off x="2898648" y="1737360"/>
+            <a:ext cx="256032" cy="274320"/>
+          </a:xfrm>
+          <a:prstGeom prst="rect">
+            <a:avLst/>
+          </a:prstGeom>
+          <a:noFill/>
+          <a:ln/>
+        </p:spPr>
+        <p:txBody>
+          <a:bodyPr wrap="square" lIns="0" tIns="0" rIns="0" bIns="0" rtlCol="0" anchor="ctr"/>
+          <a:lstStyle/>
+          <a:p>
+            <a:pPr algn="ctr" indent="0" marL="0">
+              <a:buNone/>
+            </a:pPr>
+            <a:r>
+              <a:rPr lang="en-US" sz="1800" b="1" dirty="0">
+                <a:solidFill>
+                  <a:srgbClr val="EA580C"/>
+                </a:solidFill>
+              </a:rPr>
+              <a:t>→</a:t>
+            </a:r>
+            <a:endParaRPr lang="en-US" sz="1800" dirty="0"/>
+          </a:p>
+        </p:txBody>
+      </p:sp>
+      <p:sp>
+        <p:nvSpPr>
+          <p:cNvPr id="15" name="Text 13"/>
+          <p:cNvSpPr/>
+          <p:nvPr/>
+        </p:nvSpPr>
+        <p:spPr>
+          <a:xfrm>
+            <a:off x="5641848" y="1737360"/>
+            <a:ext cx="256032" cy="274320"/>
+          </a:xfrm>
+          <a:prstGeom prst="rect">
+            <a:avLst/>
+          </a:prstGeom>
+          <a:noFill/>
+          <a:ln/>
+        </p:spPr>
+        <p:txBody>
+          <a:bodyPr wrap="square" lIns="0" tIns="0" rIns="0" bIns="0" rtlCol="0" anchor="ctr"/>
+          <a:lstStyle/>
+          <a:p>
+            <a:pPr algn="ctr" indent="0" marL="0">
+              <a:buNone/>
+            </a:pPr>
+            <a:r>
+              <a:rPr lang="en-US" sz="1800" b="1" dirty="0">
+                <a:solidFill>
+                  <a:srgbClr val="EA580C"/>
+                </a:solidFill>
+              </a:rPr>
+              <a:t>→</a:t>
+            </a:r>
+            <a:endParaRPr lang="en-US" sz="1800" dirty="0"/>
+          </a:p>
+        </p:txBody>
+      </p:sp>
+      <p:sp>
+        <p:nvSpPr>
+          <p:cNvPr id="16" name="Shape 14"/>
+          <p:cNvSpPr/>
+          <p:nvPr/>
+        </p:nvSpPr>
+        <p:spPr>
+          <a:xfrm>
+            <a:off x="365760" y="2606040"/>
+            <a:ext cx="2697480" cy="914400"/>
+          </a:xfrm>
+          <a:prstGeom prst="rect">
+            <a:avLst/>
+          </a:prstGeom>
+          <a:solidFill>
+            <a:srgbClr val="FFFFFF"/>
+          </a:solidFill>
+          <a:ln w="12700">
+            <a:solidFill>
+              <a:srgbClr val="E2E8F0"/>
+            </a:solidFill>
+            <a:prstDash val="solid"/>
+          </a:ln>
+          <a:effectLst>
+            <a:outerShdw sx="100000" sy="100000" kx="0" ky="0" algn="bl" rotWithShape="0" blurRad="101600" dist="38100" dir="8100000">
+              <a:srgbClr val="000000">
+                <a:alpha val="10000"/>
+              </a:srgbClr>
+            </a:outerShdw>
+          </a:effectLst>
+        </p:spPr>
+      </p:sp>
+      <p:sp>
+        <p:nvSpPr>
+          <p:cNvPr id="17" name="Text 15"/>
+          <p:cNvSpPr/>
+          <p:nvPr/>
+        </p:nvSpPr>
+        <p:spPr>
+          <a:xfrm>
+            <a:off x="475488" y="2697480"/>
+            <a:ext cx="2468880" cy="274320"/>
+          </a:xfrm>
+          <a:prstGeom prst="rect">
+            <a:avLst/>
+          </a:prstGeom>
+          <a:noFill/>
+          <a:ln/>
+        </p:spPr>
+        <p:txBody>
+          <a:bodyPr wrap="square" lIns="0" tIns="0" rIns="0" bIns="0" rtlCol="0" anchor="ctr"/>
+          <a:lstStyle/>
+          <a:p>
+            <a:pPr indent="0" marL="0">
+              <a:buNone/>
+            </a:pPr>
+            <a:r>
+              <a:rPr lang="en-US" sz="1200" b="1" dirty="0">
+                <a:solidFill>
+                  <a:srgbClr val="1E2761"/>
+                </a:solidFill>
+              </a:rPr>
+              <a:t>⏱ Scheduled Sync</a:t>
+            </a:r>
+            <a:endParaRPr lang="en-US" sz="1200" dirty="0"/>
+          </a:p>
+        </p:txBody>
+      </p:sp>
+      <p:sp>
+        <p:nvSpPr>
+          <p:cNvPr id="18" name="Text 16"/>
+          <p:cNvSpPr/>
+          <p:nvPr/>
+        </p:nvSpPr>
+        <p:spPr>
+          <a:xfrm>
+            <a:off x="475488" y="2990088"/>
+            <a:ext cx="2468880" cy="457200"/>
+          </a:xfrm>
+          <a:prstGeom prst="rect">
+            <a:avLst/>
+          </a:prstGeom>
+          <a:noFill/>
+          <a:ln/>
+        </p:spPr>
+        <p:txBody>
+          <a:bodyPr wrap="square" lIns="0" tIns="0" rIns="0" bIns="0" rtlCol="0" anchor="ctr"/>
+          <a:lstStyle/>
+          <a:p>
+            <a:pPr indent="0" marL="0">
+              <a:buNone/>
+            </a:pPr>
+            <a:r>
+              <a:rPr lang="en-US" sz="1000" dirty="0">
+                <a:solidFill>
+                  <a:srgbClr val="64748B"/>
+                </a:solidFill>
+              </a:rPr>
+              <a:t>Runs every 15 min (configurable). Auto-retry on failure.</a:t>
+            </a:r>
+            <a:endParaRPr lang="en-US" sz="1000" dirty="0"/>
+          </a:p>
+        </p:txBody>
+      </p:sp>
+      <p:sp>
+        <p:nvSpPr>
+          <p:cNvPr id="19" name="Shape 17"/>
+          <p:cNvSpPr/>
+          <p:nvPr/>
+        </p:nvSpPr>
+        <p:spPr>
+          <a:xfrm>
+            <a:off x="3246120" y="2606040"/>
+            <a:ext cx="2697480" cy="914400"/>
+          </a:xfrm>
+          <a:prstGeom prst="rect">
+            <a:avLst/>
+          </a:prstGeom>
+          <a:solidFill>
+            <a:srgbClr val="FFFFFF"/>
+          </a:solidFill>
+          <a:ln w="12700">
+            <a:solidFill>
+              <a:srgbClr val="E2E8F0"/>
+            </a:solidFill>
+            <a:prstDash val="solid"/>
+          </a:ln>
+          <a:effectLst>
+            <a:outerShdw sx="100000" sy="100000" kx="0" ky="0" algn="bl" rotWithShape="0" blurRad="101600" dist="38100" dir="8100000">
+              <a:srgbClr val="000000">
+                <a:alpha val="10000"/>
+              </a:srgbClr>
+            </a:outerShdw>
+          </a:effectLst>
+        </p:spPr>
+      </p:sp>
+      <p:sp>
+        <p:nvSpPr>
+          <p:cNvPr id="20" name="Text 18"/>
+          <p:cNvSpPr/>
+          <p:nvPr/>
+        </p:nvSpPr>
+        <p:spPr>
+          <a:xfrm>
+            <a:off x="3355848" y="2697480"/>
+            <a:ext cx="2468880" cy="274320"/>
+          </a:xfrm>
+          <a:prstGeom prst="rect">
+            <a:avLst/>
+          </a:prstGeom>
+          <a:noFill/>
+          <a:ln/>
+        </p:spPr>
+        <p:txBody>
+          <a:bodyPr wrap="square" lIns="0" tIns="0" rIns="0" bIns="0" rtlCol="0" anchor="ctr"/>
+          <a:lstStyle/>
+          <a:p>
+            <a:pPr indent="0" marL="0">
+              <a:buNone/>
+            </a:pPr>
+            <a:r>
+              <a:rPr lang="en-US" sz="1200" b="1" dirty="0">
+                <a:solidFill>
+                  <a:srgbClr val="1E2761"/>
+                </a:solidFill>
+              </a:rPr>
+              <a:t>🎯 Smart Routing</a:t>
+            </a:r>
+            <a:endParaRPr lang="en-US" sz="1200" dirty="0"/>
+          </a:p>
+        </p:txBody>
+      </p:sp>
+      <p:sp>
+        <p:nvSpPr>
+          <p:cNvPr id="21" name="Text 19"/>
+          <p:cNvSpPr/>
+          <p:nvPr/>
+        </p:nvSpPr>
+        <p:spPr>
+          <a:xfrm>
+            <a:off x="3355848" y="2990088"/>
+            <a:ext cx="2468880" cy="457200"/>
+          </a:xfrm>
+          <a:prstGeom prst="rect">
+            <a:avLst/>
+          </a:prstGeom>
+          <a:noFill/>
+          <a:ln/>
+        </p:spPr>
+        <p:txBody>
+          <a:bodyPr wrap="square" lIns="0" tIns="0" rIns="0" bIns="0" rtlCol="0" anchor="ctr"/>
+          <a:lstStyle/>
+          <a:p>
+            <a:pPr indent="0" marL="0">
+              <a:buNone/>
+            </a:pPr>
+            <a:r>
+              <a:rPr lang="en-US" sz="1000" dirty="0">
+                <a:solidFill>
+                  <a:srgbClr val="64748B"/>
+                </a:solidFill>
+              </a:rPr>
+              <a:t>Active milestone today → sprint. No milestone → Backlog.</a:t>
+            </a:r>
+            <a:endParaRPr lang="en-US" sz="1000" dirty="0"/>
+          </a:p>
+        </p:txBody>
+      </p:sp>
+      <p:sp>
+        <p:nvSpPr>
+          <p:cNvPr id="22" name="Shape 20"/>
+          <p:cNvSpPr/>
+          <p:nvPr/>
+        </p:nvSpPr>
+        <p:spPr>
+          <a:xfrm>
+            <a:off x="6126480" y="2606040"/>
+            <a:ext cx="2697480" cy="914400"/>
+          </a:xfrm>
+          <a:prstGeom prst="rect">
+            <a:avLst/>
+          </a:prstGeom>
+          <a:solidFill>
+            <a:srgbClr val="FFFFFF"/>
+          </a:solidFill>
+          <a:ln w="12700">
+            <a:solidFill>
+              <a:srgbClr val="E2E8F0"/>
+            </a:solidFill>
+            <a:prstDash val="solid"/>
+          </a:ln>
+          <a:effectLst>
+            <a:outerShdw sx="100000" sy="100000" kx="0" ky="0" algn="bl" rotWithShape="0" blurRad="101600" dist="38100" dir="8100000">
+              <a:srgbClr val="000000">
+                <a:alpha val="10000"/>
+              </a:srgbClr>
+            </a:outerShdw>
+          </a:effectLst>
+        </p:spPr>
+      </p:sp>
+      <p:sp>
+        <p:nvSpPr>
+          <p:cNvPr id="23" name="Text 21"/>
+          <p:cNvSpPr/>
+          <p:nvPr/>
+        </p:nvSpPr>
+        <p:spPr>
+          <a:xfrm>
+            <a:off x="6236208" y="2697480"/>
+            <a:ext cx="2468880" cy="274320"/>
+          </a:xfrm>
+          <a:prstGeom prst="rect">
+            <a:avLst/>
+          </a:prstGeom>
+          <a:noFill/>
+          <a:ln/>
+        </p:spPr>
+        <p:txBody>
+          <a:bodyPr wrap="square" lIns="0" tIns="0" rIns="0" bIns="0" rtlCol="0" anchor="ctr"/>
+          <a:lstStyle/>
+          <a:p>
+            <a:pPr indent="0" marL="0">
+              <a:buNone/>
+            </a:pPr>
+            <a:r>
+              <a:rPr lang="en-US" sz="1200" b="1" dirty="0">
+                <a:solidFill>
+                  <a:srgbClr val="1E2761"/>
+                </a:solidFill>
+              </a:rPr>
+              <a:t>🔁 Create &amp; Update</a:t>
+            </a:r>
+            <a:endParaRPr lang="en-US" sz="1200" dirty="0"/>
+          </a:p>
+        </p:txBody>
+      </p:sp>
+      <p:sp>
+        <p:nvSpPr>
+          <p:cNvPr id="24" name="Text 22"/>
+          <p:cNvSpPr/>
+          <p:nvPr/>
+        </p:nvSpPr>
+        <p:spPr>
+          <a:xfrm>
+            <a:off x="6236208" y="2990088"/>
+            <a:ext cx="2468880" cy="457200"/>
+          </a:xfrm>
+          <a:prstGeom prst="rect">
+            <a:avLst/>
+          </a:prstGeom>
+          <a:noFill/>
+          <a:ln/>
+        </p:spPr>
+        <p:txBody>
+          <a:bodyPr wrap="square" lIns="0" tIns="0" rIns="0" bIns="0" rtlCol="0" anchor="ctr"/>
+          <a:lstStyle/>
+          <a:p>
+            <a:pPr indent="0" marL="0">
+              <a:buNone/>
+            </a:pPr>
+            <a:r>
+              <a:rPr lang="en-US" sz="1000" dirty="0">
+                <a:solidFill>
+                  <a:srgbClr val="64748B"/>
+                </a:solidFill>
+              </a:rPr>
+              <a:t>New tickets are created; existing ones are updated in place.</a:t>
+            </a:r>
+            <a:endParaRPr lang="en-US" sz="1000" dirty="0"/>
+          </a:p>
+        </p:txBody>
+      </p:sp>
+      <p:sp>
+        <p:nvSpPr>
+          <p:cNvPr id="25" name="Shape 23"/>
+          <p:cNvSpPr/>
+          <p:nvPr/>
+        </p:nvSpPr>
+        <p:spPr>
+          <a:xfrm>
+            <a:off x="365760" y="3703320"/>
+            <a:ext cx="2697480" cy="914400"/>
+          </a:xfrm>
+          <a:prstGeom prst="rect">
+            <a:avLst/>
+          </a:prstGeom>
+          <a:solidFill>
+            <a:srgbClr val="FFFFFF"/>
+          </a:solidFill>
+          <a:ln w="12700">
+            <a:solidFill>
+              <a:srgbClr val="E2E8F0"/>
+            </a:solidFill>
+            <a:prstDash val="solid"/>
+          </a:ln>
+          <a:effectLst>
+            <a:outerShdw sx="100000" sy="100000" kx="0" ky="0" algn="bl" rotWithShape="0" blurRad="101600" dist="38100" dir="8100000">
+              <a:srgbClr val="000000">
+                <a:alpha val="10000"/>
+              </a:srgbClr>
+            </a:outerShdw>
+          </a:effectLst>
+        </p:spPr>
+      </p:sp>
+      <p:sp>
+        <p:nvSpPr>
+          <p:cNvPr id="26" name="Text 24"/>
+          <p:cNvSpPr/>
+          <p:nvPr/>
+        </p:nvSpPr>
+        <p:spPr>
+          <a:xfrm>
+            <a:off x="475488" y="3794760"/>
+            <a:ext cx="2468880" cy="274320"/>
+          </a:xfrm>
+          <a:prstGeom prst="rect">
+            <a:avLst/>
+          </a:prstGeom>
+          <a:noFill/>
+          <a:ln/>
+        </p:spPr>
+        <p:txBody>
+          <a:bodyPr wrap="square" lIns="0" tIns="0" rIns="0" bIns="0" rtlCol="0" anchor="ctr"/>
+          <a:lstStyle/>
+          <a:p>
+            <a:pPr indent="0" marL="0">
+              <a:buNone/>
+            </a:pPr>
+            <a:r>
+              <a:rPr lang="en-US" sz="1200" b="1" dirty="0">
+                <a:solidFill>
+                  <a:srgbClr val="1E2761"/>
+                </a:solidFill>
+              </a:rPr>
+              <a:t>🏷 Field Mapping</a:t>
+            </a:r>
+            <a:endParaRPr lang="en-US" sz="1200" dirty="0"/>
+          </a:p>
+        </p:txBody>
+      </p:sp>
+      <p:sp>
+        <p:nvSpPr>
+          <p:cNvPr id="27" name="Text 25"/>
+          <p:cNvSpPr/>
+          <p:nvPr/>
+        </p:nvSpPr>
+        <p:spPr>
+          <a:xfrm>
+            <a:off x="475488" y="4087368"/>
+            <a:ext cx="2468880" cy="457200"/>
+          </a:xfrm>
+          <a:prstGeom prst="rect">
+            <a:avLst/>
+          </a:prstGeom>
+          <a:noFill/>
+          <a:ln/>
+        </p:spPr>
+        <p:txBody>
+          <a:bodyPr wrap="square" lIns="0" tIns="0" rIns="0" bIns="0" rtlCol="0" anchor="ctr"/>
+          <a:lstStyle/>
+          <a:p>
+            <a:pPr indent="0" marL="0">
+              <a:buNone/>
+            </a:pPr>
+            <a:r>
+              <a:rPr lang="en-US" sz="1000" dirty="0">
+                <a:solidFill>
+                  <a:srgbClr val="64748B"/>
+                </a:solidFill>
+              </a:rPr>
+              <a:t>ID, Description, Assignee, Dates, Story Points all synced.</a:t>
+            </a:r>
+            <a:endParaRPr lang="en-US" sz="1000" dirty="0"/>
+          </a:p>
+        </p:txBody>
+      </p:sp>
+      <p:sp>
+        <p:nvSpPr>
+          <p:cNvPr id="28" name="Shape 26"/>
+          <p:cNvSpPr/>
+          <p:nvPr/>
+        </p:nvSpPr>
+        <p:spPr>
+          <a:xfrm>
+            <a:off x="3246120" y="3703320"/>
+            <a:ext cx="2697480" cy="914400"/>
+          </a:xfrm>
+          <a:prstGeom prst="rect">
+            <a:avLst/>
+          </a:prstGeom>
+          <a:solidFill>
+            <a:srgbClr val="FFFFFF"/>
+          </a:solidFill>
+          <a:ln w="12700">
+            <a:solidFill>
+              <a:srgbClr val="E2E8F0"/>
+            </a:solidFill>
+            <a:prstDash val="solid"/>
+          </a:ln>
+          <a:effectLst>
+            <a:outerShdw sx="100000" sy="100000" kx="0" ky="0" algn="bl" rotWithShape="0" blurRad="101600" dist="38100" dir="8100000">
+              <a:srgbClr val="000000">
+                <a:alpha val="10000"/>
+              </a:srgbClr>
+            </a:outerShdw>
+          </a:effectLst>
+        </p:spPr>
+      </p:sp>
+      <p:sp>
+        <p:nvSpPr>
+          <p:cNvPr id="29" name="Text 27"/>
+          <p:cNvSpPr/>
+          <p:nvPr/>
+        </p:nvSpPr>
+        <p:spPr>
+          <a:xfrm>
+            <a:off x="3355848" y="3794760"/>
+            <a:ext cx="2468880" cy="274320"/>
+          </a:xfrm>
+          <a:prstGeom prst="rect">
+            <a:avLst/>
+          </a:prstGeom>
+          <a:noFill/>
+          <a:ln/>
+        </p:spPr>
+        <p:txBody>
+          <a:bodyPr wrap="square" lIns="0" tIns="0" rIns="0" bIns="0" rtlCol="0" anchor="ctr"/>
+          <a:lstStyle/>
+          <a:p>
+            <a:pPr indent="0" marL="0">
+              <a:buNone/>
+            </a:pPr>
+            <a:r>
+              <a:rPr lang="en-US" sz="1200" b="1" dirty="0">
+                <a:solidFill>
+                  <a:srgbClr val="1E2761"/>
+                </a:solidFill>
+              </a:rPr>
+              <a:t>📝 Full Logging</a:t>
+            </a:r>
+            <a:endParaRPr lang="en-US" sz="1200" dirty="0"/>
+          </a:p>
+        </p:txBody>
+      </p:sp>
+      <p:sp>
+        <p:nvSpPr>
+          <p:cNvPr id="30" name="Text 28"/>
+          <p:cNvSpPr/>
+          <p:nvPr/>
+        </p:nvSpPr>
+        <p:spPr>
+          <a:xfrm>
+            <a:off x="3355848" y="4087368"/>
+            <a:ext cx="2468880" cy="457200"/>
+          </a:xfrm>
+          <a:prstGeom prst="rect">
+            <a:avLst/>
+          </a:prstGeom>
+          <a:noFill/>
+          <a:ln/>
+        </p:spPr>
+        <p:txBody>
+          <a:bodyPr wrap="square" lIns="0" tIns="0" rIns="0" bIns="0" rtlCol="0" anchor="ctr"/>
+          <a:lstStyle/>
+          <a:p>
+            <a:pPr indent="0" marL="0">
+              <a:buNone/>
+            </a:pPr>
+            <a:r>
+              <a:rPr lang="en-US" sz="1000" dirty="0">
+                <a:solidFill>
+                  <a:srgbClr val="64748B"/>
+                </a:solidFill>
+              </a:rPr>
+              <a:t>Microsoft ILogger with Debug/Info/Warn/Error levels.</a:t>
+            </a:r>
+            <a:endParaRPr lang="en-US" sz="1000" dirty="0"/>
+          </a:p>
+        </p:txBody>
+      </p:sp>
+      <p:sp>
+        <p:nvSpPr>
+          <p:cNvPr id="31" name="Shape 29"/>
+          <p:cNvSpPr/>
+          <p:nvPr/>
+        </p:nvSpPr>
+        <p:spPr>
+          <a:xfrm>
+            <a:off x="6126480" y="3703320"/>
+            <a:ext cx="2697480" cy="914400"/>
+          </a:xfrm>
+          <a:prstGeom prst="rect">
+            <a:avLst/>
+          </a:prstGeom>
+          <a:solidFill>
+            <a:srgbClr val="FFFFFF"/>
+          </a:solidFill>
+          <a:ln w="12700">
+            <a:solidFill>
+              <a:srgbClr val="E2E8F0"/>
+            </a:solidFill>
+            <a:prstDash val="solid"/>
+          </a:ln>
+          <a:effectLst>
+            <a:outerShdw sx="100000" sy="100000" kx="0" ky="0" algn="bl" rotWithShape="0" blurRad="101600" dist="38100" dir="8100000">
+              <a:srgbClr val="000000">
+                <a:alpha val="10000"/>
+              </a:srgbClr>
+            </a:outerShdw>
+          </a:effectLst>
+        </p:spPr>
+      </p:sp>
+      <p:sp>
+        <p:nvSpPr>
+          <p:cNvPr id="32" name="Text 30"/>
+          <p:cNvSpPr/>
+          <p:nvPr/>
+        </p:nvSpPr>
+        <p:spPr>
+          <a:xfrm>
+            <a:off x="6236208" y="3794760"/>
+            <a:ext cx="2468880" cy="274320"/>
+          </a:xfrm>
+          <a:prstGeom prst="rect">
+            <a:avLst/>
+          </a:prstGeom>
+          <a:noFill/>
+          <a:ln/>
+        </p:spPr>
+        <p:txBody>
+          <a:bodyPr wrap="square" lIns="0" tIns="0" rIns="0" bIns="0" rtlCol="0" anchor="ctr"/>
+          <a:lstStyle/>
+          <a:p>
+            <a:pPr indent="0" marL="0">
+              <a:buNone/>
+            </a:pPr>
+            <a:r>
+              <a:rPr lang="en-US" sz="1200" b="1" dirty="0">
+                <a:solidFill>
+                  <a:srgbClr val="1E2761"/>
+                </a:solidFill>
+              </a:rPr>
+              <a:t>⚙️ Config-Driven</a:t>
+            </a:r>
+            <a:endParaRPr lang="en-US" sz="1200" dirty="0"/>
+          </a:p>
+        </p:txBody>
+      </p:sp>
+      <p:sp>
+        <p:nvSpPr>
+          <p:cNvPr id="33" name="Text 31"/>
+          <p:cNvSpPr/>
+          <p:nvPr/>
+        </p:nvSpPr>
+        <p:spPr>
+          <a:xfrm>
+            <a:off x="6236208" y="4087368"/>
+            <a:ext cx="2468880" cy="457200"/>
+          </a:xfrm>
+          <a:prstGeom prst="rect">
+            <a:avLst/>
+          </a:prstGeom>
+          <a:noFill/>
+          <a:ln/>
+        </p:spPr>
+        <p:txBody>
+          <a:bodyPr wrap="square" lIns="0" tIns="0" rIns="0" bIns="0" rtlCol="0" anchor="ctr"/>
+          <a:lstStyle/>
+          <a:p>
+            <a:pPr indent="0" marL="0">
+              <a:buNone/>
+            </a:pPr>
+            <a:r>
+              <a:rPr lang="en-US" sz="1000" dirty="0">
+                <a:solidFill>
+                  <a:srgbClr val="64748B"/>
+                </a:solidFill>
+              </a:rPr>
+              <a:t>All settings in appsettings.json — no recompile needed.</a:t>
+            </a:r>
+            <a:endParaRPr lang="en-US" sz="1000" dirty="0"/>
+          </a:p>
+        </p:txBody>
+      </p:sp>
+      <p:sp>
+        <p:nvSpPr>
+          <p:cNvPr id="34" name="Shape 32"/>
+          <p:cNvSpPr/>
+          <p:nvPr/>
+        </p:nvSpPr>
+        <p:spPr>
+          <a:xfrm>
+            <a:off x="0" y="4892040"/>
+            <a:ext cx="9144000" cy="251460"/>
+          </a:xfrm>
+          <a:prstGeom prst="rect">
+            <a:avLst/>
+          </a:prstGeom>
+          <a:solidFill>
+            <a:srgbClr val="1E2761"/>
+          </a:solidFill>
+          <a:ln w="12700">
+            <a:solidFill>
+              <a:srgbClr val="1E2761"/>
+            </a:solidFill>
+            <a:prstDash val="solid"/>
+          </a:ln>
+        </p:spPr>
+      </p:sp>
+      <p:sp>
+        <p:nvSpPr>
+          <p:cNvPr id="35" name="Text 33"/>
+          <p:cNvSpPr/>
+          <p:nvPr/>
+        </p:nvSpPr>
+        <p:spPr>
+          <a:xfrm>
+            <a:off x="457200" y="4892040"/>
+            <a:ext cx="8229600" cy="251460"/>
+          </a:xfrm>
+          <a:prstGeom prst="rect">
+            <a:avLst/>
+          </a:prstGeom>
+          <a:noFill/>
+          <a:ln/>
+        </p:spPr>
+        <p:txBody>
+          <a:bodyPr wrap="square" lIns="0" tIns="0" rIns="0" bIns="0" rtlCol="0" anchor="ctr"/>
+          <a:lstStyle/>
+          <a:p>
+            <a:pPr algn="ctr" indent="0" marL="0">
+              <a:buNone/>
+            </a:pPr>
+            <a:r>
+              <a:rPr lang="en-US" sz="1000" dirty="0">
+                <a:solidFill>
+                  <a:srgbClr val="FFFFFF"/>
+                </a:solidFill>
+              </a:rPr>
+              <a:t>Jira → GitLab Sync Service  |  POC</a:t>
+            </a:r>
+            <a:endParaRPr lang="en-US" sz="1000" dirty="0"/>
+          </a:p>
+        </p:txBody>
+      </p:sp>
+    </p:spTree>
+  </p:cSld>
+  <p:clrMapOvr>
+    <a:masterClrMapping/>
+  </p:clrMapOvr>
+</p:sld>
+</file>
+
+<file path=ppt/slides/slide5.xml><?xml version="1.0" encoding="utf-8"?>
+<p:sld xmlns:a="http://schemas.openxmlformats.org/drawingml/2006/main" xmlns:r="http://schemas.openxmlformats.org/officeDocument/2006/relationships" xmlns:p="http://schemas.openxmlformats.org/presentationml/2006/main">
+  <p:cSld name="Slide 5">
+    <p:bg>
+      <p:bgPr>
+        <a:solidFill>
+          <a:srgbClr val="F8FAFC"/>
+        </a:solidFill>
+      </p:bgPr>
+    </p:bg>
+    <p:spTree>
+      <p:nvGrpSpPr>
+        <p:cNvPr id="1" name=""/>
+        <p:cNvGrpSpPr/>
+        <p:nvPr/>
+      </p:nvGrpSpPr>
+      <p:grpSpPr>
+        <a:xfrm>
+          <a:off x="0" y="0"/>
+          <a:ext cx="0" cy="0"/>
+          <a:chOff x="0" y="0"/>
+          <a:chExt cx="0" cy="0"/>
+        </a:xfrm>
+      </p:grpSpPr>
+      <p:sp>
+        <p:nvSpPr>
+          <p:cNvPr id="2" name="Text 0"/>
+          <p:cNvSpPr/>
+          <p:nvPr/>
+        </p:nvSpPr>
+        <p:spPr>
+          <a:xfrm>
+            <a:off x="457200" y="274320"/>
+            <a:ext cx="8229600" cy="548640"/>
+          </a:xfrm>
+          <a:prstGeom prst="rect">
+            <a:avLst/>
+          </a:prstGeom>
+          <a:noFill/>
+          <a:ln/>
+        </p:spPr>
+        <p:txBody>
+          <a:bodyPr wrap="square" lIns="0" tIns="0" rIns="0" bIns="0" rtlCol="0" anchor="ctr"/>
+          <a:lstStyle/>
+          <a:p>
+            <a:pPr indent="0" marL="0">
+              <a:buNone/>
+            </a:pPr>
+            <a:r>
+              <a:rPr lang="en-US" sz="2800" b="1" dirty="0">
+                <a:solidFill>
+                  <a:srgbClr val="1E2761"/>
+                </a:solidFill>
+                <a:latin typeface="Calibri" pitchFamily="34" charset="0"/>
+                <a:ea typeface="Calibri" pitchFamily="34" charset="-122"/>
+                <a:cs typeface="Calibri" pitchFamily="34" charset="-120"/>
+              </a:rPr>
+              <a:t>Architecture</a:t>
+            </a:r>
+            <a:endParaRPr lang="en-US" sz="2800" dirty="0"/>
+          </a:p>
+        </p:txBody>
+      </p:sp>
+      <p:sp>
+        <p:nvSpPr>
+          <p:cNvPr id="3" name="Text 1"/>
+          <p:cNvSpPr/>
+          <p:nvPr/>
+        </p:nvSpPr>
+        <p:spPr>
+          <a:xfrm>
+            <a:off x="457200" y="777240"/>
+            <a:ext cx="8229600" cy="320040"/>
+          </a:xfrm>
+          <a:prstGeom prst="rect">
+            <a:avLst/>
+          </a:prstGeom>
+          <a:noFill/>
+          <a:ln/>
+        </p:spPr>
+        <p:txBody>
+          <a:bodyPr wrap="square" lIns="0" tIns="0" rIns="0" bIns="0" rtlCol="0" anchor="ctr"/>
+          <a:lstStyle/>
+          <a:p>
+            <a:pPr indent="0" marL="0">
+              <a:buNone/>
+            </a:pPr>
+            <a:r>
+              <a:rPr lang="en-US" sz="1300" dirty="0">
+                <a:solidFill>
+                  <a:srgbClr val="64748B"/>
+                </a:solidFill>
+              </a:rPr>
+              <a:t>Layered .NET 8 service with clean separation of concerns</a:t>
+            </a:r>
+            <a:endParaRPr lang="en-US" sz="1300" dirty="0"/>
+          </a:p>
+        </p:txBody>
+      </p:sp>
+      <p:sp>
+        <p:nvSpPr>
+          <p:cNvPr id="4" name="Shape 2"/>
+          <p:cNvSpPr/>
+          <p:nvPr/>
+        </p:nvSpPr>
+        <p:spPr>
+          <a:xfrm>
+            <a:off x="457200" y="1115568"/>
+            <a:ext cx="8229600" cy="27432"/>
+          </a:xfrm>
+          <a:prstGeom prst="rect">
+            <a:avLst/>
+          </a:prstGeom>
+          <a:solidFill>
+            <a:srgbClr val="E2E8F0"/>
+          </a:solidFill>
+          <a:ln w="12700">
+            <a:solidFill>
+              <a:srgbClr val="E2E8F0"/>
+            </a:solidFill>
+            <a:prstDash val="solid"/>
+          </a:ln>
+        </p:spPr>
+      </p:sp>
+      <p:sp>
+        <p:nvSpPr>
+          <p:cNvPr id="5" name="Shape 3"/>
+          <p:cNvSpPr/>
+          <p:nvPr/>
+        </p:nvSpPr>
+        <p:spPr>
+          <a:xfrm>
+            <a:off x="457200" y="1298448"/>
+            <a:ext cx="8229600" cy="658368"/>
+          </a:xfrm>
+          <a:prstGeom prst="rect">
+            <a:avLst/>
+          </a:prstGeom>
+          <a:solidFill>
+            <a:srgbClr val="1E2761"/>
+          </a:solidFill>
+          <a:ln w="12700">
+            <a:solidFill>
+              <a:srgbClr val="1E2761"/>
+            </a:solidFill>
+            <a:prstDash val="solid"/>
+          </a:ln>
+          <a:effectLst>
+            <a:outerShdw sx="100000" sy="100000" kx="0" ky="0" algn="bl" rotWithShape="0" blurRad="101600" dist="38100" dir="8100000">
+              <a:srgbClr val="000000">
+                <a:alpha val="10000"/>
+              </a:srgbClr>
+            </a:outerShdw>
+          </a:effectLst>
+        </p:spPr>
+      </p:sp>
+      <p:sp>
+        <p:nvSpPr>
           <p:cNvPr id="6" name="Text 4"/>
           <p:cNvSpPr/>
           <p:nvPr/>
@@ -4519,9 +6152,9 @@
 </p:sld>
 </file>
 
-<file path=ppt/slides/slide5.xml><?xml version="1.0" encoding="utf-8"?>
+<file path=ppt/slides/slide6.xml><?xml version="1.0" encoding="utf-8"?>
 <p:sld xmlns:a="http://schemas.openxmlformats.org/drawingml/2006/main" xmlns:r="http://schemas.openxmlformats.org/officeDocument/2006/relationships" xmlns:p="http://schemas.openxmlformats.org/presentationml/2006/main">
-  <p:cSld name="Slide 5">
+  <p:cSld name="Slide 6">
     <p:bg>
       <p:bgPr>
         <a:solidFill>

--- a/JiraGitLabSync_POC.pptx
+++ b/JiraGitLabSync_POC.pptx
@@ -4,6 +4,9 @@
   <p:sldMasterIdLst>
     <p:sldMasterId id="2147483648" r:id="rId1"/>
   </p:sldMasterIdLst>
+  <p:notesMasterIdLst>
+    <p:notesMasterId r:id="rId13"/>
+  </p:notesMasterIdLst>
   <p:sldIdLst>
     <p:sldId id="256" r:id="rId2"/>
     <p:sldId id="257" r:id="rId3"/>
@@ -11,11 +14,13 @@
     <p:sldId id="259" r:id="rId5"/>
     <p:sldId id="260" r:id="rId6"/>
     <p:sldId id="261" r:id="rId7"/>
+    <p:sldId id="262" r:id="rId8"/>
+    <p:sldId id="263" r:id="rId9"/>
+    <p:sldId id="265" r:id="rId10"/>
+    <p:sldId id="264" r:id="rId11"/>
+    <p:sldId id="266" r:id="rId12"/>
   </p:sldIdLst>
-  <p:notesMasterIdLst>
-    <p:notesMasterId r:id="rId8"/>
-  </p:notesMasterIdLst>
-  <p:sldSz cx="9144000" cy="5143500"/>
+  <p:sldSz cx="9144000" cy="5143500" type="screen16x9"/>
   <p:notesSz cx="5143500" cy="9144000"/>
   <p:defaultTextStyle>
     <a:lvl1pPr marL="0" algn="l" defTabSz="914400" rtl="0" eaLnBrk="1" latinLnBrk="0" hangingPunct="1">
@@ -147,7 +152,7 @@
         <p:spPr>
           <a:xfrm>
             <a:off x="0" y="0"/>
-            <a:ext cx="2971800" cy="458788"/>
+            <a:ext cx="2228850" cy="457200"/>
           </a:xfrm>
           <a:prstGeom prst="rect">
             <a:avLst/>
@@ -161,7 +166,7 @@
             </a:lvl1pPr>
           </a:lstStyle>
           <a:p>
-            <a:endParaRPr lang="en-US"/>
+            <a:endParaRPr lang="en-IN"/>
           </a:p>
         </p:txBody>
       </p:sp>
@@ -177,8 +182,8 @@
         </p:nvSpPr>
         <p:spPr>
           <a:xfrm>
-            <a:off x="3884613" y="0"/>
-            <a:ext cx="2971800" cy="458788"/>
+            <a:off x="2913063" y="0"/>
+            <a:ext cx="2228850" cy="457200"/>
           </a:xfrm>
           <a:prstGeom prst="rect">
             <a:avLst/>
@@ -192,11 +197,11 @@
             </a:lvl1pPr>
           </a:lstStyle>
           <a:p>
-            <a:fld id="{5282F153-3F37-0F45-9E97-73ACFA13230C}" type="datetimeFigureOut">
-              <a:rPr lang="en-US"/>
-              <a:t>7/23/19</a:t>
+            <a:fld id="{AC67571E-5EAF-451B-BBFB-208F24B57D2C}" type="datetimeFigureOut">
+              <a:rPr lang="en-IN" smtClean="0"/>
+              <a:t>07-06-2026</a:t>
             </a:fld>
-            <a:endParaRPr lang="en-US"/>
+            <a:endParaRPr lang="en-IN"/>
           </a:p>
         </p:txBody>
       </p:sp>
@@ -212,8 +217,8 @@
         </p:nvSpPr>
         <p:spPr>
           <a:xfrm>
-            <a:off x="685800" y="1143000"/>
-            <a:ext cx="5486400" cy="3086100"/>
+            <a:off x="-476250" y="685800"/>
+            <a:ext cx="6096000" cy="3429000"/>
           </a:xfrm>
           <a:prstGeom prst="rect">
             <a:avLst/>
@@ -229,7 +234,7 @@
           <a:bodyPr vert="horz" lIns="91440" tIns="45720" rIns="91440" bIns="45720" rtlCol="0" anchor="ctr"/>
           <a:lstStyle/>
           <a:p>
-            <a:endParaRPr lang="en-US"/>
+            <a:endParaRPr lang="en-IN"/>
           </a:p>
         </p:txBody>
       </p:sp>
@@ -245,8 +250,8 @@
         </p:nvSpPr>
         <p:spPr>
           <a:xfrm>
-            <a:off x="685800" y="4400550"/>
-            <a:ext cx="5486400" cy="3600450"/>
+            <a:off x="514350" y="4343400"/>
+            <a:ext cx="4114800" cy="4114800"/>
           </a:xfrm>
           <a:prstGeom prst="rect">
             <a:avLst/>
@@ -258,37 +263,38 @@
           <a:p>
             <a:pPr lvl="0"/>
             <a:r>
-              <a:rPr lang="en-US"/>
+              <a:rPr lang="en-US" smtClean="0"/>
               <a:t>Click to edit Master text styles</a:t>
             </a:r>
           </a:p>
           <a:p>
             <a:pPr lvl="1"/>
             <a:r>
-              <a:rPr lang="en-US"/>
+              <a:rPr lang="en-US" smtClean="0"/>
               <a:t>Second level</a:t>
             </a:r>
           </a:p>
           <a:p>
             <a:pPr lvl="2"/>
             <a:r>
-              <a:rPr lang="en-US"/>
+              <a:rPr lang="en-US" smtClean="0"/>
               <a:t>Third level</a:t>
             </a:r>
           </a:p>
           <a:p>
             <a:pPr lvl="3"/>
             <a:r>
-              <a:rPr lang="en-US"/>
+              <a:rPr lang="en-US" smtClean="0"/>
               <a:t>Fourth level</a:t>
             </a:r>
           </a:p>
           <a:p>
             <a:pPr lvl="4"/>
             <a:r>
-              <a:rPr lang="en-US"/>
+              <a:rPr lang="en-US" smtClean="0"/>
               <a:t>Fifth level</a:t>
             </a:r>
+            <a:endParaRPr lang="en-IN"/>
           </a:p>
         </p:txBody>
       </p:sp>
@@ -305,7 +311,7 @@
         <p:spPr>
           <a:xfrm>
             <a:off x="0" y="8685213"/>
-            <a:ext cx="2971800" cy="458787"/>
+            <a:ext cx="2228850" cy="457200"/>
           </a:xfrm>
           <a:prstGeom prst="rect">
             <a:avLst/>
@@ -319,7 +325,7 @@
             </a:lvl1pPr>
           </a:lstStyle>
           <a:p>
-            <a:endParaRPr lang="en-US"/>
+            <a:endParaRPr lang="en-IN"/>
           </a:p>
         </p:txBody>
       </p:sp>
@@ -335,8 +341,8 @@
         </p:nvSpPr>
         <p:spPr>
           <a:xfrm>
-            <a:off x="3884613" y="8685213"/>
-            <a:ext cx="2971800" cy="458787"/>
+            <a:off x="2913063" y="8685213"/>
+            <a:ext cx="2228850" cy="457200"/>
           </a:xfrm>
           <a:prstGeom prst="rect">
             <a:avLst/>
@@ -350,18 +356,18 @@
             </a:lvl1pPr>
           </a:lstStyle>
           <a:p>
-            <a:fld id="{CE5E9CC1-C706-0F49-92D6-E571CC5EEA8F}" type="slidenum">
-              <a:rPr lang="en-US"/>
+            <a:fld id="{2F030FC3-CB15-44F9-94A7-B3759F00A316}" type="slidenum">
+              <a:rPr lang="en-IN" smtClean="0"/>
               <a:t>‹#›</a:t>
             </a:fld>
-            <a:endParaRPr lang="en-US"/>
+            <a:endParaRPr lang="en-IN"/>
           </a:p>
         </p:txBody>
       </p:sp>
     </p:spTree>
     <p:extLst>
       <p:ext uri="{BB962C8B-B14F-4D97-AF65-F5344CB8AC3E}">
-        <p14:creationId xmlns:p14="http://schemas.microsoft.com/office/powerpoint/2010/main" val="1024086991"/>
+        <p14:creationId xmlns:p14="http://schemas.microsoft.com/office/powerpoint/2010/main" val="1178670370"/>
       </p:ext>
     </p:extLst>
   </p:cSld>
@@ -505,10 +511,6 @@
           <a:bodyPr/>
           <a:lstStyle/>
           <a:p>
-            <a:r>
-              <a:rPr lang="en-US" dirty="0"/>
-              <a:t/>
-            </a:r>
             <a:endParaRPr lang="en-US" dirty="0"/>
           </a:p>
         </p:txBody>
@@ -531,6 +533,174 @@
             <a:fld id="{F7021451-1387-4CA6-816F-3879F97B5CBC}" type="slidenum">
               <a:rPr lang="en-US"/>
               <a:t>1</a:t>
+            </a:fld>
+            <a:endParaRPr lang="en-US"/>
+          </a:p>
+        </p:txBody>
+      </p:sp>
+    </p:spTree>
+    <p:extLst>
+      <p:ext uri="{BB962C8B-B14F-4D97-AF65-F5344CB8AC3E}">
+        <p14:creationId xmlns:p14="http://schemas.microsoft.com/office/powerpoint/2010/main" val="1024086991"/>
+      </p:ext>
+    </p:extLst>
+  </p:cSld>
+  <p:clrMapOvr>
+    <a:masterClrMapping/>
+  </p:clrMapOvr>
+</p:notes>
+</file>
+
+<file path=ppt/notesSlides/notesSlide10.xml><?xml version="1.0" encoding="utf-8"?>
+<p:notes xmlns:a="http://schemas.openxmlformats.org/drawingml/2006/main" xmlns:r="http://schemas.openxmlformats.org/officeDocument/2006/relationships" xmlns:p="http://schemas.openxmlformats.org/presentationml/2006/main">
+  <p:cSld>
+    <p:spTree>
+      <p:nvGrpSpPr>
+        <p:cNvPr id="1" name=""/>
+        <p:cNvGrpSpPr/>
+        <p:nvPr/>
+      </p:nvGrpSpPr>
+      <p:grpSpPr>
+        <a:xfrm>
+          <a:off x="0" y="0"/>
+          <a:ext cx="0" cy="0"/>
+          <a:chOff x="0" y="0"/>
+          <a:chExt cx="0" cy="0"/>
+        </a:xfrm>
+      </p:grpSpPr>
+      <p:sp>
+        <p:nvSpPr>
+          <p:cNvPr id="2" name="Slide Image Placeholder 1"/>
+          <p:cNvSpPr>
+            <a:spLocks noGrp="1" noRot="1" noChangeAspect="1"/>
+          </p:cNvSpPr>
+          <p:nvPr>
+            <p:ph type="sldImg"/>
+          </p:nvPr>
+        </p:nvSpPr>
+        <p:spPr/>
+      </p:sp>
+      <p:sp>
+        <p:nvSpPr>
+          <p:cNvPr id="3" name="Notes Placeholder 2"/>
+          <p:cNvSpPr>
+            <a:spLocks noGrp="1"/>
+          </p:cNvSpPr>
+          <p:nvPr>
+            <p:ph type="body" idx="1"/>
+          </p:nvPr>
+        </p:nvSpPr>
+        <p:spPr/>
+        <p:txBody>
+          <a:bodyPr/>
+          <a:lstStyle/>
+          <a:p>
+            <a:endParaRPr lang="en-US" dirty="0"/>
+          </a:p>
+        </p:txBody>
+      </p:sp>
+      <p:sp>
+        <p:nvSpPr>
+          <p:cNvPr id="4" name="Slide Number Placeholder 3"/>
+          <p:cNvSpPr>
+            <a:spLocks noGrp="1"/>
+          </p:cNvSpPr>
+          <p:nvPr>
+            <p:ph type="sldNum" sz="quarter" idx="10"/>
+          </p:nvPr>
+        </p:nvSpPr>
+        <p:spPr/>
+        <p:txBody>
+          <a:bodyPr/>
+          <a:lstStyle/>
+          <a:p>
+            <a:fld id="{F7021451-1387-4CA6-816F-3879F97B5CBC}" type="slidenum">
+              <a:rPr lang="en-US"/>
+              <a:t>10</a:t>
+            </a:fld>
+            <a:endParaRPr lang="en-US"/>
+          </a:p>
+        </p:txBody>
+      </p:sp>
+    </p:spTree>
+    <p:extLst>
+      <p:ext uri="{BB962C8B-B14F-4D97-AF65-F5344CB8AC3E}">
+        <p14:creationId xmlns:p14="http://schemas.microsoft.com/office/powerpoint/2010/main" val="1024086991"/>
+      </p:ext>
+    </p:extLst>
+  </p:cSld>
+  <p:clrMapOvr>
+    <a:masterClrMapping/>
+  </p:clrMapOvr>
+</p:notes>
+</file>
+
+<file path=ppt/notesSlides/notesSlide11.xml><?xml version="1.0" encoding="utf-8"?>
+<p:notes xmlns:a="http://schemas.openxmlformats.org/drawingml/2006/main" xmlns:r="http://schemas.openxmlformats.org/officeDocument/2006/relationships" xmlns:p="http://schemas.openxmlformats.org/presentationml/2006/main">
+  <p:cSld>
+    <p:spTree>
+      <p:nvGrpSpPr>
+        <p:cNvPr id="1" name=""/>
+        <p:cNvGrpSpPr/>
+        <p:nvPr/>
+      </p:nvGrpSpPr>
+      <p:grpSpPr>
+        <a:xfrm>
+          <a:off x="0" y="0"/>
+          <a:ext cx="0" cy="0"/>
+          <a:chOff x="0" y="0"/>
+          <a:chExt cx="0" cy="0"/>
+        </a:xfrm>
+      </p:grpSpPr>
+      <p:sp>
+        <p:nvSpPr>
+          <p:cNvPr id="2" name="Slide Image Placeholder 1"/>
+          <p:cNvSpPr>
+            <a:spLocks noGrp="1" noRot="1" noChangeAspect="1"/>
+          </p:cNvSpPr>
+          <p:nvPr>
+            <p:ph type="sldImg"/>
+          </p:nvPr>
+        </p:nvSpPr>
+        <p:spPr/>
+      </p:sp>
+      <p:sp>
+        <p:nvSpPr>
+          <p:cNvPr id="3" name="Notes Placeholder 2"/>
+          <p:cNvSpPr>
+            <a:spLocks noGrp="1"/>
+          </p:cNvSpPr>
+          <p:nvPr>
+            <p:ph type="body" idx="1"/>
+          </p:nvPr>
+        </p:nvSpPr>
+        <p:spPr/>
+        <p:txBody>
+          <a:bodyPr/>
+          <a:lstStyle/>
+          <a:p>
+            <a:endParaRPr lang="en-US" dirty="0"/>
+          </a:p>
+        </p:txBody>
+      </p:sp>
+      <p:sp>
+        <p:nvSpPr>
+          <p:cNvPr id="4" name="Slide Number Placeholder 3"/>
+          <p:cNvSpPr>
+            <a:spLocks noGrp="1"/>
+          </p:cNvSpPr>
+          <p:nvPr>
+            <p:ph type="sldNum" sz="quarter" idx="10"/>
+          </p:nvPr>
+        </p:nvSpPr>
+        <p:spPr/>
+        <p:txBody>
+          <a:bodyPr/>
+          <a:lstStyle/>
+          <a:p>
+            <a:fld id="{F7021451-1387-4CA6-816F-3879F97B5CBC}" type="slidenum">
+              <a:rPr lang="en-US"/>
+              <a:t>11</a:t>
             </a:fld>
             <a:endParaRPr lang="en-US"/>
           </a:p>
@@ -593,10 +763,6 @@
           <a:bodyPr/>
           <a:lstStyle/>
           <a:p>
-            <a:r>
-              <a:rPr lang="en-US" dirty="0"/>
-              <a:t/>
-            </a:r>
             <a:endParaRPr lang="en-US" dirty="0"/>
           </a:p>
         </p:txBody>
@@ -681,10 +847,6 @@
           <a:bodyPr/>
           <a:lstStyle/>
           <a:p>
-            <a:r>
-              <a:rPr lang="en-US" dirty="0"/>
-              <a:t/>
-            </a:r>
             <a:endParaRPr lang="en-US" dirty="0"/>
           </a:p>
         </p:txBody>
@@ -769,10 +931,6 @@
           <a:bodyPr/>
           <a:lstStyle/>
           <a:p>
-            <a:r>
-              <a:rPr lang="en-US" dirty="0"/>
-              <a:t/>
-            </a:r>
             <a:endParaRPr lang="en-US" dirty="0"/>
           </a:p>
         </p:txBody>
@@ -857,10 +1015,6 @@
           <a:bodyPr/>
           <a:lstStyle/>
           <a:p>
-            <a:r>
-              <a:rPr lang="en-US" dirty="0"/>
-              <a:t/>
-            </a:r>
             <a:endParaRPr lang="en-US" dirty="0"/>
           </a:p>
         </p:txBody>
@@ -945,10 +1099,6 @@
           <a:bodyPr/>
           <a:lstStyle/>
           <a:p>
-            <a:r>
-              <a:rPr lang="en-US" dirty="0"/>
-              <a:t/>
-            </a:r>
             <a:endParaRPr lang="en-US" dirty="0"/>
           </a:p>
         </p:txBody>
@@ -971,6 +1121,258 @@
             <a:fld id="{F7021451-1387-4CA6-816F-3879F97B5CBC}" type="slidenum">
               <a:rPr lang="en-US"/>
               <a:t>6</a:t>
+            </a:fld>
+            <a:endParaRPr lang="en-US"/>
+          </a:p>
+        </p:txBody>
+      </p:sp>
+    </p:spTree>
+    <p:extLst>
+      <p:ext uri="{BB962C8B-B14F-4D97-AF65-F5344CB8AC3E}">
+        <p14:creationId xmlns:p14="http://schemas.microsoft.com/office/powerpoint/2010/main" val="1024086991"/>
+      </p:ext>
+    </p:extLst>
+  </p:cSld>
+  <p:clrMapOvr>
+    <a:masterClrMapping/>
+  </p:clrMapOvr>
+</p:notes>
+</file>
+
+<file path=ppt/notesSlides/notesSlide7.xml><?xml version="1.0" encoding="utf-8"?>
+<p:notes xmlns:a="http://schemas.openxmlformats.org/drawingml/2006/main" xmlns:r="http://schemas.openxmlformats.org/officeDocument/2006/relationships" xmlns:p="http://schemas.openxmlformats.org/presentationml/2006/main">
+  <p:cSld>
+    <p:spTree>
+      <p:nvGrpSpPr>
+        <p:cNvPr id="1" name=""/>
+        <p:cNvGrpSpPr/>
+        <p:nvPr/>
+      </p:nvGrpSpPr>
+      <p:grpSpPr>
+        <a:xfrm>
+          <a:off x="0" y="0"/>
+          <a:ext cx="0" cy="0"/>
+          <a:chOff x="0" y="0"/>
+          <a:chExt cx="0" cy="0"/>
+        </a:xfrm>
+      </p:grpSpPr>
+      <p:sp>
+        <p:nvSpPr>
+          <p:cNvPr id="2" name="Slide Image Placeholder 1"/>
+          <p:cNvSpPr>
+            <a:spLocks noGrp="1" noRot="1" noChangeAspect="1"/>
+          </p:cNvSpPr>
+          <p:nvPr>
+            <p:ph type="sldImg"/>
+          </p:nvPr>
+        </p:nvSpPr>
+        <p:spPr/>
+      </p:sp>
+      <p:sp>
+        <p:nvSpPr>
+          <p:cNvPr id="3" name="Notes Placeholder 2"/>
+          <p:cNvSpPr>
+            <a:spLocks noGrp="1"/>
+          </p:cNvSpPr>
+          <p:nvPr>
+            <p:ph type="body" idx="1"/>
+          </p:nvPr>
+        </p:nvSpPr>
+        <p:spPr/>
+        <p:txBody>
+          <a:bodyPr/>
+          <a:lstStyle/>
+          <a:p>
+            <a:endParaRPr lang="en-US" dirty="0"/>
+          </a:p>
+        </p:txBody>
+      </p:sp>
+      <p:sp>
+        <p:nvSpPr>
+          <p:cNvPr id="4" name="Slide Number Placeholder 3"/>
+          <p:cNvSpPr>
+            <a:spLocks noGrp="1"/>
+          </p:cNvSpPr>
+          <p:nvPr>
+            <p:ph type="sldNum" sz="quarter" idx="10"/>
+          </p:nvPr>
+        </p:nvSpPr>
+        <p:spPr/>
+        <p:txBody>
+          <a:bodyPr/>
+          <a:lstStyle/>
+          <a:p>
+            <a:fld id="{F7021451-1387-4CA6-816F-3879F97B5CBC}" type="slidenum">
+              <a:rPr lang="en-US"/>
+              <a:t>7</a:t>
+            </a:fld>
+            <a:endParaRPr lang="en-US"/>
+          </a:p>
+        </p:txBody>
+      </p:sp>
+    </p:spTree>
+    <p:extLst>
+      <p:ext uri="{BB962C8B-B14F-4D97-AF65-F5344CB8AC3E}">
+        <p14:creationId xmlns:p14="http://schemas.microsoft.com/office/powerpoint/2010/main" val="1024086991"/>
+      </p:ext>
+    </p:extLst>
+  </p:cSld>
+  <p:clrMapOvr>
+    <a:masterClrMapping/>
+  </p:clrMapOvr>
+</p:notes>
+</file>
+
+<file path=ppt/notesSlides/notesSlide8.xml><?xml version="1.0" encoding="utf-8"?>
+<p:notes xmlns:a="http://schemas.openxmlformats.org/drawingml/2006/main" xmlns:r="http://schemas.openxmlformats.org/officeDocument/2006/relationships" xmlns:p="http://schemas.openxmlformats.org/presentationml/2006/main">
+  <p:cSld>
+    <p:spTree>
+      <p:nvGrpSpPr>
+        <p:cNvPr id="1" name=""/>
+        <p:cNvGrpSpPr/>
+        <p:nvPr/>
+      </p:nvGrpSpPr>
+      <p:grpSpPr>
+        <a:xfrm>
+          <a:off x="0" y="0"/>
+          <a:ext cx="0" cy="0"/>
+          <a:chOff x="0" y="0"/>
+          <a:chExt cx="0" cy="0"/>
+        </a:xfrm>
+      </p:grpSpPr>
+      <p:sp>
+        <p:nvSpPr>
+          <p:cNvPr id="2" name="Slide Image Placeholder 1"/>
+          <p:cNvSpPr>
+            <a:spLocks noGrp="1" noRot="1" noChangeAspect="1"/>
+          </p:cNvSpPr>
+          <p:nvPr>
+            <p:ph type="sldImg"/>
+          </p:nvPr>
+        </p:nvSpPr>
+        <p:spPr/>
+      </p:sp>
+      <p:sp>
+        <p:nvSpPr>
+          <p:cNvPr id="3" name="Notes Placeholder 2"/>
+          <p:cNvSpPr>
+            <a:spLocks noGrp="1"/>
+          </p:cNvSpPr>
+          <p:nvPr>
+            <p:ph type="body" idx="1"/>
+          </p:nvPr>
+        </p:nvSpPr>
+        <p:spPr/>
+        <p:txBody>
+          <a:bodyPr/>
+          <a:lstStyle/>
+          <a:p>
+            <a:endParaRPr lang="en-US" dirty="0"/>
+          </a:p>
+        </p:txBody>
+      </p:sp>
+      <p:sp>
+        <p:nvSpPr>
+          <p:cNvPr id="4" name="Slide Number Placeholder 3"/>
+          <p:cNvSpPr>
+            <a:spLocks noGrp="1"/>
+          </p:cNvSpPr>
+          <p:nvPr>
+            <p:ph type="sldNum" sz="quarter" idx="10"/>
+          </p:nvPr>
+        </p:nvSpPr>
+        <p:spPr/>
+        <p:txBody>
+          <a:bodyPr/>
+          <a:lstStyle/>
+          <a:p>
+            <a:fld id="{F7021451-1387-4CA6-816F-3879F97B5CBC}" type="slidenum">
+              <a:rPr lang="en-US"/>
+              <a:t>8</a:t>
+            </a:fld>
+            <a:endParaRPr lang="en-US"/>
+          </a:p>
+        </p:txBody>
+      </p:sp>
+    </p:spTree>
+    <p:extLst>
+      <p:ext uri="{BB962C8B-B14F-4D97-AF65-F5344CB8AC3E}">
+        <p14:creationId xmlns:p14="http://schemas.microsoft.com/office/powerpoint/2010/main" val="1024086991"/>
+      </p:ext>
+    </p:extLst>
+  </p:cSld>
+  <p:clrMapOvr>
+    <a:masterClrMapping/>
+  </p:clrMapOvr>
+</p:notes>
+</file>
+
+<file path=ppt/notesSlides/notesSlide9.xml><?xml version="1.0" encoding="utf-8"?>
+<p:notes xmlns:a="http://schemas.openxmlformats.org/drawingml/2006/main" xmlns:r="http://schemas.openxmlformats.org/officeDocument/2006/relationships" xmlns:p="http://schemas.openxmlformats.org/presentationml/2006/main">
+  <p:cSld>
+    <p:spTree>
+      <p:nvGrpSpPr>
+        <p:cNvPr id="1" name=""/>
+        <p:cNvGrpSpPr/>
+        <p:nvPr/>
+      </p:nvGrpSpPr>
+      <p:grpSpPr>
+        <a:xfrm>
+          <a:off x="0" y="0"/>
+          <a:ext cx="0" cy="0"/>
+          <a:chOff x="0" y="0"/>
+          <a:chExt cx="0" cy="0"/>
+        </a:xfrm>
+      </p:grpSpPr>
+      <p:sp>
+        <p:nvSpPr>
+          <p:cNvPr id="2" name="Slide Image Placeholder 1"/>
+          <p:cNvSpPr>
+            <a:spLocks noGrp="1" noRot="1" noChangeAspect="1"/>
+          </p:cNvSpPr>
+          <p:nvPr>
+            <p:ph type="sldImg"/>
+          </p:nvPr>
+        </p:nvSpPr>
+        <p:spPr/>
+      </p:sp>
+      <p:sp>
+        <p:nvSpPr>
+          <p:cNvPr id="3" name="Notes Placeholder 2"/>
+          <p:cNvSpPr>
+            <a:spLocks noGrp="1"/>
+          </p:cNvSpPr>
+          <p:nvPr>
+            <p:ph type="body" idx="1"/>
+          </p:nvPr>
+        </p:nvSpPr>
+        <p:spPr/>
+        <p:txBody>
+          <a:bodyPr/>
+          <a:lstStyle/>
+          <a:p>
+            <a:endParaRPr lang="en-US" dirty="0"/>
+          </a:p>
+        </p:txBody>
+      </p:sp>
+      <p:sp>
+        <p:nvSpPr>
+          <p:cNvPr id="4" name="Slide Number Placeholder 3"/>
+          <p:cNvSpPr>
+            <a:spLocks noGrp="1"/>
+          </p:cNvSpPr>
+          <p:nvPr>
+            <p:ph type="sldNum" sz="quarter" idx="10"/>
+          </p:nvPr>
+        </p:nvSpPr>
+        <p:spPr/>
+        <p:txBody>
+          <a:bodyPr/>
+          <a:lstStyle/>
+          <a:p>
+            <a:fld id="{F7021451-1387-4CA6-816F-3879F97B5CBC}" type="slidenum">
+              <a:rPr lang="en-US"/>
+              <a:t>9</a:t>
             </a:fld>
             <a:endParaRPr lang="en-US"/>
           </a:p>
@@ -1022,6 +1424,11 @@
 <file path=ppt/slideMasters/slideMaster1.xml><?xml version="1.0" encoding="utf-8"?>
 <p:sldMaster xmlns:a="http://schemas.openxmlformats.org/drawingml/2006/main" xmlns:r="http://schemas.openxmlformats.org/officeDocument/2006/relationships" xmlns:p="http://schemas.openxmlformats.org/presentationml/2006/main">
   <p:cSld>
+    <p:bg>
+      <p:bgRef idx="1001">
+        <a:schemeClr val="bg1"/>
+      </p:bgRef>
+    </p:bg>
     <p:spTree>
       <p:nvGrpSpPr>
         <p:cNvPr id="1" name=""/>
@@ -1304,6 +1711,7 @@
         <a:solidFill>
           <a:srgbClr val="1E2761"/>
         </a:solidFill>
+        <a:effectLst/>
       </p:bgPr>
     </p:bg>
     <p:spTree>
@@ -1449,7 +1857,7 @@
           <a:bodyPr wrap="square" lIns="0" tIns="0" rIns="0" bIns="0" rtlCol="0" anchor="ctr"/>
           <a:lstStyle/>
           <a:p>
-            <a:pPr algn="ctr" indent="0" marL="0">
+            <a:pPr marL="0" indent="0" algn="ctr">
               <a:buNone/>
             </a:pPr>
             <a:r>
@@ -1485,7 +1893,7 @@
           <a:bodyPr wrap="square" lIns="0" tIns="0" rIns="0" bIns="0" rtlCol="0" anchor="ctr"/>
           <a:lstStyle/>
           <a:p>
-            <a:pPr indent="0" marL="0">
+            <a:pPr marL="0" indent="0">
               <a:buNone/>
             </a:pPr>
             <a:r>
@@ -1524,7 +1932,7 @@
           <a:bodyPr wrap="square" lIns="0" tIns="0" rIns="0" bIns="0" rtlCol="0" anchor="ctr"/>
           <a:lstStyle/>
           <a:p>
-            <a:pPr indent="0" marL="0">
+            <a:pPr marL="0" indent="0">
               <a:buNone/>
             </a:pPr>
             <a:r>
@@ -1563,7 +1971,7 @@
           <a:bodyPr wrap="square" lIns="0" tIns="0" rIns="0" bIns="0" rtlCol="0" anchor="ctr"/>
           <a:lstStyle/>
           <a:p>
-            <a:pPr indent="0" marL="0">
+            <a:pPr marL="0" indent="0">
               <a:buNone/>
             </a:pPr>
             <a:r>
@@ -1580,7 +1988,7 @@
             <a:endParaRPr lang="en-US" sz="1600" dirty="0"/>
           </a:p>
           <a:p>
-            <a:pPr indent="0" marL="0">
+            <a:pPr marL="0" indent="0">
               <a:buNone/>
             </a:pPr>
             <a:r>
@@ -1644,7 +2052,7 @@
           <a:bodyPr wrap="square" lIns="0" tIns="0" rIns="0" bIns="0" rtlCol="0" anchor="ctr"/>
           <a:lstStyle/>
           <a:p>
-            <a:pPr algn="ctr" indent="0" marL="0">
+            <a:pPr marL="0" indent="0" algn="ctr">
               <a:buNone/>
             </a:pPr>
             <a:r>
@@ -1660,6 +2068,694 @@
         </p:txBody>
       </p:sp>
     </p:spTree>
+  </p:cSld>
+  <p:clrMapOvr>
+    <a:masterClrMapping/>
+  </p:clrMapOvr>
+</p:sld>
+</file>
+
+<file path=ppt/slides/slide10.xml><?xml version="1.0" encoding="utf-8"?>
+<p:sld xmlns:a="http://schemas.openxmlformats.org/drawingml/2006/main" xmlns:r="http://schemas.openxmlformats.org/officeDocument/2006/relationships" xmlns:p="http://schemas.openxmlformats.org/presentationml/2006/main">
+  <p:cSld>
+    <p:spTree>
+      <p:nvGrpSpPr>
+        <p:cNvPr id="1" name=""/>
+        <p:cNvGrpSpPr/>
+        <p:nvPr/>
+      </p:nvGrpSpPr>
+      <p:grpSpPr>
+        <a:xfrm>
+          <a:off x="0" y="0"/>
+          <a:ext cx="0" cy="0"/>
+          <a:chOff x="0" y="0"/>
+          <a:chExt cx="0" cy="0"/>
+        </a:xfrm>
+      </p:grpSpPr>
+      <p:sp>
+        <p:nvSpPr>
+          <p:cNvPr id="2" name="Text 0"/>
+          <p:cNvSpPr/>
+          <p:nvPr/>
+        </p:nvSpPr>
+        <p:spPr>
+          <a:xfrm>
+            <a:off x="457200" y="274320"/>
+            <a:ext cx="8229600" cy="548640"/>
+          </a:xfrm>
+          <a:prstGeom prst="rect">
+            <a:avLst/>
+          </a:prstGeom>
+          <a:noFill/>
+          <a:ln/>
+        </p:spPr>
+        <p:txBody>
+          <a:bodyPr wrap="square" lIns="0" tIns="0" rIns="0" bIns="0" rtlCol="0" anchor="ctr"/>
+          <a:lstStyle/>
+          <a:p>
+            <a:pPr marL="0" indent="0">
+              <a:buNone/>
+            </a:pPr>
+            <a:r>
+              <a:rPr lang="en-US" sz="2800" b="1" dirty="0" smtClean="0">
+                <a:solidFill>
+                  <a:srgbClr val="1E2761"/>
+                </a:solidFill>
+                <a:latin typeface="Calibri" pitchFamily="34" charset="0"/>
+                <a:ea typeface="Calibri" pitchFamily="34" charset="-122"/>
+                <a:cs typeface="Calibri" pitchFamily="34" charset="-120"/>
+              </a:rPr>
+              <a:t>Replicated Jira Tickets to GitLab - Screenshot</a:t>
+            </a:r>
+            <a:endParaRPr lang="en-US" sz="2800" dirty="0"/>
+          </a:p>
+        </p:txBody>
+      </p:sp>
+      <p:sp>
+        <p:nvSpPr>
+          <p:cNvPr id="37" name="Shape 35"/>
+          <p:cNvSpPr/>
+          <p:nvPr/>
+        </p:nvSpPr>
+        <p:spPr>
+          <a:xfrm>
+            <a:off x="0" y="4892040"/>
+            <a:ext cx="9144000" cy="251460"/>
+          </a:xfrm>
+          <a:prstGeom prst="rect">
+            <a:avLst/>
+          </a:prstGeom>
+          <a:solidFill>
+            <a:srgbClr val="1E2761"/>
+          </a:solidFill>
+          <a:ln w="12700">
+            <a:solidFill>
+              <a:srgbClr val="1E2761"/>
+            </a:solidFill>
+            <a:prstDash val="solid"/>
+          </a:ln>
+        </p:spPr>
+      </p:sp>
+      <p:sp>
+        <p:nvSpPr>
+          <p:cNvPr id="38" name="Text 36"/>
+          <p:cNvSpPr/>
+          <p:nvPr/>
+        </p:nvSpPr>
+        <p:spPr>
+          <a:xfrm>
+            <a:off x="457200" y="4892040"/>
+            <a:ext cx="8229600" cy="251460"/>
+          </a:xfrm>
+          <a:prstGeom prst="rect">
+            <a:avLst/>
+          </a:prstGeom>
+          <a:noFill/>
+          <a:ln/>
+        </p:spPr>
+        <p:txBody>
+          <a:bodyPr wrap="square" lIns="0" tIns="0" rIns="0" bIns="0" rtlCol="0" anchor="ctr"/>
+          <a:lstStyle/>
+          <a:p>
+            <a:pPr marL="0" indent="0" algn="ctr">
+              <a:buNone/>
+            </a:pPr>
+            <a:r>
+              <a:rPr lang="en-US" sz="1000" dirty="0">
+                <a:solidFill>
+                  <a:srgbClr val="FFFFFF"/>
+                </a:solidFill>
+              </a:rPr>
+              <a:t>Jira → GitLab Sync Service  |  POC</a:t>
+            </a:r>
+            <a:endParaRPr lang="en-US" sz="1000" dirty="0"/>
+          </a:p>
+        </p:txBody>
+      </p:sp>
+      <p:pic>
+        <p:nvPicPr>
+          <p:cNvPr id="3074" name="Picture 2"/>
+          <p:cNvPicPr>
+            <a:picLocks noChangeAspect="1" noChangeArrowheads="1"/>
+          </p:cNvPicPr>
+          <p:nvPr/>
+        </p:nvPicPr>
+        <p:blipFill>
+          <a:blip r:embed="rId3">
+            <a:extLst>
+              <a:ext uri="{28A0092B-C50C-407E-A947-70E740481C1C}">
+                <a14:useLocalDpi xmlns:a14="http://schemas.microsoft.com/office/drawing/2010/main" val="0"/>
+              </a:ext>
+            </a:extLst>
+          </a:blip>
+          <a:srcRect/>
+          <a:stretch>
+            <a:fillRect/>
+          </a:stretch>
+        </p:blipFill>
+        <p:spPr bwMode="auto">
+          <a:xfrm>
+            <a:off x="457200" y="822960"/>
+            <a:ext cx="8338144" cy="3874029"/>
+          </a:xfrm>
+          <a:prstGeom prst="rect">
+            <a:avLst/>
+          </a:prstGeom>
+          <a:noFill/>
+          <a:ln>
+            <a:noFill/>
+          </a:ln>
+          <a:effectLst/>
+          <a:extLst>
+            <a:ext uri="{909E8E84-426E-40DD-AFC4-6F175D3DCCD1}">
+              <a14:hiddenFill xmlns:a14="http://schemas.microsoft.com/office/drawing/2010/main">
+                <a:solidFill>
+                  <a:schemeClr val="accent1"/>
+                </a:solidFill>
+              </a14:hiddenFill>
+            </a:ext>
+            <a:ext uri="{91240B29-F687-4F45-9708-019B960494DF}">
+              <a14:hiddenLine xmlns:a14="http://schemas.microsoft.com/office/drawing/2010/main" w="9525">
+                <a:solidFill>
+                  <a:schemeClr val="tx1"/>
+                </a:solidFill>
+                <a:miter lim="800000"/>
+                <a:headEnd/>
+                <a:tailEnd/>
+              </a14:hiddenLine>
+            </a:ext>
+            <a:ext uri="{AF507438-7753-43E0-B8FC-AC1667EBCBE1}">
+              <a14:hiddenEffects xmlns:a14="http://schemas.microsoft.com/office/drawing/2010/main">
+                <a:effectLst>
+                  <a:outerShdw dist="35921" dir="2700000" algn="ctr" rotWithShape="0">
+                    <a:schemeClr val="bg2"/>
+                  </a:outerShdw>
+                </a:effectLst>
+              </a14:hiddenEffects>
+            </a:ext>
+          </a:extLst>
+        </p:spPr>
+      </p:pic>
+    </p:spTree>
+    <p:extLst>
+      <p:ext uri="{BB962C8B-B14F-4D97-AF65-F5344CB8AC3E}">
+        <p14:creationId xmlns:p14="http://schemas.microsoft.com/office/powerpoint/2010/main" val="4103483939"/>
+      </p:ext>
+    </p:extLst>
+  </p:cSld>
+  <p:clrMapOvr>
+    <a:masterClrMapping/>
+  </p:clrMapOvr>
+</p:sld>
+</file>
+
+<file path=ppt/slides/slide11.xml><?xml version="1.0" encoding="utf-8"?>
+<p:sld xmlns:a="http://schemas.openxmlformats.org/drawingml/2006/main" xmlns:r="http://schemas.openxmlformats.org/officeDocument/2006/relationships" xmlns:p="http://schemas.openxmlformats.org/presentationml/2006/main">
+  <p:cSld>
+    <p:spTree>
+      <p:nvGrpSpPr>
+        <p:cNvPr id="1" name=""/>
+        <p:cNvGrpSpPr/>
+        <p:nvPr/>
+      </p:nvGrpSpPr>
+      <p:grpSpPr>
+        <a:xfrm>
+          <a:off x="0" y="0"/>
+          <a:ext cx="0" cy="0"/>
+          <a:chOff x="0" y="0"/>
+          <a:chExt cx="0" cy="0"/>
+        </a:xfrm>
+      </p:grpSpPr>
+      <p:sp>
+        <p:nvSpPr>
+          <p:cNvPr id="2" name="Text 0"/>
+          <p:cNvSpPr/>
+          <p:nvPr/>
+        </p:nvSpPr>
+        <p:spPr>
+          <a:xfrm>
+            <a:off x="457200" y="274320"/>
+            <a:ext cx="8229600" cy="548640"/>
+          </a:xfrm>
+          <a:prstGeom prst="rect">
+            <a:avLst/>
+          </a:prstGeom>
+          <a:noFill/>
+          <a:ln/>
+        </p:spPr>
+        <p:txBody>
+          <a:bodyPr wrap="square" lIns="0" tIns="0" rIns="0" bIns="0" rtlCol="0" anchor="ctr"/>
+          <a:lstStyle/>
+          <a:p>
+            <a:pPr marL="0" indent="0">
+              <a:buNone/>
+            </a:pPr>
+            <a:r>
+              <a:rPr lang="en-US" sz="2800" b="1" dirty="0" smtClean="0">
+                <a:solidFill>
+                  <a:srgbClr val="1E2761"/>
+                </a:solidFill>
+                <a:latin typeface="Calibri" pitchFamily="34" charset="0"/>
+                <a:ea typeface="Calibri" pitchFamily="34" charset="-122"/>
+                <a:cs typeface="Calibri" pitchFamily="34" charset="-120"/>
+              </a:rPr>
+              <a:t>Jira and GitLab Authorization</a:t>
+            </a:r>
+            <a:endParaRPr lang="en-US" sz="2800" dirty="0"/>
+          </a:p>
+        </p:txBody>
+      </p:sp>
+      <p:sp>
+        <p:nvSpPr>
+          <p:cNvPr id="37" name="Shape 35"/>
+          <p:cNvSpPr/>
+          <p:nvPr/>
+        </p:nvSpPr>
+        <p:spPr>
+          <a:xfrm>
+            <a:off x="0" y="4892040"/>
+            <a:ext cx="9144000" cy="251460"/>
+          </a:xfrm>
+          <a:prstGeom prst="rect">
+            <a:avLst/>
+          </a:prstGeom>
+          <a:solidFill>
+            <a:srgbClr val="1E2761"/>
+          </a:solidFill>
+          <a:ln w="12700">
+            <a:solidFill>
+              <a:srgbClr val="1E2761"/>
+            </a:solidFill>
+            <a:prstDash val="solid"/>
+          </a:ln>
+        </p:spPr>
+      </p:sp>
+      <p:sp>
+        <p:nvSpPr>
+          <p:cNvPr id="38" name="Text 36"/>
+          <p:cNvSpPr/>
+          <p:nvPr/>
+        </p:nvSpPr>
+        <p:spPr>
+          <a:xfrm>
+            <a:off x="457200" y="4892040"/>
+            <a:ext cx="8229600" cy="251460"/>
+          </a:xfrm>
+          <a:prstGeom prst="rect">
+            <a:avLst/>
+          </a:prstGeom>
+          <a:noFill/>
+          <a:ln/>
+        </p:spPr>
+        <p:txBody>
+          <a:bodyPr wrap="square" lIns="0" tIns="0" rIns="0" bIns="0" rtlCol="0" anchor="ctr"/>
+          <a:lstStyle/>
+          <a:p>
+            <a:pPr marL="0" indent="0" algn="ctr">
+              <a:buNone/>
+            </a:pPr>
+            <a:r>
+              <a:rPr lang="en-US" sz="1000" dirty="0">
+                <a:solidFill>
+                  <a:srgbClr val="FFFFFF"/>
+                </a:solidFill>
+              </a:rPr>
+              <a:t>Jira → GitLab Sync Service  |  POC</a:t>
+            </a:r>
+            <a:endParaRPr lang="en-US" sz="1000" dirty="0"/>
+          </a:p>
+        </p:txBody>
+      </p:sp>
+      <p:sp>
+        <p:nvSpPr>
+          <p:cNvPr id="3" name="Rectangle 2"/>
+          <p:cNvSpPr/>
+          <p:nvPr/>
+        </p:nvSpPr>
+        <p:spPr>
+          <a:xfrm>
+            <a:off x="506537" y="924856"/>
+            <a:ext cx="7209945" cy="3939540"/>
+          </a:xfrm>
+          <a:prstGeom prst="rect">
+            <a:avLst/>
+          </a:prstGeom>
+        </p:spPr>
+        <p:txBody>
+          <a:bodyPr wrap="square">
+            <a:spAutoFit/>
+          </a:bodyPr>
+          <a:lstStyle/>
+          <a:p>
+            <a:r>
+              <a:rPr lang="en-IN" sz="1000" b="1" dirty="0"/>
+              <a:t>Setup on Atlassian Developer Console</a:t>
+            </a:r>
+            <a:endParaRPr lang="en-IN" sz="1000" dirty="0"/>
+          </a:p>
+          <a:p>
+            <a:r>
+              <a:rPr lang="en-IN" sz="1000" b="1" dirty="0"/>
+              <a:t>Step 1 — Create an </a:t>
+            </a:r>
+            <a:r>
+              <a:rPr lang="en-IN" sz="1000" b="1" dirty="0" err="1"/>
+              <a:t>OAuth</a:t>
+            </a:r>
+            <a:r>
+              <a:rPr lang="en-IN" sz="1000" b="1" dirty="0"/>
+              <a:t> App:</a:t>
+            </a:r>
+            <a:endParaRPr lang="en-IN" sz="1000" dirty="0"/>
+          </a:p>
+          <a:p>
+            <a:pPr lvl="1"/>
+            <a:r>
+              <a:rPr lang="en-IN" sz="1000" dirty="0"/>
+              <a:t>Go to </a:t>
+            </a:r>
+            <a:r>
+              <a:rPr lang="en-IN" sz="1000" u="sng" dirty="0">
+                <a:hlinkClick r:id="rId3"/>
+              </a:rPr>
+              <a:t>https://developer.atlassian.com/console/myapps/</a:t>
+            </a:r>
+            <a:endParaRPr lang="en-IN" sz="1000" dirty="0"/>
+          </a:p>
+          <a:p>
+            <a:pPr lvl="1"/>
+            <a:r>
+              <a:rPr lang="en-IN" sz="1000" dirty="0"/>
+              <a:t>Click </a:t>
+            </a:r>
+            <a:r>
+              <a:rPr lang="en-IN" sz="1000" b="1" dirty="0"/>
+              <a:t>Create</a:t>
+            </a:r>
+            <a:r>
+              <a:rPr lang="en-IN" sz="1000" dirty="0"/>
+              <a:t> → </a:t>
+            </a:r>
+            <a:r>
+              <a:rPr lang="en-IN" sz="1000" b="1" dirty="0" err="1"/>
+              <a:t>OAuth</a:t>
+            </a:r>
+            <a:r>
+              <a:rPr lang="en-IN" sz="1000" b="1" dirty="0"/>
+              <a:t> 2.0 integration</a:t>
+            </a:r>
+            <a:endParaRPr lang="en-IN" sz="1000" dirty="0"/>
+          </a:p>
+          <a:p>
+            <a:pPr lvl="1"/>
+            <a:r>
+              <a:rPr lang="en-IN" sz="1000" dirty="0"/>
+              <a:t>Give it a name e.g. </a:t>
+            </a:r>
+            <a:r>
+              <a:rPr lang="en-IN" sz="1000" dirty="0" err="1"/>
+              <a:t>JiraGitLabSync</a:t>
+            </a:r>
+            <a:endParaRPr lang="en-IN" sz="1000" dirty="0"/>
+          </a:p>
+          <a:p>
+            <a:pPr lvl="1"/>
+            <a:r>
+              <a:rPr lang="en-IN" sz="1000" dirty="0"/>
+              <a:t>Click </a:t>
+            </a:r>
+            <a:r>
+              <a:rPr lang="en-IN" sz="1000" b="1" dirty="0"/>
+              <a:t>Create</a:t>
+            </a:r>
+            <a:endParaRPr lang="en-IN" sz="1000" dirty="0"/>
+          </a:p>
+          <a:p>
+            <a:r>
+              <a:rPr lang="en-IN" sz="1000" b="1" dirty="0"/>
+              <a:t>Step 2 — Add permissions:</a:t>
+            </a:r>
+            <a:endParaRPr lang="en-IN" sz="1000" dirty="0"/>
+          </a:p>
+          <a:p>
+            <a:pPr lvl="1"/>
+            <a:r>
+              <a:rPr lang="en-IN" sz="1000" dirty="0"/>
+              <a:t>Go to </a:t>
+            </a:r>
+            <a:r>
+              <a:rPr lang="en-IN" sz="1000" b="1" dirty="0"/>
+              <a:t>Permissions</a:t>
+            </a:r>
+            <a:r>
+              <a:rPr lang="en-IN" sz="1000" dirty="0"/>
+              <a:t> tab</a:t>
+            </a:r>
+          </a:p>
+          <a:p>
+            <a:pPr lvl="1"/>
+            <a:r>
+              <a:rPr lang="en-IN" sz="1000" dirty="0"/>
+              <a:t>Add </a:t>
+            </a:r>
+            <a:r>
+              <a:rPr lang="en-IN" sz="1000" b="1" dirty="0" err="1"/>
+              <a:t>Jira</a:t>
+            </a:r>
+            <a:r>
+              <a:rPr lang="en-IN" sz="1000" b="1" dirty="0"/>
+              <a:t> API</a:t>
+            </a:r>
+            <a:r>
+              <a:rPr lang="en-IN" sz="1000" dirty="0"/>
+              <a:t> → enable </a:t>
+            </a:r>
+            <a:r>
+              <a:rPr lang="en-IN" sz="1000" dirty="0" err="1"/>
+              <a:t>read:jira-work</a:t>
+            </a:r>
+            <a:endParaRPr lang="en-IN" sz="1000" dirty="0"/>
+          </a:p>
+          <a:p>
+            <a:r>
+              <a:rPr lang="en-IN" sz="1000" b="1" dirty="0"/>
+              <a:t>Step 3 — Get your credentials:</a:t>
+            </a:r>
+            <a:endParaRPr lang="en-IN" sz="1000" dirty="0"/>
+          </a:p>
+          <a:p>
+            <a:pPr lvl="1"/>
+            <a:r>
+              <a:rPr lang="en-IN" sz="1000" dirty="0"/>
+              <a:t>Go to </a:t>
+            </a:r>
+            <a:r>
+              <a:rPr lang="en-IN" sz="1000" b="1" dirty="0"/>
+              <a:t>Settings</a:t>
+            </a:r>
+            <a:r>
+              <a:rPr lang="en-IN" sz="1000" dirty="0"/>
+              <a:t> tab</a:t>
+            </a:r>
+          </a:p>
+          <a:p>
+            <a:pPr lvl="1"/>
+            <a:r>
+              <a:rPr lang="en-IN" sz="1000" dirty="0"/>
+              <a:t>Copy </a:t>
+            </a:r>
+            <a:r>
+              <a:rPr lang="en-IN" sz="1000" b="1" dirty="0"/>
+              <a:t>Client ID</a:t>
+            </a:r>
+            <a:r>
+              <a:rPr lang="en-IN" sz="1000" dirty="0"/>
+              <a:t> and </a:t>
+            </a:r>
+            <a:r>
+              <a:rPr lang="en-IN" sz="1000" b="1" dirty="0"/>
+              <a:t>Client Secret</a:t>
+            </a:r>
+            <a:endParaRPr lang="en-IN" sz="1000" dirty="0"/>
+          </a:p>
+          <a:p>
+            <a:r>
+              <a:rPr lang="en-IN" sz="1000" b="1" dirty="0"/>
+              <a:t>Step 4 — Get Cloud ID:</a:t>
+            </a:r>
+            <a:endParaRPr lang="en-IN" sz="1000" dirty="0"/>
+          </a:p>
+          <a:p>
+            <a:pPr lvl="0"/>
+            <a:r>
+              <a:rPr lang="en-IN" sz="1000" u="sng" dirty="0">
+                <a:hlinkClick r:id="rId4"/>
+              </a:rPr>
+              <a:t>https://singhraghubir2311.atlassian.net/_edge/tenant_info</a:t>
+            </a:r>
+            <a:endParaRPr lang="en-IN" sz="1000" dirty="0"/>
+          </a:p>
+          <a:p>
+            <a:r>
+              <a:rPr lang="en-IN" sz="1000" dirty="0"/>
+              <a:t> </a:t>
+            </a:r>
+          </a:p>
+          <a:p>
+            <a:r>
+              <a:rPr lang="en-IN" sz="1000" b="1" dirty="0"/>
+              <a:t>Setup on </a:t>
+            </a:r>
+            <a:r>
+              <a:rPr lang="en-IN" sz="1000" b="1" dirty="0" err="1"/>
+              <a:t>GitLab</a:t>
+            </a:r>
+            <a:endParaRPr lang="en-IN" sz="1000" dirty="0"/>
+          </a:p>
+          <a:p>
+            <a:r>
+              <a:rPr lang="en-IN" sz="1000" b="1" dirty="0"/>
+              <a:t>Step 1 — Create an </a:t>
+            </a:r>
+            <a:r>
+              <a:rPr lang="en-IN" sz="1000" b="1" dirty="0" err="1"/>
+              <a:t>OAuth</a:t>
+            </a:r>
+            <a:r>
+              <a:rPr lang="en-IN" sz="1000" b="1" dirty="0"/>
+              <a:t> App:</a:t>
+            </a:r>
+            <a:endParaRPr lang="en-IN" sz="1000" dirty="0"/>
+          </a:p>
+          <a:p>
+            <a:pPr lvl="1"/>
+            <a:r>
+              <a:rPr lang="en-IN" sz="1000" dirty="0"/>
+              <a:t>Go to </a:t>
+            </a:r>
+            <a:r>
+              <a:rPr lang="en-IN" sz="1000" b="1" dirty="0" err="1"/>
+              <a:t>GitLab</a:t>
+            </a:r>
+            <a:r>
+              <a:rPr lang="en-IN" sz="1000" b="1" dirty="0"/>
+              <a:t> → User Settings → Applications</a:t>
+            </a:r>
+            <a:r>
+              <a:rPr lang="en-IN" sz="1000" dirty="0"/>
+              <a:t> (or </a:t>
+            </a:r>
+            <a:r>
+              <a:rPr lang="en-IN" sz="1000" u="sng" dirty="0">
+                <a:hlinkClick r:id="rId5"/>
+              </a:rPr>
+              <a:t>https://gitlab.com/-/profile/applications</a:t>
+            </a:r>
+            <a:r>
+              <a:rPr lang="en-IN" sz="1000" dirty="0"/>
+              <a:t>)</a:t>
+            </a:r>
+          </a:p>
+          <a:p>
+            <a:pPr lvl="1"/>
+            <a:r>
+              <a:rPr lang="en-IN" sz="1000" dirty="0"/>
+              <a:t>Fill in: </a:t>
+            </a:r>
+          </a:p>
+          <a:p>
+            <a:pPr lvl="2"/>
+            <a:r>
+              <a:rPr lang="en-IN" sz="1000" b="1" dirty="0"/>
+              <a:t>Name:</a:t>
+            </a:r>
+            <a:r>
+              <a:rPr lang="en-IN" sz="1000" dirty="0"/>
+              <a:t> </a:t>
+            </a:r>
+            <a:r>
+              <a:rPr lang="en-IN" sz="1000" dirty="0" err="1"/>
+              <a:t>JiraGitLabSync</a:t>
+            </a:r>
+            <a:endParaRPr lang="en-IN" sz="1000" dirty="0"/>
+          </a:p>
+          <a:p>
+            <a:pPr lvl="2"/>
+            <a:r>
+              <a:rPr lang="en-IN" sz="1000" b="1" dirty="0"/>
+              <a:t>Redirect URI:</a:t>
+            </a:r>
+            <a:r>
+              <a:rPr lang="en-IN" sz="1000" dirty="0"/>
+              <a:t> http://localhost (required field, not actually used)</a:t>
+            </a:r>
+          </a:p>
+          <a:p>
+            <a:pPr lvl="2"/>
+            <a:r>
+              <a:rPr lang="en-IN" sz="1000" b="1" dirty="0"/>
+              <a:t>Scopes:</a:t>
+            </a:r>
+            <a:r>
+              <a:rPr lang="en-IN" sz="1000" dirty="0"/>
+              <a:t> check </a:t>
+            </a:r>
+            <a:r>
+              <a:rPr lang="en-IN" sz="1000" dirty="0" err="1"/>
+              <a:t>api</a:t>
+            </a:r>
+            <a:endParaRPr lang="en-IN" sz="1000" dirty="0"/>
+          </a:p>
+          <a:p>
+            <a:pPr lvl="0"/>
+            <a:r>
+              <a:rPr lang="en-IN" sz="1000" dirty="0" smtClean="0"/>
+              <a:t>	Click </a:t>
+            </a:r>
+            <a:r>
+              <a:rPr lang="en-IN" sz="1000" b="1" dirty="0"/>
+              <a:t>Save application</a:t>
+            </a:r>
+            <a:endParaRPr lang="en-IN" sz="1000" dirty="0"/>
+          </a:p>
+          <a:p>
+            <a:pPr lvl="0"/>
+            <a:r>
+              <a:rPr lang="en-IN" sz="1000" dirty="0" smtClean="0"/>
+              <a:t>	Copy </a:t>
+            </a:r>
+            <a:r>
+              <a:rPr lang="en-IN" sz="1000" dirty="0"/>
+              <a:t>the </a:t>
+            </a:r>
+            <a:r>
+              <a:rPr lang="en-IN" sz="1000" b="1" dirty="0"/>
+              <a:t>Application ID</a:t>
+            </a:r>
+            <a:r>
+              <a:rPr lang="en-IN" sz="1000" dirty="0"/>
+              <a:t> (Client ID) and </a:t>
+            </a:r>
+            <a:r>
+              <a:rPr lang="en-IN" sz="1000" b="1" dirty="0"/>
+              <a:t>Secret</a:t>
+            </a:r>
+            <a:endParaRPr lang="en-IN" sz="1000" dirty="0"/>
+          </a:p>
+          <a:p>
+            <a:r>
+              <a:rPr lang="en-IN" sz="1000" dirty="0"/>
+              <a:t> </a:t>
+            </a:r>
+          </a:p>
+        </p:txBody>
+      </p:sp>
+    </p:spTree>
+    <p:extLst>
+      <p:ext uri="{BB962C8B-B14F-4D97-AF65-F5344CB8AC3E}">
+        <p14:creationId xmlns:p14="http://schemas.microsoft.com/office/powerpoint/2010/main" val="3699267760"/>
+      </p:ext>
+    </p:extLst>
   </p:cSld>
   <p:clrMapOvr>
     <a:masterClrMapping/>
@@ -1675,6 +2771,7 @@
         <a:solidFill>
           <a:srgbClr val="F8FAFC"/>
         </a:solidFill>
+        <a:effectLst/>
       </p:bgPr>
     </p:bg>
     <p:spTree>
@@ -1712,7 +2809,7 @@
           <a:bodyPr wrap="square" lIns="0" tIns="0" rIns="0" bIns="0" rtlCol="0" anchor="ctr"/>
           <a:lstStyle/>
           <a:p>
-            <a:pPr indent="0" marL="0">
+            <a:pPr marL="0" indent="0">
               <a:buNone/>
             </a:pPr>
             <a:r>
@@ -1751,7 +2848,7 @@
           <a:bodyPr wrap="square" lIns="0" tIns="0" rIns="0" bIns="0" rtlCol="0" anchor="ctr"/>
           <a:lstStyle/>
           <a:p>
-            <a:pPr indent="0" marL="0">
+            <a:pPr marL="0" indent="0">
               <a:buNone/>
             </a:pPr>
             <a:r>
@@ -1815,7 +2912,7 @@
             <a:prstDash val="solid"/>
           </a:ln>
           <a:effectLst>
-            <a:outerShdw sx="100000" sy="100000" kx="0" ky="0" algn="bl" rotWithShape="0" blurRad="101600" dist="38100" dir="8100000">
+            <a:outerShdw blurRad="101600" dist="38100" dir="8100000" algn="bl" rotWithShape="0">
               <a:srgbClr val="000000">
                 <a:alpha val="10000"/>
               </a:srgbClr>
@@ -1894,7 +2991,7 @@
           <a:bodyPr wrap="square" lIns="0" tIns="0" rIns="0" bIns="0" rtlCol="0" anchor="ctr"/>
           <a:lstStyle/>
           <a:p>
-            <a:pPr algn="ctr" indent="0" marL="0">
+            <a:pPr marL="0" indent="0" algn="ctr">
               <a:buNone/>
             </a:pPr>
             <a:r>
@@ -1930,7 +3027,7 @@
           <a:bodyPr wrap="square" lIns="0" tIns="0" rIns="0" bIns="0" rtlCol="0" anchor="ctr"/>
           <a:lstStyle/>
           <a:p>
-            <a:pPr indent="0" marL="0">
+            <a:pPr marL="0" indent="0">
               <a:buNone/>
             </a:pPr>
             <a:r>
@@ -1966,7 +3063,7 @@
           <a:bodyPr wrap="square" lIns="0" tIns="0" rIns="0" bIns="0" rtlCol="0" anchor="ctr"/>
           <a:lstStyle/>
           <a:p>
-            <a:pPr indent="0" marL="0">
+            <a:pPr marL="0" indent="0">
               <a:buNone/>
             </a:pPr>
             <a:r>
@@ -2005,7 +3102,7 @@
             <a:prstDash val="solid"/>
           </a:ln>
           <a:effectLst>
-            <a:outerShdw sx="100000" sy="100000" kx="0" ky="0" algn="bl" rotWithShape="0" blurRad="101600" dist="38100" dir="8100000">
+            <a:outerShdw blurRad="101600" dist="38100" dir="8100000" algn="bl" rotWithShape="0">
               <a:srgbClr val="000000">
                 <a:alpha val="10000"/>
               </a:srgbClr>
@@ -2084,7 +3181,7 @@
           <a:bodyPr wrap="square" lIns="0" tIns="0" rIns="0" bIns="0" rtlCol="0" anchor="ctr"/>
           <a:lstStyle/>
           <a:p>
-            <a:pPr algn="ctr" indent="0" marL="0">
+            <a:pPr marL="0" indent="0" algn="ctr">
               <a:buNone/>
             </a:pPr>
             <a:r>
@@ -2120,7 +3217,7 @@
           <a:bodyPr wrap="square" lIns="0" tIns="0" rIns="0" bIns="0" rtlCol="0" anchor="ctr"/>
           <a:lstStyle/>
           <a:p>
-            <a:pPr indent="0" marL="0">
+            <a:pPr marL="0" indent="0">
               <a:buNone/>
             </a:pPr>
             <a:r>
@@ -2156,7 +3253,7 @@
           <a:bodyPr wrap="square" lIns="0" tIns="0" rIns="0" bIns="0" rtlCol="0" anchor="ctr"/>
           <a:lstStyle/>
           <a:p>
-            <a:pPr indent="0" marL="0">
+            <a:pPr marL="0" indent="0">
               <a:buNone/>
             </a:pPr>
             <a:r>
@@ -2195,7 +3292,7 @@
             <a:prstDash val="solid"/>
           </a:ln>
           <a:effectLst>
-            <a:outerShdw sx="100000" sy="100000" kx="0" ky="0" algn="bl" rotWithShape="0" blurRad="101600" dist="38100" dir="8100000">
+            <a:outerShdw blurRad="101600" dist="38100" dir="8100000" algn="bl" rotWithShape="0">
               <a:srgbClr val="000000">
                 <a:alpha val="10000"/>
               </a:srgbClr>
@@ -2274,7 +3371,7 @@
           <a:bodyPr wrap="square" lIns="0" tIns="0" rIns="0" bIns="0" rtlCol="0" anchor="ctr"/>
           <a:lstStyle/>
           <a:p>
-            <a:pPr algn="ctr" indent="0" marL="0">
+            <a:pPr marL="0" indent="0" algn="ctr">
               <a:buNone/>
             </a:pPr>
             <a:r>
@@ -2310,7 +3407,7 @@
           <a:bodyPr wrap="square" lIns="0" tIns="0" rIns="0" bIns="0" rtlCol="0" anchor="ctr"/>
           <a:lstStyle/>
           <a:p>
-            <a:pPr indent="0" marL="0">
+            <a:pPr marL="0" indent="0">
               <a:buNone/>
             </a:pPr>
             <a:r>
@@ -2346,7 +3443,7 @@
           <a:bodyPr wrap="square" lIns="0" tIns="0" rIns="0" bIns="0" rtlCol="0" anchor="ctr"/>
           <a:lstStyle/>
           <a:p>
-            <a:pPr indent="0" marL="0">
+            <a:pPr marL="0" indent="0">
               <a:buNone/>
             </a:pPr>
             <a:r>
@@ -2407,7 +3504,7 @@
           <a:bodyPr wrap="square" lIns="0" tIns="0" rIns="0" bIns="0" rtlCol="0" anchor="ctr"/>
           <a:lstStyle/>
           <a:p>
-            <a:pPr algn="ctr" indent="0" marL="0">
+            <a:pPr marL="0" indent="0" algn="ctr">
               <a:buNone/>
             </a:pPr>
             <a:r>
@@ -2438,6 +3535,7 @@
         <a:solidFill>
           <a:srgbClr val="F8FAFC"/>
         </a:solidFill>
+        <a:effectLst/>
       </p:bgPr>
     </p:bg>
     <p:spTree>
@@ -2475,7 +3573,7 @@
           <a:bodyPr wrap="square" lIns="0" tIns="0" rIns="0" bIns="0" rtlCol="0" anchor="ctr"/>
           <a:lstStyle/>
           <a:p>
-            <a:pPr indent="0" marL="0">
+            <a:pPr marL="0" indent="0">
               <a:buNone/>
             </a:pPr>
             <a:r>
@@ -2514,7 +3612,7 @@
           <a:bodyPr wrap="square" lIns="0" tIns="0" rIns="0" bIns="0" rtlCol="0" anchor="ctr"/>
           <a:lstStyle/>
           <a:p>
-            <a:pPr indent="0" marL="0">
+            <a:pPr marL="0" indent="0">
               <a:buNone/>
             </a:pPr>
             <a:r>
@@ -2578,7 +3676,7 @@
             <a:prstDash val="solid"/>
           </a:ln>
           <a:effectLst>
-            <a:outerShdw sx="100000" sy="100000" kx="0" ky="0" algn="bl" rotWithShape="0" blurRad="101600" dist="38100" dir="8100000">
+            <a:outerShdw blurRad="101600" dist="38100" dir="8100000" algn="bl" rotWithShape="0">
               <a:srgbClr val="000000">
                 <a:alpha val="10000"/>
               </a:srgbClr>
@@ -2682,7 +3780,7 @@
           <a:bodyPr wrap="square" lIns="0" tIns="0" rIns="0" bIns="0" rtlCol="0" anchor="ctr"/>
           <a:lstStyle/>
           <a:p>
-            <a:pPr algn="ctr" indent="0" marL="0">
+            <a:pPr marL="0" indent="0" algn="ctr">
               <a:buNone/>
             </a:pPr>
             <a:r>
@@ -2718,7 +3816,7 @@
           <a:bodyPr wrap="square" lIns="0" tIns="0" rIns="0" bIns="0" rtlCol="0" anchor="ctr"/>
           <a:lstStyle/>
           <a:p>
-            <a:pPr indent="0" marL="0">
+            <a:pPr marL="0" indent="0">
               <a:buNone/>
             </a:pPr>
             <a:r>
@@ -2754,7 +3852,7 @@
           <a:bodyPr wrap="square" lIns="0" tIns="0" rIns="0" bIns="0" rtlCol="0" anchor="ctr"/>
           <a:lstStyle/>
           <a:p>
-            <a:pPr indent="0" marL="0">
+            <a:pPr marL="0" indent="0">
               <a:buNone/>
             </a:pPr>
             <a:r>
@@ -2793,7 +3891,7 @@
             <a:prstDash val="solid"/>
           </a:ln>
           <a:effectLst>
-            <a:outerShdw sx="100000" sy="100000" kx="0" ky="0" algn="bl" rotWithShape="0" blurRad="101600" dist="38100" dir="8100000">
+            <a:outerShdw blurRad="101600" dist="38100" dir="8100000" algn="bl" rotWithShape="0">
               <a:srgbClr val="000000">
                 <a:alpha val="10000"/>
               </a:srgbClr>
@@ -2897,7 +3995,7 @@
           <a:bodyPr wrap="square" lIns="0" tIns="0" rIns="0" bIns="0" rtlCol="0" anchor="ctr"/>
           <a:lstStyle/>
           <a:p>
-            <a:pPr algn="ctr" indent="0" marL="0">
+            <a:pPr marL="0" indent="0" algn="ctr">
               <a:buNone/>
             </a:pPr>
             <a:r>
@@ -2933,7 +4031,7 @@
           <a:bodyPr wrap="square" lIns="0" tIns="0" rIns="0" bIns="0" rtlCol="0" anchor="ctr"/>
           <a:lstStyle/>
           <a:p>
-            <a:pPr indent="0" marL="0">
+            <a:pPr marL="0" indent="0">
               <a:buNone/>
             </a:pPr>
             <a:r>
@@ -2969,7 +4067,7 @@
           <a:bodyPr wrap="square" lIns="0" tIns="0" rIns="0" bIns="0" rtlCol="0" anchor="ctr"/>
           <a:lstStyle/>
           <a:p>
-            <a:pPr indent="0" marL="0">
+            <a:pPr marL="0" indent="0">
               <a:buNone/>
             </a:pPr>
             <a:r>
@@ -3008,7 +4106,7 @@
             <a:prstDash val="solid"/>
           </a:ln>
           <a:effectLst>
-            <a:outerShdw sx="100000" sy="100000" kx="0" ky="0" algn="bl" rotWithShape="0" blurRad="101600" dist="38100" dir="8100000">
+            <a:outerShdw blurRad="101600" dist="38100" dir="8100000" algn="bl" rotWithShape="0">
               <a:srgbClr val="000000">
                 <a:alpha val="10000"/>
               </a:srgbClr>
@@ -3112,7 +4210,7 @@
           <a:bodyPr wrap="square" lIns="0" tIns="0" rIns="0" bIns="0" rtlCol="0" anchor="ctr"/>
           <a:lstStyle/>
           <a:p>
-            <a:pPr algn="ctr" indent="0" marL="0">
+            <a:pPr marL="0" indent="0" algn="ctr">
               <a:buNone/>
             </a:pPr>
             <a:r>
@@ -3148,7 +4246,7 @@
           <a:bodyPr wrap="square" lIns="0" tIns="0" rIns="0" bIns="0" rtlCol="0" anchor="ctr"/>
           <a:lstStyle/>
           <a:p>
-            <a:pPr indent="0" marL="0">
+            <a:pPr marL="0" indent="0">
               <a:buNone/>
             </a:pPr>
             <a:r>
@@ -3184,7 +4282,7 @@
           <a:bodyPr wrap="square" lIns="0" tIns="0" rIns="0" bIns="0" rtlCol="0" anchor="ctr"/>
           <a:lstStyle/>
           <a:p>
-            <a:pPr indent="0" marL="0">
+            <a:pPr marL="0" indent="0">
               <a:buNone/>
             </a:pPr>
             <a:r>
@@ -3223,7 +4321,7 @@
             <a:prstDash val="solid"/>
           </a:ln>
           <a:effectLst>
-            <a:outerShdw sx="100000" sy="100000" kx="0" ky="0" algn="bl" rotWithShape="0" blurRad="101600" dist="38100" dir="8100000">
+            <a:outerShdw blurRad="101600" dist="38100" dir="8100000" algn="bl" rotWithShape="0">
               <a:srgbClr val="000000">
                 <a:alpha val="10000"/>
               </a:srgbClr>
@@ -3327,7 +4425,7 @@
           <a:bodyPr wrap="square" lIns="0" tIns="0" rIns="0" bIns="0" rtlCol="0" anchor="ctr"/>
           <a:lstStyle/>
           <a:p>
-            <a:pPr algn="ctr" indent="0" marL="0">
+            <a:pPr marL="0" indent="0" algn="ctr">
               <a:buNone/>
             </a:pPr>
             <a:r>
@@ -3363,7 +4461,7 @@
           <a:bodyPr wrap="square" lIns="0" tIns="0" rIns="0" bIns="0" rtlCol="0" anchor="ctr"/>
           <a:lstStyle/>
           <a:p>
-            <a:pPr indent="0" marL="0">
+            <a:pPr marL="0" indent="0">
               <a:buNone/>
             </a:pPr>
             <a:r>
@@ -3399,7 +4497,7 @@
           <a:bodyPr wrap="square" lIns="0" tIns="0" rIns="0" bIns="0" rtlCol="0" anchor="ctr"/>
           <a:lstStyle/>
           <a:p>
-            <a:pPr indent="0" marL="0">
+            <a:pPr marL="0" indent="0">
               <a:buNone/>
             </a:pPr>
             <a:r>
@@ -3438,7 +4536,7 @@
             <a:prstDash val="solid"/>
           </a:ln>
           <a:effectLst>
-            <a:outerShdw sx="100000" sy="100000" kx="0" ky="0" algn="bl" rotWithShape="0" blurRad="101600" dist="38100" dir="8100000">
+            <a:outerShdw blurRad="101600" dist="38100" dir="8100000" algn="bl" rotWithShape="0">
               <a:srgbClr val="000000">
                 <a:alpha val="10000"/>
               </a:srgbClr>
@@ -3542,7 +4640,7 @@
           <a:bodyPr wrap="square" lIns="0" tIns="0" rIns="0" bIns="0" rtlCol="0" anchor="ctr"/>
           <a:lstStyle/>
           <a:p>
-            <a:pPr algn="ctr" indent="0" marL="0">
+            <a:pPr marL="0" indent="0" algn="ctr">
               <a:buNone/>
             </a:pPr>
             <a:r>
@@ -3578,7 +4676,7 @@
           <a:bodyPr wrap="square" lIns="0" tIns="0" rIns="0" bIns="0" rtlCol="0" anchor="ctr"/>
           <a:lstStyle/>
           <a:p>
-            <a:pPr indent="0" marL="0">
+            <a:pPr marL="0" indent="0">
               <a:buNone/>
             </a:pPr>
             <a:r>
@@ -3614,7 +4712,7 @@
           <a:bodyPr wrap="square" lIns="0" tIns="0" rIns="0" bIns="0" rtlCol="0" anchor="ctr"/>
           <a:lstStyle/>
           <a:p>
-            <a:pPr indent="0" marL="0">
+            <a:pPr marL="0" indent="0">
               <a:buNone/>
             </a:pPr>
             <a:r>
@@ -3653,7 +4751,7 @@
             <a:prstDash val="solid"/>
           </a:ln>
           <a:effectLst>
-            <a:outerShdw sx="100000" sy="100000" kx="0" ky="0" algn="bl" rotWithShape="0" blurRad="101600" dist="38100" dir="8100000">
+            <a:outerShdw blurRad="101600" dist="38100" dir="8100000" algn="bl" rotWithShape="0">
               <a:srgbClr val="000000">
                 <a:alpha val="10000"/>
               </a:srgbClr>
@@ -3757,7 +4855,7 @@
           <a:bodyPr wrap="square" lIns="0" tIns="0" rIns="0" bIns="0" rtlCol="0" anchor="ctr"/>
           <a:lstStyle/>
           <a:p>
-            <a:pPr algn="ctr" indent="0" marL="0">
+            <a:pPr marL="0" indent="0" algn="ctr">
               <a:buNone/>
             </a:pPr>
             <a:r>
@@ -3793,7 +4891,7 @@
           <a:bodyPr wrap="square" lIns="0" tIns="0" rIns="0" bIns="0" rtlCol="0" anchor="ctr"/>
           <a:lstStyle/>
           <a:p>
-            <a:pPr indent="0" marL="0">
+            <a:pPr marL="0" indent="0">
               <a:buNone/>
             </a:pPr>
             <a:r>
@@ -3829,7 +4927,7 @@
           <a:bodyPr wrap="square" lIns="0" tIns="0" rIns="0" bIns="0" rtlCol="0" anchor="ctr"/>
           <a:lstStyle/>
           <a:p>
-            <a:pPr indent="0" marL="0">
+            <a:pPr marL="0" indent="0">
               <a:buNone/>
             </a:pPr>
             <a:r>
@@ -3890,7 +4988,7 @@
           <a:bodyPr wrap="square" lIns="0" tIns="0" rIns="0" bIns="0" rtlCol="0" anchor="ctr"/>
           <a:lstStyle/>
           <a:p>
-            <a:pPr algn="ctr" indent="0" marL="0">
+            <a:pPr marL="0" indent="0" algn="ctr">
               <a:buNone/>
             </a:pPr>
             <a:r>
@@ -3951,7 +5049,7 @@
           <a:bodyPr wrap="square" lIns="0" tIns="0" rIns="0" bIns="0" rtlCol="0" anchor="ctr"/>
           <a:lstStyle/>
           <a:p>
-            <a:pPr algn="ctr" indent="0" marL="0">
+            <a:pPr marL="0" indent="0" algn="ctr">
               <a:buNone/>
             </a:pPr>
             <a:r>
@@ -3982,6 +5080,7 @@
         <a:solidFill>
           <a:srgbClr val="F8FAFC"/>
         </a:solidFill>
+        <a:effectLst/>
       </p:bgPr>
     </p:bg>
     <p:spTree>
@@ -4019,7 +5118,7 @@
           <a:bodyPr wrap="square" lIns="0" tIns="0" rIns="0" bIns="0" rtlCol="0" anchor="ctr"/>
           <a:lstStyle/>
           <a:p>
-            <a:pPr indent="0" marL="0">
+            <a:pPr marL="0" indent="0">
               <a:buNone/>
             </a:pPr>
             <a:r>
@@ -4058,7 +5157,7 @@
           <a:bodyPr wrap="square" lIns="0" tIns="0" rIns="0" bIns="0" rtlCol="0" anchor="ctr"/>
           <a:lstStyle/>
           <a:p>
-            <a:pPr indent="0" marL="0">
+            <a:pPr marL="0" indent="0">
               <a:buNone/>
             </a:pPr>
             <a:r>
@@ -4122,7 +5221,7 @@
             <a:prstDash val="solid"/>
           </a:ln>
           <a:effectLst>
-            <a:outerShdw sx="100000" sy="100000" kx="0" ky="0" algn="bl" rotWithShape="0" blurRad="101600" dist="38100" dir="8100000">
+            <a:outerShdw blurRad="101600" dist="38100" dir="8100000" algn="bl" rotWithShape="0">
               <a:srgbClr val="000000">
                 <a:alpha val="10000"/>
               </a:srgbClr>
@@ -4151,7 +5250,7 @@
           <a:bodyPr wrap="square" lIns="0" tIns="0" rIns="0" bIns="0" rtlCol="0" anchor="ctr"/>
           <a:lstStyle/>
           <a:p>
-            <a:pPr algn="ctr" indent="0" marL="0">
+            <a:pPr marL="0" indent="0" algn="ctr">
               <a:buNone/>
             </a:pPr>
             <a:r>
@@ -4187,7 +5286,7 @@
           <a:bodyPr wrap="square" lIns="0" tIns="0" rIns="0" bIns="0" rtlCol="0" anchor="ctr"/>
           <a:lstStyle/>
           <a:p>
-            <a:pPr algn="ctr" indent="0" marL="0">
+            <a:pPr marL="0" indent="0" algn="ctr">
               <a:buNone/>
             </a:pPr>
             <a:r>
@@ -4226,7 +5325,7 @@
             <a:prstDash val="solid"/>
           </a:ln>
           <a:effectLst>
-            <a:outerShdw sx="100000" sy="100000" kx="0" ky="0" algn="bl" rotWithShape="0" blurRad="101600" dist="38100" dir="8100000">
+            <a:outerShdw blurRad="101600" dist="38100" dir="8100000" algn="bl" rotWithShape="0">
               <a:srgbClr val="000000">
                 <a:alpha val="10000"/>
               </a:srgbClr>
@@ -4255,7 +5354,7 @@
           <a:bodyPr wrap="square" lIns="0" tIns="0" rIns="0" bIns="0" rtlCol="0" anchor="ctr"/>
           <a:lstStyle/>
           <a:p>
-            <a:pPr algn="ctr" indent="0" marL="0">
+            <a:pPr marL="0" indent="0" algn="ctr">
               <a:buNone/>
             </a:pPr>
             <a:r>
@@ -4291,7 +5390,7 @@
           <a:bodyPr wrap="square" lIns="0" tIns="0" rIns="0" bIns="0" rtlCol="0" anchor="ctr"/>
           <a:lstStyle/>
           <a:p>
-            <a:pPr algn="ctr" indent="0" marL="0">
+            <a:pPr marL="0" indent="0" algn="ctr">
               <a:buNone/>
             </a:pPr>
             <a:r>
@@ -4330,7 +5429,7 @@
             <a:prstDash val="solid"/>
           </a:ln>
           <a:effectLst>
-            <a:outerShdw sx="100000" sy="100000" kx="0" ky="0" algn="bl" rotWithShape="0" blurRad="101600" dist="38100" dir="8100000">
+            <a:outerShdw blurRad="101600" dist="38100" dir="8100000" algn="bl" rotWithShape="0">
               <a:srgbClr val="000000">
                 <a:alpha val="10000"/>
               </a:srgbClr>
@@ -4359,7 +5458,7 @@
           <a:bodyPr wrap="square" lIns="0" tIns="0" rIns="0" bIns="0" rtlCol="0" anchor="ctr"/>
           <a:lstStyle/>
           <a:p>
-            <a:pPr algn="ctr" indent="0" marL="0">
+            <a:pPr marL="0" indent="0" algn="ctr">
               <a:buNone/>
             </a:pPr>
             <a:r>
@@ -4395,7 +5494,7 @@
           <a:bodyPr wrap="square" lIns="0" tIns="0" rIns="0" bIns="0" rtlCol="0" anchor="ctr"/>
           <a:lstStyle/>
           <a:p>
-            <a:pPr algn="ctr" indent="0" marL="0">
+            <a:pPr marL="0" indent="0" algn="ctr">
               <a:buNone/>
             </a:pPr>
             <a:r>
@@ -4431,7 +5530,7 @@
           <a:bodyPr wrap="square" lIns="0" tIns="0" rIns="0" bIns="0" rtlCol="0" anchor="ctr"/>
           <a:lstStyle/>
           <a:p>
-            <a:pPr algn="ctr" indent="0" marL="0">
+            <a:pPr marL="0" indent="0" algn="ctr">
               <a:buNone/>
             </a:pPr>
             <a:r>
@@ -4467,7 +5566,7 @@
           <a:bodyPr wrap="square" lIns="0" tIns="0" rIns="0" bIns="0" rtlCol="0" anchor="ctr"/>
           <a:lstStyle/>
           <a:p>
-            <a:pPr algn="ctr" indent="0" marL="0">
+            <a:pPr marL="0" indent="0" algn="ctr">
               <a:buNone/>
             </a:pPr>
             <a:r>
@@ -4506,7 +5605,7 @@
             <a:prstDash val="solid"/>
           </a:ln>
           <a:effectLst>
-            <a:outerShdw sx="100000" sy="100000" kx="0" ky="0" algn="bl" rotWithShape="0" blurRad="101600" dist="38100" dir="8100000">
+            <a:outerShdw blurRad="101600" dist="38100" dir="8100000" algn="bl" rotWithShape="0">
               <a:srgbClr val="000000">
                 <a:alpha val="10000"/>
               </a:srgbClr>
@@ -4535,7 +5634,7 @@
           <a:bodyPr wrap="square" lIns="0" tIns="0" rIns="0" bIns="0" rtlCol="0" anchor="ctr"/>
           <a:lstStyle/>
           <a:p>
-            <a:pPr indent="0" marL="0">
+            <a:pPr marL="0" indent="0">
               <a:buNone/>
             </a:pPr>
             <a:r>
@@ -4571,7 +5670,7 @@
           <a:bodyPr wrap="square" lIns="0" tIns="0" rIns="0" bIns="0" rtlCol="0" anchor="ctr"/>
           <a:lstStyle/>
           <a:p>
-            <a:pPr indent="0" marL="0">
+            <a:pPr marL="0" indent="0">
               <a:buNone/>
             </a:pPr>
             <a:r>
@@ -4610,7 +5709,7 @@
             <a:prstDash val="solid"/>
           </a:ln>
           <a:effectLst>
-            <a:outerShdw sx="100000" sy="100000" kx="0" ky="0" algn="bl" rotWithShape="0" blurRad="101600" dist="38100" dir="8100000">
+            <a:outerShdw blurRad="101600" dist="38100" dir="8100000" algn="bl" rotWithShape="0">
               <a:srgbClr val="000000">
                 <a:alpha val="10000"/>
               </a:srgbClr>
@@ -4639,7 +5738,7 @@
           <a:bodyPr wrap="square" lIns="0" tIns="0" rIns="0" bIns="0" rtlCol="0" anchor="ctr"/>
           <a:lstStyle/>
           <a:p>
-            <a:pPr indent="0" marL="0">
+            <a:pPr marL="0" indent="0">
               <a:buNone/>
             </a:pPr>
             <a:r>
@@ -4675,7 +5774,7 @@
           <a:bodyPr wrap="square" lIns="0" tIns="0" rIns="0" bIns="0" rtlCol="0" anchor="ctr"/>
           <a:lstStyle/>
           <a:p>
-            <a:pPr indent="0" marL="0">
+            <a:pPr marL="0" indent="0">
               <a:buNone/>
             </a:pPr>
             <a:r>
@@ -4714,7 +5813,7 @@
             <a:prstDash val="solid"/>
           </a:ln>
           <a:effectLst>
-            <a:outerShdw sx="100000" sy="100000" kx="0" ky="0" algn="bl" rotWithShape="0" blurRad="101600" dist="38100" dir="8100000">
+            <a:outerShdw blurRad="101600" dist="38100" dir="8100000" algn="bl" rotWithShape="0">
               <a:srgbClr val="000000">
                 <a:alpha val="10000"/>
               </a:srgbClr>
@@ -4743,7 +5842,7 @@
           <a:bodyPr wrap="square" lIns="0" tIns="0" rIns="0" bIns="0" rtlCol="0" anchor="ctr"/>
           <a:lstStyle/>
           <a:p>
-            <a:pPr indent="0" marL="0">
+            <a:pPr marL="0" indent="0">
               <a:buNone/>
             </a:pPr>
             <a:r>
@@ -4779,7 +5878,7 @@
           <a:bodyPr wrap="square" lIns="0" tIns="0" rIns="0" bIns="0" rtlCol="0" anchor="ctr"/>
           <a:lstStyle/>
           <a:p>
-            <a:pPr indent="0" marL="0">
+            <a:pPr marL="0" indent="0">
               <a:buNone/>
             </a:pPr>
             <a:r>
@@ -4818,7 +5917,7 @@
             <a:prstDash val="solid"/>
           </a:ln>
           <a:effectLst>
-            <a:outerShdw sx="100000" sy="100000" kx="0" ky="0" algn="bl" rotWithShape="0" blurRad="101600" dist="38100" dir="8100000">
+            <a:outerShdw blurRad="101600" dist="38100" dir="8100000" algn="bl" rotWithShape="0">
               <a:srgbClr val="000000">
                 <a:alpha val="10000"/>
               </a:srgbClr>
@@ -4847,7 +5946,7 @@
           <a:bodyPr wrap="square" lIns="0" tIns="0" rIns="0" bIns="0" rtlCol="0" anchor="ctr"/>
           <a:lstStyle/>
           <a:p>
-            <a:pPr indent="0" marL="0">
+            <a:pPr marL="0" indent="0">
               <a:buNone/>
             </a:pPr>
             <a:r>
@@ -4883,7 +5982,7 @@
           <a:bodyPr wrap="square" lIns="0" tIns="0" rIns="0" bIns="0" rtlCol="0" anchor="ctr"/>
           <a:lstStyle/>
           <a:p>
-            <a:pPr indent="0" marL="0">
+            <a:pPr marL="0" indent="0">
               <a:buNone/>
             </a:pPr>
             <a:r>
@@ -4922,7 +6021,7 @@
             <a:prstDash val="solid"/>
           </a:ln>
           <a:effectLst>
-            <a:outerShdw sx="100000" sy="100000" kx="0" ky="0" algn="bl" rotWithShape="0" blurRad="101600" dist="38100" dir="8100000">
+            <a:outerShdw blurRad="101600" dist="38100" dir="8100000" algn="bl" rotWithShape="0">
               <a:srgbClr val="000000">
                 <a:alpha val="10000"/>
               </a:srgbClr>
@@ -4951,7 +6050,7 @@
           <a:bodyPr wrap="square" lIns="0" tIns="0" rIns="0" bIns="0" rtlCol="0" anchor="ctr"/>
           <a:lstStyle/>
           <a:p>
-            <a:pPr indent="0" marL="0">
+            <a:pPr marL="0" indent="0">
               <a:buNone/>
             </a:pPr>
             <a:r>
@@ -4987,7 +6086,7 @@
           <a:bodyPr wrap="square" lIns="0" tIns="0" rIns="0" bIns="0" rtlCol="0" anchor="ctr"/>
           <a:lstStyle/>
           <a:p>
-            <a:pPr indent="0" marL="0">
+            <a:pPr marL="0" indent="0">
               <a:buNone/>
             </a:pPr>
             <a:r>
@@ -5026,7 +6125,7 @@
             <a:prstDash val="solid"/>
           </a:ln>
           <a:effectLst>
-            <a:outerShdw sx="100000" sy="100000" kx="0" ky="0" algn="bl" rotWithShape="0" blurRad="101600" dist="38100" dir="8100000">
+            <a:outerShdw blurRad="101600" dist="38100" dir="8100000" algn="bl" rotWithShape="0">
               <a:srgbClr val="000000">
                 <a:alpha val="10000"/>
               </a:srgbClr>
@@ -5055,7 +6154,7 @@
           <a:bodyPr wrap="square" lIns="0" tIns="0" rIns="0" bIns="0" rtlCol="0" anchor="ctr"/>
           <a:lstStyle/>
           <a:p>
-            <a:pPr indent="0" marL="0">
+            <a:pPr marL="0" indent="0">
               <a:buNone/>
             </a:pPr>
             <a:r>
@@ -5091,7 +6190,7 @@
           <a:bodyPr wrap="square" lIns="0" tIns="0" rIns="0" bIns="0" rtlCol="0" anchor="ctr"/>
           <a:lstStyle/>
           <a:p>
-            <a:pPr indent="0" marL="0">
+            <a:pPr marL="0" indent="0">
               <a:buNone/>
             </a:pPr>
             <a:r>
@@ -5152,7 +6251,7 @@
           <a:bodyPr wrap="square" lIns="0" tIns="0" rIns="0" bIns="0" rtlCol="0" anchor="ctr"/>
           <a:lstStyle/>
           <a:p>
-            <a:pPr algn="ctr" indent="0" marL="0">
+            <a:pPr marL="0" indent="0" algn="ctr">
               <a:buNone/>
             </a:pPr>
             <a:r>
@@ -5183,6 +6282,7 @@
         <a:solidFill>
           <a:srgbClr val="F8FAFC"/>
         </a:solidFill>
+        <a:effectLst/>
       </p:bgPr>
     </p:bg>
     <p:spTree>
@@ -5220,7 +6320,7 @@
           <a:bodyPr wrap="square" lIns="0" tIns="0" rIns="0" bIns="0" rtlCol="0" anchor="ctr"/>
           <a:lstStyle/>
           <a:p>
-            <a:pPr indent="0" marL="0">
+            <a:pPr marL="0" indent="0">
               <a:buNone/>
             </a:pPr>
             <a:r>
@@ -5259,7 +6359,7 @@
           <a:bodyPr wrap="square" lIns="0" tIns="0" rIns="0" bIns="0" rtlCol="0" anchor="ctr"/>
           <a:lstStyle/>
           <a:p>
-            <a:pPr indent="0" marL="0">
+            <a:pPr marL="0" indent="0">
               <a:buNone/>
             </a:pPr>
             <a:r>
@@ -5323,7 +6423,7 @@
             <a:prstDash val="solid"/>
           </a:ln>
           <a:effectLst>
-            <a:outerShdw sx="100000" sy="100000" kx="0" ky="0" algn="bl" rotWithShape="0" blurRad="101600" dist="38100" dir="8100000">
+            <a:outerShdw blurRad="101600" dist="38100" dir="8100000" algn="bl" rotWithShape="0">
               <a:srgbClr val="000000">
                 <a:alpha val="10000"/>
               </a:srgbClr>
@@ -5352,7 +6452,7 @@
           <a:bodyPr wrap="square" lIns="0" tIns="0" rIns="0" bIns="0" rtlCol="0" anchor="ctr"/>
           <a:lstStyle/>
           <a:p>
-            <a:pPr indent="0" marL="0">
+            <a:pPr marL="0" indent="0">
               <a:buNone/>
             </a:pPr>
             <a:r>
@@ -5388,7 +6488,7 @@
           <a:bodyPr wrap="square" lIns="0" tIns="0" rIns="0" bIns="0" rtlCol="0" anchor="ctr"/>
           <a:lstStyle/>
           <a:p>
-            <a:pPr indent="0" marL="0">
+            <a:pPr marL="0" indent="0">
               <a:buNone/>
             </a:pPr>
             <a:r>
@@ -5453,7 +6553,7 @@
           <a:bodyPr wrap="square" lIns="0" tIns="0" rIns="0" bIns="0" rtlCol="0" anchor="ctr"/>
           <a:lstStyle/>
           <a:p>
-            <a:pPr indent="0" marL="0">
+            <a:pPr marL="0" indent="0">
               <a:buNone/>
             </a:pPr>
             <a:r>
@@ -5489,7 +6589,7 @@
           <a:bodyPr wrap="square" lIns="0" tIns="0" rIns="0" bIns="0" rtlCol="0" anchor="ctr"/>
           <a:lstStyle/>
           <a:p>
-            <a:pPr algn="ctr" indent="0" marL="0">
+            <a:pPr marL="0" indent="0" algn="ctr">
               <a:buNone/>
             </a:pPr>
             <a:r>
@@ -5528,7 +6628,7 @@
             <a:prstDash val="solid"/>
           </a:ln>
           <a:effectLst>
-            <a:outerShdw sx="100000" sy="100000" kx="0" ky="0" algn="bl" rotWithShape="0" blurRad="101600" dist="38100" dir="8100000">
+            <a:outerShdw blurRad="101600" dist="38100" dir="8100000" algn="bl" rotWithShape="0">
               <a:srgbClr val="000000">
                 <a:alpha val="10000"/>
               </a:srgbClr>
@@ -5557,7 +6657,7 @@
           <a:bodyPr wrap="square" lIns="0" tIns="0" rIns="0" bIns="0" rtlCol="0" anchor="ctr"/>
           <a:lstStyle/>
           <a:p>
-            <a:pPr indent="0" marL="0">
+            <a:pPr marL="0" indent="0">
               <a:buNone/>
             </a:pPr>
             <a:r>
@@ -5593,7 +6693,7 @@
           <a:bodyPr wrap="square" lIns="0" tIns="0" rIns="0" bIns="0" rtlCol="0" anchor="ctr"/>
           <a:lstStyle/>
           <a:p>
-            <a:pPr indent="0" marL="0">
+            <a:pPr marL="0" indent="0">
               <a:buNone/>
             </a:pPr>
             <a:r>
@@ -5658,7 +6758,7 @@
           <a:bodyPr wrap="square" lIns="0" tIns="0" rIns="0" bIns="0" rtlCol="0" anchor="ctr"/>
           <a:lstStyle/>
           <a:p>
-            <a:pPr indent="0" marL="0">
+            <a:pPr marL="0" indent="0">
               <a:buNone/>
             </a:pPr>
             <a:r>
@@ -5694,7 +6794,7 @@
           <a:bodyPr wrap="square" lIns="0" tIns="0" rIns="0" bIns="0" rtlCol="0" anchor="ctr"/>
           <a:lstStyle/>
           <a:p>
-            <a:pPr algn="ctr" indent="0" marL="0">
+            <a:pPr marL="0" indent="0" algn="ctr">
               <a:buNone/>
             </a:pPr>
             <a:r>
@@ -5733,7 +6833,7 @@
             <a:prstDash val="solid"/>
           </a:ln>
           <a:effectLst>
-            <a:outerShdw sx="100000" sy="100000" kx="0" ky="0" algn="bl" rotWithShape="0" blurRad="101600" dist="38100" dir="8100000">
+            <a:outerShdw blurRad="101600" dist="38100" dir="8100000" algn="bl" rotWithShape="0">
               <a:srgbClr val="000000">
                 <a:alpha val="10000"/>
               </a:srgbClr>
@@ -5762,7 +6862,7 @@
           <a:bodyPr wrap="square" lIns="0" tIns="0" rIns="0" bIns="0" rtlCol="0" anchor="ctr"/>
           <a:lstStyle/>
           <a:p>
-            <a:pPr indent="0" marL="0">
+            <a:pPr marL="0" indent="0">
               <a:buNone/>
             </a:pPr>
             <a:r>
@@ -5798,7 +6898,7 @@
           <a:bodyPr wrap="square" lIns="0" tIns="0" rIns="0" bIns="0" rtlCol="0" anchor="ctr"/>
           <a:lstStyle/>
           <a:p>
-            <a:pPr indent="0" marL="0">
+            <a:pPr marL="0" indent="0">
               <a:buNone/>
             </a:pPr>
             <a:r>
@@ -5863,7 +6963,7 @@
           <a:bodyPr wrap="square" lIns="0" tIns="0" rIns="0" bIns="0" rtlCol="0" anchor="ctr"/>
           <a:lstStyle/>
           <a:p>
-            <a:pPr indent="0" marL="0">
+            <a:pPr marL="0" indent="0">
               <a:buNone/>
             </a:pPr>
             <a:r>
@@ -5899,7 +6999,7 @@
           <a:bodyPr wrap="square" lIns="0" tIns="0" rIns="0" bIns="0" rtlCol="0" anchor="ctr"/>
           <a:lstStyle/>
           <a:p>
-            <a:pPr algn="ctr" indent="0" marL="0">
+            <a:pPr marL="0" indent="0" algn="ctr">
               <a:buNone/>
             </a:pPr>
             <a:r>
@@ -5938,7 +7038,7 @@
             <a:prstDash val="solid"/>
           </a:ln>
           <a:effectLst>
-            <a:outerShdw sx="100000" sy="100000" kx="0" ky="0" algn="bl" rotWithShape="0" blurRad="101600" dist="38100" dir="8100000">
+            <a:outerShdw blurRad="101600" dist="38100" dir="8100000" algn="bl" rotWithShape="0">
               <a:srgbClr val="000000">
                 <a:alpha val="10000"/>
               </a:srgbClr>
@@ -5967,7 +7067,7 @@
           <a:bodyPr wrap="square" lIns="0" tIns="0" rIns="0" bIns="0" rtlCol="0" anchor="ctr"/>
           <a:lstStyle/>
           <a:p>
-            <a:pPr indent="0" marL="0">
+            <a:pPr marL="0" indent="0">
               <a:buNone/>
             </a:pPr>
             <a:r>
@@ -6003,7 +7103,7 @@
           <a:bodyPr wrap="square" lIns="0" tIns="0" rIns="0" bIns="0" rtlCol="0" anchor="ctr"/>
           <a:lstStyle/>
           <a:p>
-            <a:pPr indent="0" marL="0">
+            <a:pPr marL="0" indent="0">
               <a:buNone/>
             </a:pPr>
             <a:r>
@@ -6068,7 +7168,7 @@
           <a:bodyPr wrap="square" lIns="0" tIns="0" rIns="0" bIns="0" rtlCol="0" anchor="ctr"/>
           <a:lstStyle/>
           <a:p>
-            <a:pPr indent="0" marL="0">
+            <a:pPr marL="0" indent="0">
               <a:buNone/>
             </a:pPr>
             <a:r>
@@ -6129,7 +7229,7 @@
           <a:bodyPr wrap="square" lIns="0" tIns="0" rIns="0" bIns="0" rtlCol="0" anchor="ctr"/>
           <a:lstStyle/>
           <a:p>
-            <a:pPr algn="ctr" indent="0" marL="0">
+            <a:pPr marL="0" indent="0" algn="ctr">
               <a:buNone/>
             </a:pPr>
             <a:r>
@@ -6160,6 +7260,7 @@
         <a:solidFill>
           <a:srgbClr val="F8FAFC"/>
         </a:solidFill>
+        <a:effectLst/>
       </p:bgPr>
     </p:bg>
     <p:spTree>
@@ -6197,7 +7298,7 @@
           <a:bodyPr wrap="square" lIns="0" tIns="0" rIns="0" bIns="0" rtlCol="0" anchor="ctr"/>
           <a:lstStyle/>
           <a:p>
-            <a:pPr indent="0" marL="0">
+            <a:pPr marL="0" indent="0">
               <a:buNone/>
             </a:pPr>
             <a:r>
@@ -6236,7 +7337,7 @@
           <a:bodyPr wrap="square" lIns="0" tIns="0" rIns="0" bIns="0" rtlCol="0" anchor="ctr"/>
           <a:lstStyle/>
           <a:p>
-            <a:pPr indent="0" marL="0">
+            <a:pPr marL="0" indent="0">
               <a:buNone/>
             </a:pPr>
             <a:r>
@@ -6322,7 +7423,7 @@
           <a:bodyPr wrap="square" lIns="0" tIns="0" rIns="0" bIns="0" rtlCol="0" anchor="ctr"/>
           <a:lstStyle/>
           <a:p>
-            <a:pPr indent="0" marL="0">
+            <a:pPr marL="0" indent="0">
               <a:buNone/>
             </a:pPr>
             <a:r>
@@ -6358,7 +7459,7 @@
           <a:bodyPr wrap="square" lIns="0" tIns="0" rIns="0" bIns="0" rtlCol="0" anchor="ctr"/>
           <a:lstStyle/>
           <a:p>
-            <a:pPr indent="0" marL="0">
+            <a:pPr marL="0" indent="0">
               <a:buNone/>
             </a:pPr>
             <a:r>
@@ -6394,7 +7495,7 @@
           <a:bodyPr wrap="square" lIns="0" tIns="0" rIns="0" bIns="0" rtlCol="0" anchor="ctr"/>
           <a:lstStyle/>
           <a:p>
-            <a:pPr indent="0" marL="0">
+            <a:pPr marL="0" indent="0">
               <a:buNone/>
             </a:pPr>
             <a:r>
@@ -6455,7 +7556,7 @@
           <a:bodyPr wrap="square" lIns="0" tIns="0" rIns="0" bIns="0" rtlCol="0" anchor="ctr"/>
           <a:lstStyle/>
           <a:p>
-            <a:pPr indent="0" marL="0">
+            <a:pPr marL="0" indent="0">
               <a:buNone/>
             </a:pPr>
             <a:r>
@@ -6491,7 +7592,7 @@
           <a:bodyPr wrap="square" lIns="0" tIns="0" rIns="0" bIns="0" rtlCol="0" anchor="ctr"/>
           <a:lstStyle/>
           <a:p>
-            <a:pPr indent="0" marL="0">
+            <a:pPr marL="0" indent="0">
               <a:buNone/>
             </a:pPr>
             <a:r>
@@ -6527,7 +7628,7 @@
           <a:bodyPr wrap="square" lIns="0" tIns="0" rIns="0" bIns="0" rtlCol="0" anchor="ctr"/>
           <a:lstStyle/>
           <a:p>
-            <a:pPr indent="0" marL="0">
+            <a:pPr marL="0" indent="0">
               <a:buNone/>
             </a:pPr>
             <a:r>
@@ -6588,7 +7689,7 @@
           <a:bodyPr wrap="square" lIns="0" tIns="0" rIns="0" bIns="0" rtlCol="0" anchor="ctr"/>
           <a:lstStyle/>
           <a:p>
-            <a:pPr indent="0" marL="0">
+            <a:pPr marL="0" indent="0">
               <a:buNone/>
             </a:pPr>
             <a:r>
@@ -6624,7 +7725,7 @@
           <a:bodyPr wrap="square" lIns="0" tIns="0" rIns="0" bIns="0" rtlCol="0" anchor="ctr"/>
           <a:lstStyle/>
           <a:p>
-            <a:pPr indent="0" marL="0">
+            <a:pPr marL="0" indent="0">
               <a:buNone/>
             </a:pPr>
             <a:r>
@@ -6660,7 +7761,7 @@
           <a:bodyPr wrap="square" lIns="0" tIns="0" rIns="0" bIns="0" rtlCol="0" anchor="ctr"/>
           <a:lstStyle/>
           <a:p>
-            <a:pPr indent="0" marL="0">
+            <a:pPr marL="0" indent="0">
               <a:buNone/>
             </a:pPr>
             <a:r>
@@ -6721,7 +7822,7 @@
           <a:bodyPr wrap="square" lIns="0" tIns="0" rIns="0" bIns="0" rtlCol="0" anchor="ctr"/>
           <a:lstStyle/>
           <a:p>
-            <a:pPr indent="0" marL="0">
+            <a:pPr marL="0" indent="0">
               <a:buNone/>
             </a:pPr>
             <a:r>
@@ -6757,7 +7858,7 @@
           <a:bodyPr wrap="square" lIns="0" tIns="0" rIns="0" bIns="0" rtlCol="0" anchor="ctr"/>
           <a:lstStyle/>
           <a:p>
-            <a:pPr indent="0" marL="0">
+            <a:pPr marL="0" indent="0">
               <a:buNone/>
             </a:pPr>
             <a:r>
@@ -6793,7 +7894,7 @@
           <a:bodyPr wrap="square" lIns="0" tIns="0" rIns="0" bIns="0" rtlCol="0" anchor="ctr"/>
           <a:lstStyle/>
           <a:p>
-            <a:pPr indent="0" marL="0">
+            <a:pPr marL="0" indent="0">
               <a:buNone/>
             </a:pPr>
             <a:r>
@@ -6854,7 +7955,7 @@
           <a:bodyPr wrap="square" lIns="0" tIns="0" rIns="0" bIns="0" rtlCol="0" anchor="ctr"/>
           <a:lstStyle/>
           <a:p>
-            <a:pPr indent="0" marL="0">
+            <a:pPr marL="0" indent="0">
               <a:buNone/>
             </a:pPr>
             <a:r>
@@ -6890,7 +7991,7 @@
           <a:bodyPr wrap="square" lIns="0" tIns="0" rIns="0" bIns="0" rtlCol="0" anchor="ctr"/>
           <a:lstStyle/>
           <a:p>
-            <a:pPr indent="0" marL="0">
+            <a:pPr marL="0" indent="0">
               <a:buNone/>
             </a:pPr>
             <a:r>
@@ -6926,7 +8027,7 @@
           <a:bodyPr wrap="square" lIns="0" tIns="0" rIns="0" bIns="0" rtlCol="0" anchor="ctr"/>
           <a:lstStyle/>
           <a:p>
-            <a:pPr indent="0" marL="0">
+            <a:pPr marL="0" indent="0">
               <a:buNone/>
             </a:pPr>
             <a:r>
@@ -6987,7 +8088,7 @@
           <a:bodyPr wrap="square" lIns="0" tIns="0" rIns="0" bIns="0" rtlCol="0" anchor="ctr"/>
           <a:lstStyle/>
           <a:p>
-            <a:pPr indent="0" marL="0">
+            <a:pPr marL="0" indent="0">
               <a:buNone/>
             </a:pPr>
             <a:r>
@@ -7023,7 +8124,7 @@
           <a:bodyPr wrap="square" lIns="0" tIns="0" rIns="0" bIns="0" rtlCol="0" anchor="ctr"/>
           <a:lstStyle/>
           <a:p>
-            <a:pPr indent="0" marL="0">
+            <a:pPr marL="0" indent="0">
               <a:buNone/>
             </a:pPr>
             <a:r>
@@ -7059,7 +8160,7 @@
           <a:bodyPr wrap="square" lIns="0" tIns="0" rIns="0" bIns="0" rtlCol="0" anchor="ctr"/>
           <a:lstStyle/>
           <a:p>
-            <a:pPr indent="0" marL="0">
+            <a:pPr marL="0" indent="0">
               <a:buNone/>
             </a:pPr>
             <a:r>
@@ -7120,7 +8221,7 @@
           <a:bodyPr wrap="square" lIns="0" tIns="0" rIns="0" bIns="0" rtlCol="0" anchor="ctr"/>
           <a:lstStyle/>
           <a:p>
-            <a:pPr indent="0" marL="0">
+            <a:pPr marL="0" indent="0">
               <a:buNone/>
             </a:pPr>
             <a:r>
@@ -7156,7 +8257,7 @@
           <a:bodyPr wrap="square" lIns="0" tIns="0" rIns="0" bIns="0" rtlCol="0" anchor="ctr"/>
           <a:lstStyle/>
           <a:p>
-            <a:pPr indent="0" marL="0">
+            <a:pPr marL="0" indent="0">
               <a:buNone/>
             </a:pPr>
             <a:r>
@@ -7192,7 +8293,7 @@
           <a:bodyPr wrap="square" lIns="0" tIns="0" rIns="0" bIns="0" rtlCol="0" anchor="ctr"/>
           <a:lstStyle/>
           <a:p>
-            <a:pPr indent="0" marL="0">
+            <a:pPr marL="0" indent="0">
               <a:buNone/>
             </a:pPr>
             <a:r>
@@ -7253,7 +8354,7 @@
           <a:bodyPr wrap="square" lIns="0" tIns="0" rIns="0" bIns="0" rtlCol="0" anchor="ctr"/>
           <a:lstStyle/>
           <a:p>
-            <a:pPr indent="0" marL="0">
+            <a:pPr marL="0" indent="0">
               <a:buNone/>
             </a:pPr>
             <a:r>
@@ -7289,7 +8390,7 @@
           <a:bodyPr wrap="square" lIns="0" tIns="0" rIns="0" bIns="0" rtlCol="0" anchor="ctr"/>
           <a:lstStyle/>
           <a:p>
-            <a:pPr indent="0" marL="0">
+            <a:pPr marL="0" indent="0">
               <a:buNone/>
             </a:pPr>
             <a:r>
@@ -7325,7 +8426,7 @@
           <a:bodyPr wrap="square" lIns="0" tIns="0" rIns="0" bIns="0" rtlCol="0" anchor="ctr"/>
           <a:lstStyle/>
           <a:p>
-            <a:pPr indent="0" marL="0">
+            <a:pPr marL="0" indent="0">
               <a:buNone/>
             </a:pPr>
             <a:r>
@@ -7386,7 +8487,7 @@
           <a:bodyPr wrap="square" lIns="0" tIns="0" rIns="0" bIns="0" rtlCol="0" anchor="ctr"/>
           <a:lstStyle/>
           <a:p>
-            <a:pPr algn="ctr" indent="0" marL="0">
+            <a:pPr marL="0" indent="0" algn="ctr">
               <a:buNone/>
             </a:pPr>
             <a:r>
@@ -7402,6 +8503,588 @@
         </p:txBody>
       </p:sp>
     </p:spTree>
+  </p:cSld>
+  <p:clrMapOvr>
+    <a:masterClrMapping/>
+  </p:clrMapOvr>
+</p:sld>
+</file>
+
+<file path=ppt/slides/slide7.xml><?xml version="1.0" encoding="utf-8"?>
+<p:sld xmlns:a="http://schemas.openxmlformats.org/drawingml/2006/main" xmlns:r="http://schemas.openxmlformats.org/officeDocument/2006/relationships" xmlns:p="http://schemas.openxmlformats.org/presentationml/2006/main">
+  <p:cSld>
+    <p:spTree>
+      <p:nvGrpSpPr>
+        <p:cNvPr id="1" name=""/>
+        <p:cNvGrpSpPr/>
+        <p:nvPr/>
+      </p:nvGrpSpPr>
+      <p:grpSpPr>
+        <a:xfrm>
+          <a:off x="0" y="0"/>
+          <a:ext cx="0" cy="0"/>
+          <a:chOff x="0" y="0"/>
+          <a:chExt cx="0" cy="0"/>
+        </a:xfrm>
+      </p:grpSpPr>
+      <p:sp>
+        <p:nvSpPr>
+          <p:cNvPr id="2" name="Text 0"/>
+          <p:cNvSpPr/>
+          <p:nvPr/>
+        </p:nvSpPr>
+        <p:spPr>
+          <a:xfrm>
+            <a:off x="457200" y="274320"/>
+            <a:ext cx="8229600" cy="548640"/>
+          </a:xfrm>
+          <a:prstGeom prst="rect">
+            <a:avLst/>
+          </a:prstGeom>
+          <a:noFill/>
+          <a:ln/>
+        </p:spPr>
+        <p:txBody>
+          <a:bodyPr wrap="square" lIns="0" tIns="0" rIns="0" bIns="0" rtlCol="0" anchor="ctr"/>
+          <a:lstStyle/>
+          <a:p>
+            <a:pPr marL="0" indent="0">
+              <a:buNone/>
+            </a:pPr>
+            <a:r>
+              <a:rPr lang="en-US" sz="2800" b="1" dirty="0" smtClean="0">
+                <a:solidFill>
+                  <a:srgbClr val="1E2761"/>
+                </a:solidFill>
+                <a:latin typeface="Calibri" pitchFamily="34" charset="0"/>
+                <a:ea typeface="Calibri" pitchFamily="34" charset="-122"/>
+                <a:cs typeface="Calibri" pitchFamily="34" charset="-120"/>
+              </a:rPr>
+              <a:t>Execution Screenshots</a:t>
+            </a:r>
+            <a:endParaRPr lang="en-US" sz="2800" dirty="0"/>
+          </a:p>
+        </p:txBody>
+      </p:sp>
+      <p:sp>
+        <p:nvSpPr>
+          <p:cNvPr id="37" name="Shape 35"/>
+          <p:cNvSpPr/>
+          <p:nvPr/>
+        </p:nvSpPr>
+        <p:spPr>
+          <a:xfrm>
+            <a:off x="0" y="4892040"/>
+            <a:ext cx="9144000" cy="251460"/>
+          </a:xfrm>
+          <a:prstGeom prst="rect">
+            <a:avLst/>
+          </a:prstGeom>
+          <a:solidFill>
+            <a:srgbClr val="1E2761"/>
+          </a:solidFill>
+          <a:ln w="12700">
+            <a:solidFill>
+              <a:srgbClr val="1E2761"/>
+            </a:solidFill>
+            <a:prstDash val="solid"/>
+          </a:ln>
+        </p:spPr>
+      </p:sp>
+      <p:sp>
+        <p:nvSpPr>
+          <p:cNvPr id="38" name="Text 36"/>
+          <p:cNvSpPr/>
+          <p:nvPr/>
+        </p:nvSpPr>
+        <p:spPr>
+          <a:xfrm>
+            <a:off x="457200" y="4892040"/>
+            <a:ext cx="8229600" cy="251460"/>
+          </a:xfrm>
+          <a:prstGeom prst="rect">
+            <a:avLst/>
+          </a:prstGeom>
+          <a:noFill/>
+          <a:ln/>
+        </p:spPr>
+        <p:txBody>
+          <a:bodyPr wrap="square" lIns="0" tIns="0" rIns="0" bIns="0" rtlCol="0" anchor="ctr"/>
+          <a:lstStyle/>
+          <a:p>
+            <a:pPr marL="0" indent="0" algn="ctr">
+              <a:buNone/>
+            </a:pPr>
+            <a:r>
+              <a:rPr lang="en-US" sz="1000" dirty="0">
+                <a:solidFill>
+                  <a:srgbClr val="FFFFFF"/>
+                </a:solidFill>
+              </a:rPr>
+              <a:t>Jira → GitLab Sync Service  |  POC</a:t>
+            </a:r>
+            <a:endParaRPr lang="en-US" sz="1000" dirty="0"/>
+          </a:p>
+        </p:txBody>
+      </p:sp>
+      <p:pic>
+        <p:nvPicPr>
+          <p:cNvPr id="1027" name="Picture 3"/>
+          <p:cNvPicPr>
+            <a:picLocks noChangeAspect="1" noChangeArrowheads="1"/>
+          </p:cNvPicPr>
+          <p:nvPr/>
+        </p:nvPicPr>
+        <p:blipFill>
+          <a:blip r:embed="rId3">
+            <a:extLst>
+              <a:ext uri="{28A0092B-C50C-407E-A947-70E740481C1C}">
+                <a14:useLocalDpi xmlns:a14="http://schemas.microsoft.com/office/drawing/2010/main" val="0"/>
+              </a:ext>
+            </a:extLst>
+          </a:blip>
+          <a:srcRect/>
+          <a:stretch>
+            <a:fillRect/>
+          </a:stretch>
+        </p:blipFill>
+        <p:spPr bwMode="auto">
+          <a:xfrm>
+            <a:off x="506542" y="980184"/>
+            <a:ext cx="8114478" cy="3729367"/>
+          </a:xfrm>
+          <a:prstGeom prst="rect">
+            <a:avLst/>
+          </a:prstGeom>
+          <a:noFill/>
+          <a:ln>
+            <a:noFill/>
+          </a:ln>
+          <a:effectLst/>
+          <a:extLst>
+            <a:ext uri="{909E8E84-426E-40DD-AFC4-6F175D3DCCD1}">
+              <a14:hiddenFill xmlns:a14="http://schemas.microsoft.com/office/drawing/2010/main">
+                <a:solidFill>
+                  <a:schemeClr val="accent1"/>
+                </a:solidFill>
+              </a14:hiddenFill>
+            </a:ext>
+            <a:ext uri="{91240B29-F687-4F45-9708-019B960494DF}">
+              <a14:hiddenLine xmlns:a14="http://schemas.microsoft.com/office/drawing/2010/main" w="9525">
+                <a:solidFill>
+                  <a:schemeClr val="tx1"/>
+                </a:solidFill>
+                <a:miter lim="800000"/>
+                <a:headEnd/>
+                <a:tailEnd/>
+              </a14:hiddenLine>
+            </a:ext>
+            <a:ext uri="{AF507438-7753-43E0-B8FC-AC1667EBCBE1}">
+              <a14:hiddenEffects xmlns:a14="http://schemas.microsoft.com/office/drawing/2010/main">
+                <a:effectLst>
+                  <a:outerShdw dist="35921" dir="2700000" algn="ctr" rotWithShape="0">
+                    <a:schemeClr val="bg2"/>
+                  </a:outerShdw>
+                </a:effectLst>
+              </a14:hiddenEffects>
+            </a:ext>
+          </a:extLst>
+        </p:spPr>
+      </p:pic>
+    </p:spTree>
+    <p:extLst>
+      <p:ext uri="{BB962C8B-B14F-4D97-AF65-F5344CB8AC3E}">
+        <p14:creationId xmlns:p14="http://schemas.microsoft.com/office/powerpoint/2010/main" val="1728944211"/>
+      </p:ext>
+    </p:extLst>
+  </p:cSld>
+  <p:clrMapOvr>
+    <a:masterClrMapping/>
+  </p:clrMapOvr>
+</p:sld>
+</file>
+
+<file path=ppt/slides/slide8.xml><?xml version="1.0" encoding="utf-8"?>
+<p:sld xmlns:a="http://schemas.openxmlformats.org/drawingml/2006/main" xmlns:r="http://schemas.openxmlformats.org/officeDocument/2006/relationships" xmlns:p="http://schemas.openxmlformats.org/presentationml/2006/main">
+  <p:cSld>
+    <p:spTree>
+      <p:nvGrpSpPr>
+        <p:cNvPr id="1" name=""/>
+        <p:cNvGrpSpPr/>
+        <p:nvPr/>
+      </p:nvGrpSpPr>
+      <p:grpSpPr>
+        <a:xfrm>
+          <a:off x="0" y="0"/>
+          <a:ext cx="0" cy="0"/>
+          <a:chOff x="0" y="0"/>
+          <a:chExt cx="0" cy="0"/>
+        </a:xfrm>
+      </p:grpSpPr>
+      <p:sp>
+        <p:nvSpPr>
+          <p:cNvPr id="2" name="Text 0"/>
+          <p:cNvSpPr/>
+          <p:nvPr/>
+        </p:nvSpPr>
+        <p:spPr>
+          <a:xfrm>
+            <a:off x="457200" y="274320"/>
+            <a:ext cx="8229600" cy="548640"/>
+          </a:xfrm>
+          <a:prstGeom prst="rect">
+            <a:avLst/>
+          </a:prstGeom>
+          <a:noFill/>
+          <a:ln/>
+        </p:spPr>
+        <p:txBody>
+          <a:bodyPr wrap="square" lIns="0" tIns="0" rIns="0" bIns="0" rtlCol="0" anchor="ctr"/>
+          <a:lstStyle/>
+          <a:p>
+            <a:pPr marL="0" indent="0">
+              <a:buNone/>
+            </a:pPr>
+            <a:r>
+              <a:rPr lang="en-US" sz="2800" b="1" dirty="0" smtClean="0">
+                <a:solidFill>
+                  <a:srgbClr val="1E2761"/>
+                </a:solidFill>
+                <a:latin typeface="Calibri" pitchFamily="34" charset="0"/>
+                <a:ea typeface="Calibri" pitchFamily="34" charset="-122"/>
+                <a:cs typeface="Calibri" pitchFamily="34" charset="-120"/>
+              </a:rPr>
+              <a:t>Execution Screenshots</a:t>
+            </a:r>
+            <a:endParaRPr lang="en-US" sz="2800" dirty="0"/>
+          </a:p>
+        </p:txBody>
+      </p:sp>
+      <p:sp>
+        <p:nvSpPr>
+          <p:cNvPr id="37" name="Shape 35"/>
+          <p:cNvSpPr/>
+          <p:nvPr/>
+        </p:nvSpPr>
+        <p:spPr>
+          <a:xfrm>
+            <a:off x="0" y="4892040"/>
+            <a:ext cx="9144000" cy="251460"/>
+          </a:xfrm>
+          <a:prstGeom prst="rect">
+            <a:avLst/>
+          </a:prstGeom>
+          <a:solidFill>
+            <a:srgbClr val="1E2761"/>
+          </a:solidFill>
+          <a:ln w="12700">
+            <a:solidFill>
+              <a:srgbClr val="1E2761"/>
+            </a:solidFill>
+            <a:prstDash val="solid"/>
+          </a:ln>
+        </p:spPr>
+      </p:sp>
+      <p:sp>
+        <p:nvSpPr>
+          <p:cNvPr id="38" name="Text 36"/>
+          <p:cNvSpPr/>
+          <p:nvPr/>
+        </p:nvSpPr>
+        <p:spPr>
+          <a:xfrm>
+            <a:off x="457200" y="4892040"/>
+            <a:ext cx="8229600" cy="251460"/>
+          </a:xfrm>
+          <a:prstGeom prst="rect">
+            <a:avLst/>
+          </a:prstGeom>
+          <a:noFill/>
+          <a:ln/>
+        </p:spPr>
+        <p:txBody>
+          <a:bodyPr wrap="square" lIns="0" tIns="0" rIns="0" bIns="0" rtlCol="0" anchor="ctr"/>
+          <a:lstStyle/>
+          <a:p>
+            <a:pPr marL="0" indent="0" algn="ctr">
+              <a:buNone/>
+            </a:pPr>
+            <a:r>
+              <a:rPr lang="en-US" sz="1000" dirty="0">
+                <a:solidFill>
+                  <a:srgbClr val="FFFFFF"/>
+                </a:solidFill>
+              </a:rPr>
+              <a:t>Jira → GitLab Sync Service  |  POC</a:t>
+            </a:r>
+            <a:endParaRPr lang="en-US" sz="1000" dirty="0"/>
+          </a:p>
+        </p:txBody>
+      </p:sp>
+      <p:pic>
+        <p:nvPicPr>
+          <p:cNvPr id="1026" name="Picture 2"/>
+          <p:cNvPicPr>
+            <a:picLocks noChangeAspect="1" noChangeArrowheads="1"/>
+          </p:cNvPicPr>
+          <p:nvPr/>
+        </p:nvPicPr>
+        <p:blipFill>
+          <a:blip r:embed="rId3">
+            <a:extLst>
+              <a:ext uri="{28A0092B-C50C-407E-A947-70E740481C1C}">
+                <a14:useLocalDpi xmlns:a14="http://schemas.microsoft.com/office/drawing/2010/main" val="0"/>
+              </a:ext>
+            </a:extLst>
+          </a:blip>
+          <a:srcRect/>
+          <a:stretch>
+            <a:fillRect/>
+          </a:stretch>
+        </p:blipFill>
+        <p:spPr bwMode="auto">
+          <a:xfrm>
+            <a:off x="480220" y="993341"/>
+            <a:ext cx="7999354" cy="3644443"/>
+          </a:xfrm>
+          <a:prstGeom prst="rect">
+            <a:avLst/>
+          </a:prstGeom>
+          <a:noFill/>
+          <a:ln>
+            <a:noFill/>
+          </a:ln>
+          <a:effectLst/>
+          <a:extLst>
+            <a:ext uri="{909E8E84-426E-40DD-AFC4-6F175D3DCCD1}">
+              <a14:hiddenFill xmlns:a14="http://schemas.microsoft.com/office/drawing/2010/main">
+                <a:solidFill>
+                  <a:schemeClr val="accent1"/>
+                </a:solidFill>
+              </a14:hiddenFill>
+            </a:ext>
+            <a:ext uri="{91240B29-F687-4F45-9708-019B960494DF}">
+              <a14:hiddenLine xmlns:a14="http://schemas.microsoft.com/office/drawing/2010/main" w="9525">
+                <a:solidFill>
+                  <a:schemeClr val="tx1"/>
+                </a:solidFill>
+                <a:miter lim="800000"/>
+                <a:headEnd/>
+                <a:tailEnd/>
+              </a14:hiddenLine>
+            </a:ext>
+            <a:ext uri="{AF507438-7753-43E0-B8FC-AC1667EBCBE1}">
+              <a14:hiddenEffects xmlns:a14="http://schemas.microsoft.com/office/drawing/2010/main">
+                <a:effectLst>
+                  <a:outerShdw dist="35921" dir="2700000" algn="ctr" rotWithShape="0">
+                    <a:schemeClr val="bg2"/>
+                  </a:outerShdw>
+                </a:effectLst>
+              </a14:hiddenEffects>
+            </a:ext>
+          </a:extLst>
+        </p:spPr>
+      </p:pic>
+    </p:spTree>
+    <p:extLst>
+      <p:ext uri="{BB962C8B-B14F-4D97-AF65-F5344CB8AC3E}">
+        <p14:creationId xmlns:p14="http://schemas.microsoft.com/office/powerpoint/2010/main" val="880739573"/>
+      </p:ext>
+    </p:extLst>
+  </p:cSld>
+  <p:clrMapOvr>
+    <a:masterClrMapping/>
+  </p:clrMapOvr>
+</p:sld>
+</file>
+
+<file path=ppt/slides/slide9.xml><?xml version="1.0" encoding="utf-8"?>
+<p:sld xmlns:a="http://schemas.openxmlformats.org/drawingml/2006/main" xmlns:r="http://schemas.openxmlformats.org/officeDocument/2006/relationships" xmlns:p="http://schemas.openxmlformats.org/presentationml/2006/main">
+  <p:cSld>
+    <p:spTree>
+      <p:nvGrpSpPr>
+        <p:cNvPr id="1" name=""/>
+        <p:cNvGrpSpPr/>
+        <p:nvPr/>
+      </p:nvGrpSpPr>
+      <p:grpSpPr>
+        <a:xfrm>
+          <a:off x="0" y="0"/>
+          <a:ext cx="0" cy="0"/>
+          <a:chOff x="0" y="0"/>
+          <a:chExt cx="0" cy="0"/>
+        </a:xfrm>
+      </p:grpSpPr>
+      <p:sp>
+        <p:nvSpPr>
+          <p:cNvPr id="2" name="Text 0"/>
+          <p:cNvSpPr/>
+          <p:nvPr/>
+        </p:nvSpPr>
+        <p:spPr>
+          <a:xfrm>
+            <a:off x="457200" y="274320"/>
+            <a:ext cx="8229600" cy="548640"/>
+          </a:xfrm>
+          <a:prstGeom prst="rect">
+            <a:avLst/>
+          </a:prstGeom>
+          <a:noFill/>
+          <a:ln/>
+        </p:spPr>
+        <p:txBody>
+          <a:bodyPr wrap="square" lIns="0" tIns="0" rIns="0" bIns="0" rtlCol="0" anchor="ctr"/>
+          <a:lstStyle/>
+          <a:p>
+            <a:pPr marL="0" indent="0">
+              <a:buNone/>
+            </a:pPr>
+            <a:r>
+              <a:rPr lang="en-US" sz="2800" b="1" dirty="0" smtClean="0">
+                <a:solidFill>
+                  <a:srgbClr val="1E2761"/>
+                </a:solidFill>
+                <a:latin typeface="Calibri" pitchFamily="34" charset="0"/>
+                <a:ea typeface="Calibri" pitchFamily="34" charset="-122"/>
+                <a:cs typeface="Calibri" pitchFamily="34" charset="-120"/>
+              </a:rPr>
+              <a:t>Jira Tickets - Screenshot</a:t>
+            </a:r>
+            <a:endParaRPr lang="en-US" sz="2800" dirty="0"/>
+          </a:p>
+        </p:txBody>
+      </p:sp>
+      <p:sp>
+        <p:nvSpPr>
+          <p:cNvPr id="37" name="Shape 35"/>
+          <p:cNvSpPr/>
+          <p:nvPr/>
+        </p:nvSpPr>
+        <p:spPr>
+          <a:xfrm>
+            <a:off x="0" y="4892040"/>
+            <a:ext cx="9144000" cy="251460"/>
+          </a:xfrm>
+          <a:prstGeom prst="rect">
+            <a:avLst/>
+          </a:prstGeom>
+          <a:solidFill>
+            <a:srgbClr val="1E2761"/>
+          </a:solidFill>
+          <a:ln w="12700">
+            <a:solidFill>
+              <a:srgbClr val="1E2761"/>
+            </a:solidFill>
+            <a:prstDash val="solid"/>
+          </a:ln>
+        </p:spPr>
+      </p:sp>
+      <p:sp>
+        <p:nvSpPr>
+          <p:cNvPr id="38" name="Text 36"/>
+          <p:cNvSpPr/>
+          <p:nvPr/>
+        </p:nvSpPr>
+        <p:spPr>
+          <a:xfrm>
+            <a:off x="457200" y="4892040"/>
+            <a:ext cx="8229600" cy="251460"/>
+          </a:xfrm>
+          <a:prstGeom prst="rect">
+            <a:avLst/>
+          </a:prstGeom>
+          <a:noFill/>
+          <a:ln/>
+        </p:spPr>
+        <p:txBody>
+          <a:bodyPr wrap="square" lIns="0" tIns="0" rIns="0" bIns="0" rtlCol="0" anchor="ctr"/>
+          <a:lstStyle/>
+          <a:p>
+            <a:pPr marL="0" indent="0" algn="ctr">
+              <a:buNone/>
+            </a:pPr>
+            <a:r>
+              <a:rPr lang="en-US" sz="1000" dirty="0">
+                <a:solidFill>
+                  <a:srgbClr val="FFFFFF"/>
+                </a:solidFill>
+              </a:rPr>
+              <a:t>Jira → GitLab Sync Service  |  POC</a:t>
+            </a:r>
+            <a:endParaRPr lang="en-US" sz="1000" dirty="0"/>
+          </a:p>
+        </p:txBody>
+      </p:sp>
+      <p:pic>
+        <p:nvPicPr>
+          <p:cNvPr id="2050" name="Picture 2"/>
+          <p:cNvPicPr>
+            <a:picLocks noChangeAspect="1" noChangeArrowheads="1"/>
+          </p:cNvPicPr>
+          <p:nvPr/>
+        </p:nvPicPr>
+        <p:blipFill>
+          <a:blip r:embed="rId3">
+            <a:extLst>
+              <a:ext uri="{28A0092B-C50C-407E-A947-70E740481C1C}">
+                <a14:useLocalDpi xmlns:a14="http://schemas.microsoft.com/office/drawing/2010/main" val="0"/>
+              </a:ext>
+            </a:extLst>
+          </a:blip>
+          <a:srcRect/>
+          <a:stretch>
+            <a:fillRect/>
+          </a:stretch>
+        </p:blipFill>
+        <p:spPr bwMode="auto">
+          <a:xfrm>
+            <a:off x="457200" y="901328"/>
+            <a:ext cx="8229600" cy="3919442"/>
+          </a:xfrm>
+          <a:prstGeom prst="rect">
+            <a:avLst/>
+          </a:prstGeom>
+          <a:noFill/>
+          <a:ln>
+            <a:noFill/>
+          </a:ln>
+          <a:effectLst/>
+          <a:extLst>
+            <a:ext uri="{909E8E84-426E-40DD-AFC4-6F175D3DCCD1}">
+              <a14:hiddenFill xmlns:a14="http://schemas.microsoft.com/office/drawing/2010/main">
+                <a:solidFill>
+                  <a:schemeClr val="accent1"/>
+                </a:solidFill>
+              </a14:hiddenFill>
+            </a:ext>
+            <a:ext uri="{91240B29-F687-4F45-9708-019B960494DF}">
+              <a14:hiddenLine xmlns:a14="http://schemas.microsoft.com/office/drawing/2010/main" w="9525">
+                <a:solidFill>
+                  <a:schemeClr val="tx1"/>
+                </a:solidFill>
+                <a:miter lim="800000"/>
+                <a:headEnd/>
+                <a:tailEnd/>
+              </a14:hiddenLine>
+            </a:ext>
+            <a:ext uri="{AF507438-7753-43E0-B8FC-AC1667EBCBE1}">
+              <a14:hiddenEffects xmlns:a14="http://schemas.microsoft.com/office/drawing/2010/main">
+                <a:effectLst>
+                  <a:outerShdw dist="35921" dir="2700000" algn="ctr" rotWithShape="0">
+                    <a:schemeClr val="bg2"/>
+                  </a:outerShdw>
+                </a:effectLst>
+              </a14:hiddenEffects>
+            </a:ext>
+          </a:extLst>
+        </p:spPr>
+      </p:pic>
+    </p:spTree>
+    <p:extLst>
+      <p:ext uri="{BB962C8B-B14F-4D97-AF65-F5344CB8AC3E}">
+        <p14:creationId xmlns:p14="http://schemas.microsoft.com/office/powerpoint/2010/main" val="4103483939"/>
+      </p:ext>
+    </p:extLst>
   </p:cSld>
   <p:clrMapOvr>
     <a:masterClrMapping/>
@@ -7452,7 +9135,7 @@
     </a:clrScheme>
     <a:fontScheme name="Office">
       <a:majorFont>
-        <a:latin typeface="Calibri Light" panose="020F0302020204030204"/>
+        <a:latin typeface="Calibri Light"/>
         <a:ea typeface=""/>
         <a:cs typeface=""/>
         <a:font script="Jpan" typeface="游ゴシック Light"/>
@@ -7504,7 +9187,7 @@
         <a:font script="Tfng" typeface="Ebrima"/>
       </a:majorFont>
       <a:minorFont>
-        <a:latin typeface="Calibri" panose="020F0502020204030204"/>
+        <a:latin typeface="Calibri"/>
         <a:ea typeface=""/>
         <a:cs typeface=""/>
         <a:font script="Jpan" typeface="游ゴシック"/>
@@ -7698,8 +9381,293 @@
   <a:extraClrSchemeLst/>
   <a:extLst>
     <a:ext uri="{05A4C25C-085E-4340-85A3-A5531E510DB2}">
-      <thm15:themeFamily xmlns:thm15="http://schemas.microsoft.com/office/thememl/2012/main" name="Office Theme" id="{62F939B6-93AF-4DB8-9C6B-D6C7DFDC589F}" vid="{4A3C46E8-61CC-4603-A589-7422A47A8E4A}"/>
+      <thm15:themeFamily xmlns="" xmlns:thm15="http://schemas.microsoft.com/office/thememl/2012/main" name="Office Theme" id="{62F939B6-93AF-4DB8-9C6B-D6C7DFDC589F}" vid="{4A3C46E8-61CC-4603-A589-7422A47A8E4A}"/>
     </a:ext>
   </a:extLst>
 </a:theme>
+</file>
+
+<file path=ppt/theme/theme2.xml><?xml version="1.0" encoding="utf-8"?>
+<a:theme xmlns:a="http://schemas.openxmlformats.org/drawingml/2006/main" name="Office Theme">
+  <a:themeElements>
+    <a:clrScheme name="Office">
+      <a:dk1>
+        <a:sysClr val="windowText" lastClr="000000"/>
+      </a:dk1>
+      <a:lt1>
+        <a:sysClr val="window" lastClr="FFFFFF"/>
+      </a:lt1>
+      <a:dk2>
+        <a:srgbClr val="1F497D"/>
+      </a:dk2>
+      <a:lt2>
+        <a:srgbClr val="EEECE1"/>
+      </a:lt2>
+      <a:accent1>
+        <a:srgbClr val="4F81BD"/>
+      </a:accent1>
+      <a:accent2>
+        <a:srgbClr val="C0504D"/>
+      </a:accent2>
+      <a:accent3>
+        <a:srgbClr val="9BBB59"/>
+      </a:accent3>
+      <a:accent4>
+        <a:srgbClr val="8064A2"/>
+      </a:accent4>
+      <a:accent5>
+        <a:srgbClr val="4BACC6"/>
+      </a:accent5>
+      <a:accent6>
+        <a:srgbClr val="F79646"/>
+      </a:accent6>
+      <a:hlink>
+        <a:srgbClr val="0000FF"/>
+      </a:hlink>
+      <a:folHlink>
+        <a:srgbClr val="800080"/>
+      </a:folHlink>
+    </a:clrScheme>
+    <a:fontScheme name="Office">
+      <a:majorFont>
+        <a:latin typeface="Calibri"/>
+        <a:ea typeface=""/>
+        <a:cs typeface=""/>
+        <a:font script="Jpan" typeface="ＭＳ Ｐゴシック"/>
+        <a:font script="Hang" typeface="맑은 고딕"/>
+        <a:font script="Hans" typeface="宋体"/>
+        <a:font script="Hant" typeface="新細明體"/>
+        <a:font script="Arab" typeface="Times New Roman"/>
+        <a:font script="Hebr" typeface="Times New Roman"/>
+        <a:font script="Thai" typeface="Angsana New"/>
+        <a:font script="Ethi" typeface="Nyala"/>
+        <a:font script="Beng" typeface="Vrinda"/>
+        <a:font script="Gujr" typeface="Shruti"/>
+        <a:font script="Khmr" typeface="MoolBoran"/>
+        <a:font script="Knda" typeface="Tunga"/>
+        <a:font script="Guru" typeface="Raavi"/>
+        <a:font script="Cans" typeface="Euphemia"/>
+        <a:font script="Cher" typeface="Plantagenet Cherokee"/>
+        <a:font script="Yiii" typeface="Microsoft Yi Baiti"/>
+        <a:font script="Tibt" typeface="Microsoft Himalaya"/>
+        <a:font script="Thaa" typeface="MV Boli"/>
+        <a:font script="Deva" typeface="Mangal"/>
+        <a:font script="Telu" typeface="Gautami"/>
+        <a:font script="Taml" typeface="Latha"/>
+        <a:font script="Syrc" typeface="Estrangelo Edessa"/>
+        <a:font script="Orya" typeface="Kalinga"/>
+        <a:font script="Mlym" typeface="Kartika"/>
+        <a:font script="Laoo" typeface="DokChampa"/>
+        <a:font script="Sinh" typeface="Iskoola Pota"/>
+        <a:font script="Mong" typeface="Mongolian Baiti"/>
+        <a:font script="Viet" typeface="Times New Roman"/>
+        <a:font script="Uigh" typeface="Microsoft Uighur"/>
+        <a:font script="Geor" typeface="Sylfaen"/>
+      </a:majorFont>
+      <a:minorFont>
+        <a:latin typeface="Calibri"/>
+        <a:ea typeface=""/>
+        <a:cs typeface=""/>
+        <a:font script="Jpan" typeface="ＭＳ Ｐゴシック"/>
+        <a:font script="Hang" typeface="맑은 고딕"/>
+        <a:font script="Hans" typeface="宋体"/>
+        <a:font script="Hant" typeface="新細明體"/>
+        <a:font script="Arab" typeface="Arial"/>
+        <a:font script="Hebr" typeface="Arial"/>
+        <a:font script="Thai" typeface="Cordia New"/>
+        <a:font script="Ethi" typeface="Nyala"/>
+        <a:font script="Beng" typeface="Vrinda"/>
+        <a:font script="Gujr" typeface="Shruti"/>
+        <a:font script="Khmr" typeface="DaunPenh"/>
+        <a:font script="Knda" typeface="Tunga"/>
+        <a:font script="Guru" typeface="Raavi"/>
+        <a:font script="Cans" typeface="Euphemia"/>
+        <a:font script="Cher" typeface="Plantagenet Cherokee"/>
+        <a:font script="Yiii" typeface="Microsoft Yi Baiti"/>
+        <a:font script="Tibt" typeface="Microsoft Himalaya"/>
+        <a:font script="Thaa" typeface="MV Boli"/>
+        <a:font script="Deva" typeface="Mangal"/>
+        <a:font script="Telu" typeface="Gautami"/>
+        <a:font script="Taml" typeface="Latha"/>
+        <a:font script="Syrc" typeface="Estrangelo Edessa"/>
+        <a:font script="Orya" typeface="Kalinga"/>
+        <a:font script="Mlym" typeface="Kartika"/>
+        <a:font script="Laoo" typeface="DokChampa"/>
+        <a:font script="Sinh" typeface="Iskoola Pota"/>
+        <a:font script="Mong" typeface="Mongolian Baiti"/>
+        <a:font script="Viet" typeface="Arial"/>
+        <a:font script="Uigh" typeface="Microsoft Uighur"/>
+        <a:font script="Geor" typeface="Sylfaen"/>
+      </a:minorFont>
+    </a:fontScheme>
+    <a:fmtScheme name="Office">
+      <a:fillStyleLst>
+        <a:solidFill>
+          <a:schemeClr val="phClr"/>
+        </a:solidFill>
+        <a:gradFill rotWithShape="1">
+          <a:gsLst>
+            <a:gs pos="0">
+              <a:schemeClr val="phClr">
+                <a:tint val="50000"/>
+                <a:satMod val="300000"/>
+              </a:schemeClr>
+            </a:gs>
+            <a:gs pos="35000">
+              <a:schemeClr val="phClr">
+                <a:tint val="37000"/>
+                <a:satMod val="300000"/>
+              </a:schemeClr>
+            </a:gs>
+            <a:gs pos="100000">
+              <a:schemeClr val="phClr">
+                <a:tint val="15000"/>
+                <a:satMod val="350000"/>
+              </a:schemeClr>
+            </a:gs>
+          </a:gsLst>
+          <a:lin ang="16200000" scaled="1"/>
+        </a:gradFill>
+        <a:gradFill rotWithShape="1">
+          <a:gsLst>
+            <a:gs pos="0">
+              <a:schemeClr val="phClr">
+                <a:shade val="51000"/>
+                <a:satMod val="130000"/>
+              </a:schemeClr>
+            </a:gs>
+            <a:gs pos="80000">
+              <a:schemeClr val="phClr">
+                <a:shade val="93000"/>
+                <a:satMod val="130000"/>
+              </a:schemeClr>
+            </a:gs>
+            <a:gs pos="100000">
+              <a:schemeClr val="phClr">
+                <a:shade val="94000"/>
+                <a:satMod val="135000"/>
+              </a:schemeClr>
+            </a:gs>
+          </a:gsLst>
+          <a:lin ang="16200000" scaled="0"/>
+        </a:gradFill>
+      </a:fillStyleLst>
+      <a:lnStyleLst>
+        <a:ln w="9525" cap="flat" cmpd="sng" algn="ctr">
+          <a:solidFill>
+            <a:schemeClr val="phClr">
+              <a:shade val="95000"/>
+              <a:satMod val="105000"/>
+            </a:schemeClr>
+          </a:solidFill>
+          <a:prstDash val="solid"/>
+        </a:ln>
+        <a:ln w="25400" cap="flat" cmpd="sng" algn="ctr">
+          <a:solidFill>
+            <a:schemeClr val="phClr"/>
+          </a:solidFill>
+          <a:prstDash val="solid"/>
+        </a:ln>
+        <a:ln w="38100" cap="flat" cmpd="sng" algn="ctr">
+          <a:solidFill>
+            <a:schemeClr val="phClr"/>
+          </a:solidFill>
+          <a:prstDash val="solid"/>
+        </a:ln>
+      </a:lnStyleLst>
+      <a:effectStyleLst>
+        <a:effectStyle>
+          <a:effectLst>
+            <a:outerShdw blurRad="40000" dist="20000" dir="5400000" rotWithShape="0">
+              <a:srgbClr val="000000">
+                <a:alpha val="38000"/>
+              </a:srgbClr>
+            </a:outerShdw>
+          </a:effectLst>
+        </a:effectStyle>
+        <a:effectStyle>
+          <a:effectLst>
+            <a:outerShdw blurRad="40000" dist="23000" dir="5400000" rotWithShape="0">
+              <a:srgbClr val="000000">
+                <a:alpha val="35000"/>
+              </a:srgbClr>
+            </a:outerShdw>
+          </a:effectLst>
+        </a:effectStyle>
+        <a:effectStyle>
+          <a:effectLst>
+            <a:outerShdw blurRad="40000" dist="23000" dir="5400000" rotWithShape="0">
+              <a:srgbClr val="000000">
+                <a:alpha val="35000"/>
+              </a:srgbClr>
+            </a:outerShdw>
+          </a:effectLst>
+          <a:scene3d>
+            <a:camera prst="orthographicFront">
+              <a:rot lat="0" lon="0" rev="0"/>
+            </a:camera>
+            <a:lightRig rig="threePt" dir="t">
+              <a:rot lat="0" lon="0" rev="1200000"/>
+            </a:lightRig>
+          </a:scene3d>
+          <a:sp3d>
+            <a:bevelT w="63500" h="25400"/>
+          </a:sp3d>
+        </a:effectStyle>
+      </a:effectStyleLst>
+      <a:bgFillStyleLst>
+        <a:solidFill>
+          <a:schemeClr val="phClr"/>
+        </a:solidFill>
+        <a:gradFill rotWithShape="1">
+          <a:gsLst>
+            <a:gs pos="0">
+              <a:schemeClr val="phClr">
+                <a:tint val="40000"/>
+                <a:satMod val="350000"/>
+              </a:schemeClr>
+            </a:gs>
+            <a:gs pos="40000">
+              <a:schemeClr val="phClr">
+                <a:tint val="45000"/>
+                <a:shade val="99000"/>
+                <a:satMod val="350000"/>
+              </a:schemeClr>
+            </a:gs>
+            <a:gs pos="100000">
+              <a:schemeClr val="phClr">
+                <a:shade val="20000"/>
+                <a:satMod val="255000"/>
+              </a:schemeClr>
+            </a:gs>
+          </a:gsLst>
+          <a:path path="circle">
+            <a:fillToRect l="50000" t="-80000" r="50000" b="180000"/>
+          </a:path>
+        </a:gradFill>
+        <a:gradFill rotWithShape="1">
+          <a:gsLst>
+            <a:gs pos="0">
+              <a:schemeClr val="phClr">
+                <a:tint val="80000"/>
+                <a:satMod val="300000"/>
+              </a:schemeClr>
+            </a:gs>
+            <a:gs pos="100000">
+              <a:schemeClr val="phClr">
+                <a:shade val="30000"/>
+                <a:satMod val="200000"/>
+              </a:schemeClr>
+            </a:gs>
+          </a:gsLst>
+          <a:path path="circle">
+            <a:fillToRect l="50000" t="50000" r="50000" b="50000"/>
+          </a:path>
+        </a:gradFill>
+      </a:bgFillStyleLst>
+    </a:fmtScheme>
+  </a:themeElements>
+  <a:objectDefaults/>
+  <a:extraClrSchemeLst/>
+</a:theme>
 </file>